--- a/02_Imbalanced data.pptx
+++ b/02_Imbalanced data.pptx
@@ -5,16 +5,19 @@
     <p:sldMasterId id="2147483660" r:id="rId1"/>
   </p:sldMasterIdLst>
   <p:notesMasterIdLst>
-    <p:notesMasterId r:id="rId6"/>
+    <p:notesMasterId r:id="rId9"/>
   </p:notesMasterIdLst>
   <p:handoutMasterIdLst>
-    <p:handoutMasterId r:id="rId7"/>
+    <p:handoutMasterId r:id="rId10"/>
   </p:handoutMasterIdLst>
   <p:sldIdLst>
     <p:sldId id="256" r:id="rId2"/>
     <p:sldId id="1136" r:id="rId3"/>
     <p:sldId id="1138" r:id="rId4"/>
     <p:sldId id="1139" r:id="rId5"/>
+    <p:sldId id="1142" r:id="rId6"/>
+    <p:sldId id="1140" r:id="rId7"/>
+    <p:sldId id="1141" r:id="rId8"/>
   </p:sldIdLst>
   <p:sldSz cx="12192000" cy="6858000"/>
   <p:notesSz cx="6858000" cy="9144000"/>
@@ -126,6 +129,9 @@
             <p14:sldId id="1136"/>
             <p14:sldId id="1138"/>
             <p14:sldId id="1139"/>
+            <p14:sldId id="1142"/>
+            <p14:sldId id="1140"/>
+            <p14:sldId id="1141"/>
           </p14:sldIdLst>
         </p14:section>
         <p14:section name="자세한 정보" id="{2CC34DB2-6590-42C0-AD4B-A04C6060184E}">
@@ -250,7 +256,7 @@
                 <a:latin typeface="맑은 고딕" panose="020B0503020000020004" pitchFamily="50" charset="-127"/>
                 <a:ea typeface="맑은 고딕" panose="020B0503020000020004" pitchFamily="50" charset="-127"/>
               </a:rPr>
-              <a:t>2026-07-14</a:t>
+              <a:t>2026-07-15</a:t>
             </a:fld>
             <a:endParaRPr lang="ko-KR" altLang="en-US">
               <a:latin typeface="맑은 고딕" panose="020B0503020000020004" pitchFamily="50" charset="-127"/>
@@ -436,7 +442,7 @@
           <a:p>
             <a:fld id="{43E1C3DD-4A19-441D-907C-380838DB51C4}" type="datetime1">
               <a:rPr lang="ko-KR" altLang="en-US" noProof="0" smtClean="0"/>
-              <a:t>2026-07-14</a:t>
+              <a:t>2026-07-15</a:t>
             </a:fld>
             <a:endParaRPr lang="ko-KR" altLang="en-US" noProof="0"/>
           </a:p>
@@ -1284,7 +1290,7 @@
           <a:p>
             <a:fld id="{990475B5-67CA-4281-BDCA-DA943C3C8EB3}" type="datetime1">
               <a:rPr lang="ko-KR" altLang="en-US" noProof="0" smtClean="0"/>
-              <a:t>2026-07-14</a:t>
+              <a:t>2026-07-15</a:t>
             </a:fld>
             <a:endParaRPr lang="ko-KR" altLang="en-US" noProof="0"/>
           </a:p>
@@ -1938,7 +1944,7 @@
           <a:p>
             <a:fld id="{48A87A34-81AB-432B-8DAE-1953F412C126}" type="datetimeFigureOut">
               <a:rPr lang="en-US" smtClean="0"/>
-              <a:t>7/14/2026</a:t>
+              <a:t>7/15/2026</a:t>
             </a:fld>
             <a:endParaRPr lang="en-US" dirty="0"/>
           </a:p>
@@ -2234,7 +2240,7 @@
           <a:p>
             <a:fld id="{C655C81E-72E7-4D05-94B5-F45B321A525D}" type="datetime1">
               <a:rPr lang="ko-KR" altLang="en-US" noProof="0" smtClean="0"/>
-              <a:t>2026-07-14</a:t>
+              <a:t>2026-07-15</a:t>
             </a:fld>
             <a:endParaRPr lang="ko-KR" altLang="en-US" noProof="0" dirty="0">
               <a:latin typeface="맑은 고딕" panose="020B0503020000020004" pitchFamily="50" charset="-127"/>
@@ -3739,7 +3745,7 @@
         <p:spPr>
           <a:xfrm>
             <a:off x="628650" y="1265774"/>
-            <a:ext cx="11068050" cy="880819"/>
+            <a:ext cx="11068050" cy="793166"/>
           </a:xfrm>
           <a:prstGeom prst="rect">
             <a:avLst/>
@@ -3758,162 +3764,124 @@
               </a:lnSpc>
             </a:pPr>
             <a:r>
-              <a:rPr lang="en-US" altLang="ko-KR" dirty="0">
+              <a:rPr lang="en-US" altLang="ko-KR" sz="1600" dirty="0">
                 <a:latin typeface="D2Coding" panose="020B0609020101020101" pitchFamily="49" charset="-127"/>
                 <a:ea typeface="D2Coding" panose="020B0609020101020101" pitchFamily="49" charset="-127"/>
               </a:rPr>
               <a:t>test size </a:t>
             </a:r>
             <a:r>
-              <a:rPr lang="ko-KR" altLang="en-US" dirty="0">
+              <a:rPr lang="ko-KR" altLang="en-US" sz="1600" dirty="0">
                 <a:latin typeface="D2Coding" panose="020B0609020101020101" pitchFamily="49" charset="-127"/>
                 <a:ea typeface="D2Coding" panose="020B0609020101020101" pitchFamily="49" charset="-127"/>
               </a:rPr>
               <a:t>를 </a:t>
             </a:r>
             <a:r>
-              <a:rPr lang="en-US" altLang="ko-KR" dirty="0">
+              <a:rPr lang="en-US" altLang="ko-KR" sz="1600" dirty="0">
                 <a:latin typeface="D2Coding" panose="020B0609020101020101" pitchFamily="49" charset="-127"/>
                 <a:ea typeface="D2Coding" panose="020B0609020101020101" pitchFamily="49" charset="-127"/>
               </a:rPr>
               <a:t>0.1, 0.2, … </a:t>
             </a:r>
             <a:r>
-              <a:rPr lang="ko-KR" altLang="en-US" dirty="0">
+              <a:rPr lang="ko-KR" altLang="en-US" sz="1600" dirty="0">
                 <a:latin typeface="D2Coding" panose="020B0609020101020101" pitchFamily="49" charset="-127"/>
                 <a:ea typeface="D2Coding" panose="020B0609020101020101" pitchFamily="49" charset="-127"/>
               </a:rPr>
               <a:t>로</a:t>
             </a:r>
             <a:r>
-              <a:rPr lang="en-US" altLang="ko-KR" dirty="0">
+              <a:rPr lang="en-US" altLang="ko-KR" sz="1600" dirty="0">
                 <a:latin typeface="D2Coding" panose="020B0609020101020101" pitchFamily="49" charset="-127"/>
                 <a:ea typeface="D2Coding" panose="020B0609020101020101" pitchFamily="49" charset="-127"/>
               </a:rPr>
               <a:t> </a:t>
             </a:r>
             <a:r>
-              <a:rPr lang="ko-KR" altLang="en-US" dirty="0">
+              <a:rPr lang="ko-KR" altLang="en-US" sz="1600" dirty="0">
                 <a:latin typeface="D2Coding" panose="020B0609020101020101" pitchFamily="49" charset="-127"/>
                 <a:ea typeface="D2Coding" panose="020B0609020101020101" pitchFamily="49" charset="-127"/>
               </a:rPr>
               <a:t>늘렸을 경우 </a:t>
             </a:r>
             <a:r>
-              <a:rPr lang="en-US" altLang="ko-KR" dirty="0" err="1">
+              <a:rPr lang="en-US" altLang="ko-KR" sz="1600" dirty="0" err="1">
                 <a:latin typeface="D2Coding" panose="020B0609020101020101" pitchFamily="49" charset="-127"/>
                 <a:ea typeface="D2Coding" panose="020B0609020101020101" pitchFamily="49" charset="-127"/>
               </a:rPr>
               <a:t>randomforest</a:t>
             </a:r>
             <a:r>
-              <a:rPr lang="en-US" altLang="ko-KR" dirty="0">
+              <a:rPr lang="en-US" altLang="ko-KR" sz="1600" dirty="0">
                 <a:latin typeface="D2Coding" panose="020B0609020101020101" pitchFamily="49" charset="-127"/>
                 <a:ea typeface="D2Coding" panose="020B0609020101020101" pitchFamily="49" charset="-127"/>
               </a:rPr>
               <a:t> </a:t>
             </a:r>
             <a:r>
-              <a:rPr lang="ko-KR" altLang="en-US" dirty="0">
+              <a:rPr lang="ko-KR" altLang="en-US" sz="1600" dirty="0">
                 <a:latin typeface="D2Coding" panose="020B0609020101020101" pitchFamily="49" charset="-127"/>
                 <a:ea typeface="D2Coding" panose="020B0609020101020101" pitchFamily="49" charset="-127"/>
               </a:rPr>
               <a:t>예측모델 적용시 </a:t>
             </a:r>
             <a:r>
-              <a:rPr lang="en-US" altLang="ko-KR" dirty="0">
-                <a:latin typeface="D2Coding" panose="020B0609020101020101" pitchFamily="49" charset="-127"/>
-                <a:ea typeface="D2Coding" panose="020B0609020101020101" pitchFamily="49" charset="-127"/>
-              </a:rPr>
-              <a:t>confusion matrix(threshold = 0.5 </a:t>
-            </a:r>
-            <a:r>
-              <a:rPr lang="ko-KR" altLang="en-US" dirty="0">
-                <a:latin typeface="D2Coding" panose="020B0609020101020101" pitchFamily="49" charset="-127"/>
-                <a:ea typeface="D2Coding" panose="020B0609020101020101" pitchFamily="49" charset="-127"/>
-              </a:rPr>
-              <a:t>기준</a:t>
-            </a:r>
-            <a:r>
-              <a:rPr lang="en-US" altLang="ko-KR" dirty="0">
-                <a:latin typeface="D2Coding" panose="020B0609020101020101" pitchFamily="49" charset="-127"/>
-                <a:ea typeface="D2Coding" panose="020B0609020101020101" pitchFamily="49" charset="-127"/>
-              </a:rPr>
-              <a:t>)</a:t>
-            </a:r>
-            <a:r>
-              <a:rPr lang="ko-KR" altLang="en-US" dirty="0">
-                <a:latin typeface="D2Coding" panose="020B0609020101020101" pitchFamily="49" charset="-127"/>
-                <a:ea typeface="D2Coding" panose="020B0609020101020101" pitchFamily="49" charset="-127"/>
-              </a:rPr>
-              <a:t>를 비교 분석한 후 </a:t>
-            </a:r>
-            <a:r>
-              <a:rPr lang="en-US" altLang="ko-KR" dirty="0">
-                <a:latin typeface="D2Coding" panose="020B0609020101020101" pitchFamily="49" charset="-127"/>
-                <a:ea typeface="D2Coding" panose="020B0609020101020101" pitchFamily="49" charset="-127"/>
-              </a:rPr>
-              <a:t>confusion matrix</a:t>
-            </a:r>
-            <a:r>
-              <a:rPr lang="ko-KR" altLang="en-US" dirty="0">
-                <a:latin typeface="D2Coding" panose="020B0609020101020101" pitchFamily="49" charset="-127"/>
-                <a:ea typeface="D2Coding" panose="020B0609020101020101" pitchFamily="49" charset="-127"/>
-              </a:rPr>
-              <a:t>의 값이 달라지는 현상에 대한 이유를 설명하라</a:t>
-            </a:r>
-          </a:p>
-        </p:txBody>
-      </p:sp>
-      <p:sp>
-        <p:nvSpPr>
-          <p:cNvPr id="54" name="직사각형 53">
-            <a:extLst>
-              <a:ext uri="{FF2B5EF4-FFF2-40B4-BE49-F238E27FC236}">
-                <a16:creationId xmlns:a16="http://schemas.microsoft.com/office/drawing/2014/main" id="{E177DE91-851A-0585-F43E-66EA2E484116}"/>
-              </a:ext>
-            </a:extLst>
-          </p:cNvPr>
-          <p:cNvSpPr/>
-          <p:nvPr/>
-        </p:nvSpPr>
-        <p:spPr>
-          <a:xfrm>
-            <a:off x="6534150" y="4924424"/>
-            <a:ext cx="1504950" cy="667801"/>
-          </a:xfrm>
-          <a:prstGeom prst="rect">
-            <a:avLst/>
-          </a:prstGeom>
-          <a:noFill/>
-          <a:ln w="19050">
-            <a:solidFill>
-              <a:srgbClr val="FF0000"/>
-            </a:solidFill>
-          </a:ln>
-        </p:spPr>
-        <p:style>
-          <a:lnRef idx="2">
-            <a:schemeClr val="accent1">
-              <a:shade val="15000"/>
-            </a:schemeClr>
-          </a:lnRef>
-          <a:fillRef idx="1">
-            <a:schemeClr val="accent1"/>
-          </a:fillRef>
-          <a:effectRef idx="0">
-            <a:schemeClr val="accent1"/>
-          </a:effectRef>
-          <a:fontRef idx="minor">
-            <a:schemeClr val="lt1"/>
-          </a:fontRef>
-        </p:style>
-        <p:txBody>
-          <a:bodyPr rtlCol="0" anchor="ctr"/>
-          <a:lstStyle/>
-          <a:p>
-            <a:pPr algn="ctr"/>
-            <a:endParaRPr lang="ko-KR" altLang="en-US"/>
+              <a:rPr lang="en-US" altLang="ko-KR" sz="1600" dirty="0">
+                <a:latin typeface="D2Coding" panose="020B0609020101020101" pitchFamily="49" charset="-127"/>
+                <a:ea typeface="D2Coding" panose="020B0609020101020101" pitchFamily="49" charset="-127"/>
+              </a:rPr>
+              <a:t>confusion</a:t>
+            </a:r>
+            <a:r>
+              <a:rPr lang="ko-KR" altLang="en-US" sz="1600" dirty="0">
+                <a:latin typeface="D2Coding" panose="020B0609020101020101" pitchFamily="49" charset="-127"/>
+                <a:ea typeface="D2Coding" panose="020B0609020101020101" pitchFamily="49" charset="-127"/>
+              </a:rPr>
+              <a:t> </a:t>
+            </a:r>
+            <a:r>
+              <a:rPr lang="en-US" altLang="ko-KR" sz="1600" dirty="0">
+                <a:latin typeface="D2Coding" panose="020B0609020101020101" pitchFamily="49" charset="-127"/>
+                <a:ea typeface="D2Coding" panose="020B0609020101020101" pitchFamily="49" charset="-127"/>
+              </a:rPr>
+              <a:t>matrix,</a:t>
+            </a:r>
+            <a:r>
+              <a:rPr lang="ko-KR" altLang="en-US" sz="1600" dirty="0">
+                <a:latin typeface="D2Coding" panose="020B0609020101020101" pitchFamily="49" charset="-127"/>
+                <a:ea typeface="D2Coding" panose="020B0609020101020101" pitchFamily="49" charset="-127"/>
+              </a:rPr>
+              <a:t> </a:t>
+            </a:r>
+            <a:r>
+              <a:rPr lang="en-US" altLang="ko-KR" sz="1600" dirty="0">
+                <a:latin typeface="D2Coding" panose="020B0609020101020101" pitchFamily="49" charset="-127"/>
+                <a:ea typeface="D2Coding" panose="020B0609020101020101" pitchFamily="49" charset="-127"/>
+              </a:rPr>
+              <a:t>classification report,</a:t>
+            </a:r>
+            <a:r>
+              <a:rPr lang="ko-KR" altLang="en-US" sz="1600" dirty="0">
+                <a:latin typeface="D2Coding" panose="020B0609020101020101" pitchFamily="49" charset="-127"/>
+                <a:ea typeface="D2Coding" panose="020B0609020101020101" pitchFamily="49" charset="-127"/>
+              </a:rPr>
+              <a:t> </a:t>
+            </a:r>
+            <a:r>
+              <a:rPr lang="en-US" altLang="ko-KR" sz="1600" dirty="0">
+                <a:latin typeface="D2Coding" panose="020B0609020101020101" pitchFamily="49" charset="-127"/>
+                <a:ea typeface="D2Coding" panose="020B0609020101020101" pitchFamily="49" charset="-127"/>
+              </a:rPr>
+              <a:t>AUROC</a:t>
+            </a:r>
+            <a:r>
+              <a:rPr lang="ko-KR" altLang="en-US" sz="1600" dirty="0">
+                <a:latin typeface="D2Coding" panose="020B0609020101020101" pitchFamily="49" charset="-127"/>
+                <a:ea typeface="D2Coding" panose="020B0609020101020101" pitchFamily="49" charset="-127"/>
+              </a:rPr>
+              <a:t> 등을 구한 후 토론하라</a:t>
+            </a:r>
           </a:p>
         </p:txBody>
       </p:sp>
@@ -4063,12 +4031,72 @@
           </a:p>
         </p:txBody>
       </p:sp>
+      <p:pic>
+        <p:nvPicPr>
+          <p:cNvPr id="5" name="그림 4">
+            <a:extLst>
+              <a:ext uri="{FF2B5EF4-FFF2-40B4-BE49-F238E27FC236}">
+                <a16:creationId xmlns:a16="http://schemas.microsoft.com/office/drawing/2014/main" id="{0F7C3500-3231-9460-AFAB-0A63F690D456}"/>
+              </a:ext>
+            </a:extLst>
+          </p:cNvPr>
+          <p:cNvPicPr>
+            <a:picLocks noChangeAspect="1"/>
+          </p:cNvPicPr>
+          <p:nvPr/>
+        </p:nvPicPr>
+        <p:blipFill>
+          <a:blip r:embed="rId2"/>
+          <a:stretch>
+            <a:fillRect/>
+          </a:stretch>
+        </p:blipFill>
+        <p:spPr>
+          <a:xfrm>
+            <a:off x="659891" y="1921760"/>
+            <a:ext cx="4992635" cy="3760479"/>
+          </a:xfrm>
+          <a:prstGeom prst="rect">
+            <a:avLst/>
+          </a:prstGeom>
+        </p:spPr>
+      </p:pic>
+      <p:pic>
+        <p:nvPicPr>
+          <p:cNvPr id="6" name="그림 5">
+            <a:extLst>
+              <a:ext uri="{FF2B5EF4-FFF2-40B4-BE49-F238E27FC236}">
+                <a16:creationId xmlns:a16="http://schemas.microsoft.com/office/drawing/2014/main" id="{51B5A8C2-0873-E99D-1458-26CF8763EBDE}"/>
+              </a:ext>
+            </a:extLst>
+          </p:cNvPr>
+          <p:cNvPicPr>
+            <a:picLocks noChangeAspect="1"/>
+          </p:cNvPicPr>
+          <p:nvPr/>
+        </p:nvPicPr>
+        <p:blipFill>
+          <a:blip r:embed="rId3"/>
+          <a:stretch>
+            <a:fillRect/>
+          </a:stretch>
+        </p:blipFill>
+        <p:spPr>
+          <a:xfrm>
+            <a:off x="6096001" y="1921760"/>
+            <a:ext cx="4221018" cy="3788093"/>
+          </a:xfrm>
+          <a:prstGeom prst="rect">
+            <a:avLst/>
+          </a:prstGeom>
+        </p:spPr>
+      </p:pic>
       <p:sp>
         <p:nvSpPr>
-          <p:cNvPr id="53" name="TextBox 52">
+          <p:cNvPr id="7" name="TextBox 6">
             <a:extLst>
               <a:ext uri="{FF2B5EF4-FFF2-40B4-BE49-F238E27FC236}">
-                <a16:creationId xmlns:a16="http://schemas.microsoft.com/office/drawing/2014/main" id="{CE57EDDA-0EF4-3BCF-2F5E-F94D5D91D008}"/>
+                <a16:creationId xmlns:a16="http://schemas.microsoft.com/office/drawing/2014/main" id="{E874BD8A-E97A-6177-505F-ACFE6D6196DC}"/>
               </a:ext>
             </a:extLst>
           </p:cNvPr>
@@ -4077,8 +4105,8 @@
         </p:nvSpPr>
         <p:spPr>
           <a:xfrm>
-            <a:off x="628650" y="1265774"/>
-            <a:ext cx="10638906" cy="465320"/>
+            <a:off x="5994400" y="5749348"/>
+            <a:ext cx="1826141" cy="338554"/>
           </a:xfrm>
           <a:prstGeom prst="rect">
             <a:avLst/>
@@ -4086,30 +4114,36 @@
           <a:noFill/>
         </p:spPr>
         <p:txBody>
-          <a:bodyPr wrap="square" rtlCol="0">
+          <a:bodyPr wrap="none" rtlCol="0">
             <a:spAutoFit/>
           </a:bodyPr>
           <a:lstStyle/>
           <a:p>
-            <a:pPr>
-              <a:lnSpc>
-                <a:spcPct val="150000"/>
-              </a:lnSpc>
-            </a:pPr>
-            <a:r>
-              <a:rPr lang="en-US" altLang="ko-KR" dirty="0">
-                <a:latin typeface="D2Coding" panose="020B0609020101020101" pitchFamily="49" charset="-127"/>
-                <a:ea typeface="D2Coding" panose="020B0609020101020101" pitchFamily="49" charset="-127"/>
-              </a:rPr>
-              <a:t>AUROC</a:t>
-            </a:r>
-            <a:r>
-              <a:rPr lang="ko-KR" altLang="en-US" dirty="0">
-                <a:latin typeface="D2Coding" panose="020B0609020101020101" pitchFamily="49" charset="-127"/>
-                <a:ea typeface="D2Coding" panose="020B0609020101020101" pitchFamily="49" charset="-127"/>
-              </a:rPr>
-              <a:t>가 불균형데이터에서는 의미가 없는지 설명하라</a:t>
-            </a:r>
+            <a:r>
+              <a:rPr lang="en-US" altLang="ko-KR" sz="1600" dirty="0" err="1">
+                <a:latin typeface="D2Coding" panose="020B0609020101020101" pitchFamily="49" charset="-127"/>
+                <a:ea typeface="D2Coding" panose="020B0609020101020101" pitchFamily="49" charset="-127"/>
+              </a:rPr>
+              <a:t>Threshhold</a:t>
+            </a:r>
+            <a:r>
+              <a:rPr lang="ko-KR" altLang="en-US" sz="1600" dirty="0">
+                <a:latin typeface="D2Coding" panose="020B0609020101020101" pitchFamily="49" charset="-127"/>
+                <a:ea typeface="D2Coding" panose="020B0609020101020101" pitchFamily="49" charset="-127"/>
+              </a:rPr>
+              <a:t> </a:t>
+            </a:r>
+            <a:r>
+              <a:rPr lang="en-US" altLang="ko-KR" sz="1600" dirty="0">
+                <a:latin typeface="D2Coding" panose="020B0609020101020101" pitchFamily="49" charset="-127"/>
+                <a:ea typeface="D2Coding" panose="020B0609020101020101" pitchFamily="49" charset="-127"/>
+              </a:rPr>
+              <a:t>= 0.5</a:t>
+            </a:r>
+            <a:endParaRPr lang="ko-KR" altLang="en-US" sz="1600" dirty="0">
+              <a:latin typeface="D2Coding" panose="020B0609020101020101" pitchFamily="49" charset="-127"/>
+              <a:ea typeface="D2Coding" panose="020B0609020101020101" pitchFamily="49" charset="-127"/>
+            </a:endParaRPr>
           </a:p>
         </p:txBody>
       </p:sp>
@@ -4117,6 +4151,896 @@
     <p:extLst>
       <p:ext uri="{BB962C8B-B14F-4D97-AF65-F5344CB8AC3E}">
         <p14:creationId xmlns:p14="http://schemas.microsoft.com/office/powerpoint/2010/main" val="682382317"/>
+      </p:ext>
+    </p:extLst>
+  </p:cSld>
+  <p:clrMapOvr>
+    <a:masterClrMapping/>
+  </p:clrMapOvr>
+</p:sld>
+</file>
+
+<file path=ppt/slides/slide5.xml><?xml version="1.0" encoding="utf-8"?>
+<p:sld xmlns:a="http://schemas.openxmlformats.org/drawingml/2006/main" xmlns:r="http://schemas.openxmlformats.org/officeDocument/2006/relationships" xmlns:p="http://schemas.openxmlformats.org/presentationml/2006/main">
+  <p:cSld>
+    <p:spTree>
+      <p:nvGrpSpPr>
+        <p:cNvPr id="1" name="">
+          <a:extLst>
+            <a:ext uri="{FF2B5EF4-FFF2-40B4-BE49-F238E27FC236}">
+              <a16:creationId xmlns:a16="http://schemas.microsoft.com/office/drawing/2014/main" id="{4B363013-DCE6-A3C6-5F36-0B848E2B7E4C}"/>
+            </a:ext>
+          </a:extLst>
+        </p:cNvPr>
+        <p:cNvGrpSpPr/>
+        <p:nvPr/>
+      </p:nvGrpSpPr>
+      <p:grpSpPr>
+        <a:xfrm>
+          <a:off x="0" y="0"/>
+          <a:ext cx="0" cy="0"/>
+          <a:chOff x="0" y="0"/>
+          <a:chExt cx="0" cy="0"/>
+        </a:xfrm>
+      </p:grpSpPr>
+      <p:sp>
+        <p:nvSpPr>
+          <p:cNvPr id="4" name="슬라이드 번호 개체 틀 3">
+            <a:extLst>
+              <a:ext uri="{FF2B5EF4-FFF2-40B4-BE49-F238E27FC236}">
+                <a16:creationId xmlns:a16="http://schemas.microsoft.com/office/drawing/2014/main" id="{CF8674A4-56C6-7E00-A893-C65A98F9A8CC}"/>
+              </a:ext>
+            </a:extLst>
+          </p:cNvPr>
+          <p:cNvSpPr>
+            <a:spLocks noGrp="1"/>
+          </p:cNvSpPr>
+          <p:nvPr>
+            <p:ph type="sldNum" sz="quarter" idx="12"/>
+          </p:nvPr>
+        </p:nvSpPr>
+        <p:spPr>
+          <a:xfrm>
+            <a:off x="10514011" y="6036261"/>
+            <a:ext cx="753545" cy="365125"/>
+          </a:xfrm>
+        </p:spPr>
+        <p:txBody>
+          <a:bodyPr/>
+          <a:lstStyle/>
+          <a:p>
+            <a:fld id="{D57F1E4F-1CFF-5643-939E-217C01CDF565}" type="slidenum">
+              <a:rPr lang="en-US" smtClean="0"/>
+              <a:pPr/>
+              <a:t>5</a:t>
+            </a:fld>
+            <a:endParaRPr lang="en-US" dirty="0"/>
+          </a:p>
+        </p:txBody>
+      </p:sp>
+      <p:sp>
+        <p:nvSpPr>
+          <p:cNvPr id="3" name="제목 1">
+            <a:extLst>
+              <a:ext uri="{FF2B5EF4-FFF2-40B4-BE49-F238E27FC236}">
+                <a16:creationId xmlns:a16="http://schemas.microsoft.com/office/drawing/2014/main" id="{ECCF744B-5BAA-351C-0AC8-F07525536C59}"/>
+              </a:ext>
+            </a:extLst>
+          </p:cNvPr>
+          <p:cNvSpPr txBox="1">
+            <a:spLocks/>
+          </p:cNvSpPr>
+          <p:nvPr/>
+        </p:nvSpPr>
+        <p:spPr>
+          <a:xfrm>
+            <a:off x="475645" y="481983"/>
+            <a:ext cx="10353762" cy="766439"/>
+          </a:xfrm>
+          <a:prstGeom prst="rect">
+            <a:avLst/>
+          </a:prstGeom>
+        </p:spPr>
+        <p:txBody>
+          <a:bodyPr vert="horz" lIns="91440" tIns="45720" rIns="91440" bIns="45720" rtlCol="0" anchor="ctr">
+            <a:normAutofit/>
+          </a:bodyPr>
+          <a:lstStyle>
+            <a:lvl1pPr algn="ctr" defTabSz="914400" rtl="0" eaLnBrk="1" latinLnBrk="1" hangingPunct="1">
+              <a:lnSpc>
+                <a:spcPct val="90000"/>
+              </a:lnSpc>
+              <a:spcBef>
+                <a:spcPct val="0"/>
+              </a:spcBef>
+              <a:buNone/>
+              <a:defRPr sz="3200" kern="1200" cap="all" baseline="0">
+                <a:solidFill>
+                  <a:schemeClr val="tx1"/>
+                </a:solidFill>
+                <a:effectLst/>
+                <a:latin typeface="Batang" panose="02030600000101010101" pitchFamily="18" charset="-127"/>
+                <a:ea typeface="Batang" panose="02030600000101010101" pitchFamily="18" charset="-127"/>
+                <a:cs typeface="+mj-cs"/>
+              </a:defRPr>
+            </a:lvl1pPr>
+          </a:lstStyle>
+          <a:p>
+            <a:pPr algn="l"/>
+            <a:r>
+              <a:rPr lang="en-US" altLang="ko-KR" sz="2800" cap="none" dirty="0">
+                <a:solidFill>
+                  <a:schemeClr val="bg2">
+                    <a:lumMod val="25000"/>
+                  </a:schemeClr>
+                </a:solidFill>
+                <a:latin typeface="D2Coding" panose="020B0609020101020101" pitchFamily="49" charset="-127"/>
+                <a:ea typeface="D2Coding" panose="020B0609020101020101" pitchFamily="49" charset="-127"/>
+                <a:cs typeface="Segoe UI Light" panose="020B0502040204020203" pitchFamily="34" charset="0"/>
+              </a:rPr>
+              <a:t>Task 2</a:t>
+            </a:r>
+            <a:endParaRPr lang="ko-KR" altLang="en-US" sz="2800" cap="none" dirty="0">
+              <a:solidFill>
+                <a:schemeClr val="bg2">
+                  <a:lumMod val="25000"/>
+                </a:schemeClr>
+              </a:solidFill>
+              <a:latin typeface="D2Coding" panose="020B0609020101020101" pitchFamily="49" charset="-127"/>
+              <a:ea typeface="D2Coding" panose="020B0609020101020101" pitchFamily="49" charset="-127"/>
+              <a:cs typeface="Segoe UI Light" panose="020B0502040204020203" pitchFamily="34" charset="0"/>
+            </a:endParaRPr>
+          </a:p>
+        </p:txBody>
+      </p:sp>
+      <p:sp>
+        <p:nvSpPr>
+          <p:cNvPr id="53" name="TextBox 52">
+            <a:extLst>
+              <a:ext uri="{FF2B5EF4-FFF2-40B4-BE49-F238E27FC236}">
+                <a16:creationId xmlns:a16="http://schemas.microsoft.com/office/drawing/2014/main" id="{D140D691-457E-43DF-3C20-4A591F579D45}"/>
+              </a:ext>
+            </a:extLst>
+          </p:cNvPr>
+          <p:cNvSpPr txBox="1"/>
+          <p:nvPr/>
+        </p:nvSpPr>
+        <p:spPr>
+          <a:xfrm>
+            <a:off x="628650" y="1265774"/>
+            <a:ext cx="11068050" cy="793166"/>
+          </a:xfrm>
+          <a:prstGeom prst="rect">
+            <a:avLst/>
+          </a:prstGeom>
+          <a:noFill/>
+        </p:spPr>
+        <p:txBody>
+          <a:bodyPr wrap="square" rtlCol="0">
+            <a:spAutoFit/>
+          </a:bodyPr>
+          <a:lstStyle/>
+          <a:p>
+            <a:pPr>
+              <a:lnSpc>
+                <a:spcPct val="150000"/>
+              </a:lnSpc>
+            </a:pPr>
+            <a:r>
+              <a:rPr lang="en-US" altLang="ko-KR" sz="1600" dirty="0">
+                <a:latin typeface="D2Coding" panose="020B0609020101020101" pitchFamily="49" charset="-127"/>
+                <a:ea typeface="D2Coding" panose="020B0609020101020101" pitchFamily="49" charset="-127"/>
+              </a:rPr>
+              <a:t>test size </a:t>
+            </a:r>
+            <a:r>
+              <a:rPr lang="ko-KR" altLang="en-US" sz="1600" dirty="0">
+                <a:latin typeface="D2Coding" panose="020B0609020101020101" pitchFamily="49" charset="-127"/>
+                <a:ea typeface="D2Coding" panose="020B0609020101020101" pitchFamily="49" charset="-127"/>
+              </a:rPr>
+              <a:t>를 </a:t>
+            </a:r>
+            <a:r>
+              <a:rPr lang="en-US" altLang="ko-KR" sz="1600" dirty="0">
+                <a:latin typeface="D2Coding" panose="020B0609020101020101" pitchFamily="49" charset="-127"/>
+                <a:ea typeface="D2Coding" panose="020B0609020101020101" pitchFamily="49" charset="-127"/>
+              </a:rPr>
+              <a:t>0.1, 0.2, … </a:t>
+            </a:r>
+            <a:r>
+              <a:rPr lang="ko-KR" altLang="en-US" sz="1600" dirty="0">
+                <a:latin typeface="D2Coding" panose="020B0609020101020101" pitchFamily="49" charset="-127"/>
+                <a:ea typeface="D2Coding" panose="020B0609020101020101" pitchFamily="49" charset="-127"/>
+              </a:rPr>
+              <a:t>로</a:t>
+            </a:r>
+            <a:r>
+              <a:rPr lang="en-US" altLang="ko-KR" sz="1600" dirty="0">
+                <a:latin typeface="D2Coding" panose="020B0609020101020101" pitchFamily="49" charset="-127"/>
+                <a:ea typeface="D2Coding" panose="020B0609020101020101" pitchFamily="49" charset="-127"/>
+              </a:rPr>
+              <a:t> </a:t>
+            </a:r>
+            <a:r>
+              <a:rPr lang="ko-KR" altLang="en-US" sz="1600" dirty="0">
+                <a:latin typeface="D2Coding" panose="020B0609020101020101" pitchFamily="49" charset="-127"/>
+                <a:ea typeface="D2Coding" panose="020B0609020101020101" pitchFamily="49" charset="-127"/>
+              </a:rPr>
+              <a:t>늘렸을 경우 다른 예측모델</a:t>
+            </a:r>
+            <a:r>
+              <a:rPr lang="en-US" altLang="ko-KR" sz="1600" dirty="0">
+                <a:latin typeface="D2Coding" panose="020B0609020101020101" pitchFamily="49" charset="-127"/>
+                <a:ea typeface="D2Coding" panose="020B0609020101020101" pitchFamily="49" charset="-127"/>
+              </a:rPr>
+              <a:t>(</a:t>
+            </a:r>
+            <a:r>
+              <a:rPr lang="ko-KR" altLang="en-US" sz="1600" dirty="0">
+                <a:latin typeface="D2Coding" panose="020B0609020101020101" pitchFamily="49" charset="-127"/>
+                <a:ea typeface="D2Coding" panose="020B0609020101020101" pitchFamily="49" charset="-127"/>
+              </a:rPr>
+              <a:t>로지스틱</a:t>
+            </a:r>
+            <a:r>
+              <a:rPr lang="en-US" altLang="ko-KR" sz="1600" dirty="0">
+                <a:latin typeface="D2Coding" panose="020B0609020101020101" pitchFamily="49" charset="-127"/>
+                <a:ea typeface="D2Coding" panose="020B0609020101020101" pitchFamily="49" charset="-127"/>
+              </a:rPr>
+              <a:t> </a:t>
+            </a:r>
+            <a:r>
+              <a:rPr lang="ko-KR" altLang="en-US" sz="1600" dirty="0">
+                <a:latin typeface="D2Coding" panose="020B0609020101020101" pitchFamily="49" charset="-127"/>
+                <a:ea typeface="D2Coding" panose="020B0609020101020101" pitchFamily="49" charset="-127"/>
+              </a:rPr>
+              <a:t>회귀</a:t>
+            </a:r>
+            <a:r>
+              <a:rPr lang="en-US" altLang="ko-KR" sz="1600" dirty="0">
+                <a:latin typeface="D2Coding" panose="020B0609020101020101" pitchFamily="49" charset="-127"/>
+                <a:ea typeface="D2Coding" panose="020B0609020101020101" pitchFamily="49" charset="-127"/>
+              </a:rPr>
+              <a:t>, </a:t>
+            </a:r>
+            <a:r>
+              <a:rPr lang="ko-KR" altLang="en-US" sz="1600" dirty="0" err="1">
+                <a:latin typeface="D2Coding" panose="020B0609020101020101" pitchFamily="49" charset="-127"/>
+                <a:ea typeface="D2Coding" panose="020B0609020101020101" pitchFamily="49" charset="-127"/>
+              </a:rPr>
+              <a:t>나이브베이지언</a:t>
+            </a:r>
+            <a:r>
+              <a:rPr lang="en-US" altLang="ko-KR" sz="1600" dirty="0">
+                <a:latin typeface="D2Coding" panose="020B0609020101020101" pitchFamily="49" charset="-127"/>
+                <a:ea typeface="D2Coding" panose="020B0609020101020101" pitchFamily="49" charset="-127"/>
+              </a:rPr>
+              <a:t>, KNN,</a:t>
+            </a:r>
+            <a:r>
+              <a:rPr lang="ko-KR" altLang="en-US" sz="1600" dirty="0">
+                <a:latin typeface="D2Coding" panose="020B0609020101020101" pitchFamily="49" charset="-127"/>
+                <a:ea typeface="D2Coding" panose="020B0609020101020101" pitchFamily="49" charset="-127"/>
+              </a:rPr>
+              <a:t> </a:t>
+            </a:r>
+            <a:r>
+              <a:rPr lang="en-US" altLang="ko-KR" sz="1600" dirty="0" err="1">
+                <a:latin typeface="D2Coding" panose="020B0609020101020101" pitchFamily="49" charset="-127"/>
+                <a:ea typeface="D2Coding" panose="020B0609020101020101" pitchFamily="49" charset="-127"/>
+              </a:rPr>
+              <a:t>xgboost</a:t>
+            </a:r>
+            <a:r>
+              <a:rPr lang="ko-KR" altLang="en-US" sz="1600" dirty="0">
+                <a:latin typeface="D2Coding" panose="020B0609020101020101" pitchFamily="49" charset="-127"/>
+                <a:ea typeface="D2Coding" panose="020B0609020101020101" pitchFamily="49" charset="-127"/>
+              </a:rPr>
+              <a:t> 등</a:t>
+            </a:r>
+            <a:r>
+              <a:rPr lang="en-US" altLang="ko-KR" sz="1600" dirty="0">
+                <a:latin typeface="D2Coding" panose="020B0609020101020101" pitchFamily="49" charset="-127"/>
+                <a:ea typeface="D2Coding" panose="020B0609020101020101" pitchFamily="49" charset="-127"/>
+              </a:rPr>
+              <a:t>)</a:t>
+            </a:r>
+            <a:r>
+              <a:rPr lang="ko-KR" altLang="en-US" sz="1600" dirty="0">
+                <a:latin typeface="D2Coding" panose="020B0609020101020101" pitchFamily="49" charset="-127"/>
+                <a:ea typeface="D2Coding" panose="020B0609020101020101" pitchFamily="49" charset="-127"/>
+              </a:rPr>
+              <a:t>적용시 </a:t>
+            </a:r>
+            <a:r>
+              <a:rPr lang="en-US" altLang="ko-KR" sz="1600" dirty="0">
+                <a:latin typeface="D2Coding" panose="020B0609020101020101" pitchFamily="49" charset="-127"/>
+                <a:ea typeface="D2Coding" panose="020B0609020101020101" pitchFamily="49" charset="-127"/>
+              </a:rPr>
+              <a:t>confusion</a:t>
+            </a:r>
+            <a:r>
+              <a:rPr lang="ko-KR" altLang="en-US" sz="1600" dirty="0">
+                <a:latin typeface="D2Coding" panose="020B0609020101020101" pitchFamily="49" charset="-127"/>
+                <a:ea typeface="D2Coding" panose="020B0609020101020101" pitchFamily="49" charset="-127"/>
+              </a:rPr>
+              <a:t> </a:t>
+            </a:r>
+            <a:r>
+              <a:rPr lang="en-US" altLang="ko-KR" sz="1600" dirty="0">
+                <a:latin typeface="D2Coding" panose="020B0609020101020101" pitchFamily="49" charset="-127"/>
+                <a:ea typeface="D2Coding" panose="020B0609020101020101" pitchFamily="49" charset="-127"/>
+              </a:rPr>
+              <a:t>matrix,</a:t>
+            </a:r>
+            <a:r>
+              <a:rPr lang="ko-KR" altLang="en-US" sz="1600" dirty="0">
+                <a:latin typeface="D2Coding" panose="020B0609020101020101" pitchFamily="49" charset="-127"/>
+                <a:ea typeface="D2Coding" panose="020B0609020101020101" pitchFamily="49" charset="-127"/>
+              </a:rPr>
+              <a:t> </a:t>
+            </a:r>
+            <a:r>
+              <a:rPr lang="en-US" altLang="ko-KR" sz="1600" dirty="0">
+                <a:latin typeface="D2Coding" panose="020B0609020101020101" pitchFamily="49" charset="-127"/>
+                <a:ea typeface="D2Coding" panose="020B0609020101020101" pitchFamily="49" charset="-127"/>
+              </a:rPr>
+              <a:t>classification report,</a:t>
+            </a:r>
+            <a:r>
+              <a:rPr lang="ko-KR" altLang="en-US" sz="1600" dirty="0">
+                <a:latin typeface="D2Coding" panose="020B0609020101020101" pitchFamily="49" charset="-127"/>
+                <a:ea typeface="D2Coding" panose="020B0609020101020101" pitchFamily="49" charset="-127"/>
+              </a:rPr>
+              <a:t> </a:t>
+            </a:r>
+            <a:r>
+              <a:rPr lang="en-US" altLang="ko-KR" sz="1600" dirty="0">
+                <a:latin typeface="D2Coding" panose="020B0609020101020101" pitchFamily="49" charset="-127"/>
+                <a:ea typeface="D2Coding" panose="020B0609020101020101" pitchFamily="49" charset="-127"/>
+              </a:rPr>
+              <a:t>AUROC</a:t>
+            </a:r>
+            <a:r>
+              <a:rPr lang="ko-KR" altLang="en-US" sz="1600" dirty="0">
+                <a:latin typeface="D2Coding" panose="020B0609020101020101" pitchFamily="49" charset="-127"/>
+                <a:ea typeface="D2Coding" panose="020B0609020101020101" pitchFamily="49" charset="-127"/>
+              </a:rPr>
+              <a:t> 등을 구한 후 비교하고 토론하라</a:t>
+            </a:r>
+          </a:p>
+        </p:txBody>
+      </p:sp>
+    </p:spTree>
+    <p:extLst>
+      <p:ext uri="{BB962C8B-B14F-4D97-AF65-F5344CB8AC3E}">
+        <p14:creationId xmlns:p14="http://schemas.microsoft.com/office/powerpoint/2010/main" val="1228100704"/>
+      </p:ext>
+    </p:extLst>
+  </p:cSld>
+  <p:clrMapOvr>
+    <a:masterClrMapping/>
+  </p:clrMapOvr>
+</p:sld>
+</file>
+
+<file path=ppt/slides/slide6.xml><?xml version="1.0" encoding="utf-8"?>
+<p:sld xmlns:a="http://schemas.openxmlformats.org/drawingml/2006/main" xmlns:r="http://schemas.openxmlformats.org/officeDocument/2006/relationships" xmlns:p="http://schemas.openxmlformats.org/presentationml/2006/main">
+  <p:cSld>
+    <p:spTree>
+      <p:nvGrpSpPr>
+        <p:cNvPr id="1" name="">
+          <a:extLst>
+            <a:ext uri="{FF2B5EF4-FFF2-40B4-BE49-F238E27FC236}">
+              <a16:creationId xmlns:a16="http://schemas.microsoft.com/office/drawing/2014/main" id="{B3060D7C-0150-E932-540E-9DB9C48F9689}"/>
+            </a:ext>
+          </a:extLst>
+        </p:cNvPr>
+        <p:cNvGrpSpPr/>
+        <p:nvPr/>
+      </p:nvGrpSpPr>
+      <p:grpSpPr>
+        <a:xfrm>
+          <a:off x="0" y="0"/>
+          <a:ext cx="0" cy="0"/>
+          <a:chOff x="0" y="0"/>
+          <a:chExt cx="0" cy="0"/>
+        </a:xfrm>
+      </p:grpSpPr>
+      <p:sp>
+        <p:nvSpPr>
+          <p:cNvPr id="4" name="슬라이드 번호 개체 틀 3">
+            <a:extLst>
+              <a:ext uri="{FF2B5EF4-FFF2-40B4-BE49-F238E27FC236}">
+                <a16:creationId xmlns:a16="http://schemas.microsoft.com/office/drawing/2014/main" id="{ED9396E2-388B-0992-89DA-F9BF38ABF239}"/>
+              </a:ext>
+            </a:extLst>
+          </p:cNvPr>
+          <p:cNvSpPr>
+            <a:spLocks noGrp="1"/>
+          </p:cNvSpPr>
+          <p:nvPr>
+            <p:ph type="sldNum" sz="quarter" idx="12"/>
+          </p:nvPr>
+        </p:nvSpPr>
+        <p:spPr>
+          <a:xfrm>
+            <a:off x="10514011" y="6036261"/>
+            <a:ext cx="753545" cy="365125"/>
+          </a:xfrm>
+        </p:spPr>
+        <p:txBody>
+          <a:bodyPr/>
+          <a:lstStyle/>
+          <a:p>
+            <a:fld id="{D57F1E4F-1CFF-5643-939E-217C01CDF565}" type="slidenum">
+              <a:rPr lang="en-US" smtClean="0"/>
+              <a:pPr/>
+              <a:t>6</a:t>
+            </a:fld>
+            <a:endParaRPr lang="en-US" dirty="0"/>
+          </a:p>
+        </p:txBody>
+      </p:sp>
+      <p:sp>
+        <p:nvSpPr>
+          <p:cNvPr id="3" name="제목 1">
+            <a:extLst>
+              <a:ext uri="{FF2B5EF4-FFF2-40B4-BE49-F238E27FC236}">
+                <a16:creationId xmlns:a16="http://schemas.microsoft.com/office/drawing/2014/main" id="{75CDFFAC-5F16-FDE4-7636-517D830631B8}"/>
+              </a:ext>
+            </a:extLst>
+          </p:cNvPr>
+          <p:cNvSpPr txBox="1">
+            <a:spLocks/>
+          </p:cNvSpPr>
+          <p:nvPr/>
+        </p:nvSpPr>
+        <p:spPr>
+          <a:xfrm>
+            <a:off x="475645" y="481983"/>
+            <a:ext cx="10353762" cy="766439"/>
+          </a:xfrm>
+          <a:prstGeom prst="rect">
+            <a:avLst/>
+          </a:prstGeom>
+        </p:spPr>
+        <p:txBody>
+          <a:bodyPr vert="horz" lIns="91440" tIns="45720" rIns="91440" bIns="45720" rtlCol="0" anchor="ctr">
+            <a:normAutofit/>
+          </a:bodyPr>
+          <a:lstStyle>
+            <a:lvl1pPr algn="ctr" defTabSz="914400" rtl="0" eaLnBrk="1" latinLnBrk="1" hangingPunct="1">
+              <a:lnSpc>
+                <a:spcPct val="90000"/>
+              </a:lnSpc>
+              <a:spcBef>
+                <a:spcPct val="0"/>
+              </a:spcBef>
+              <a:buNone/>
+              <a:defRPr sz="3200" kern="1200" cap="all" baseline="0">
+                <a:solidFill>
+                  <a:schemeClr val="tx1"/>
+                </a:solidFill>
+                <a:effectLst/>
+                <a:latin typeface="Batang" panose="02030600000101010101" pitchFamily="18" charset="-127"/>
+                <a:ea typeface="Batang" panose="02030600000101010101" pitchFamily="18" charset="-127"/>
+                <a:cs typeface="+mj-cs"/>
+              </a:defRPr>
+            </a:lvl1pPr>
+          </a:lstStyle>
+          <a:p>
+            <a:pPr algn="l"/>
+            <a:r>
+              <a:rPr lang="en-US" altLang="ko-KR" sz="2800" cap="none" dirty="0">
+                <a:solidFill>
+                  <a:schemeClr val="bg2">
+                    <a:lumMod val="25000"/>
+                  </a:schemeClr>
+                </a:solidFill>
+                <a:latin typeface="D2Coding" panose="020B0609020101020101" pitchFamily="49" charset="-127"/>
+                <a:ea typeface="D2Coding" panose="020B0609020101020101" pitchFamily="49" charset="-127"/>
+                <a:cs typeface="Segoe UI Light" panose="020B0502040204020203" pitchFamily="34" charset="0"/>
+              </a:rPr>
+              <a:t>Task 1</a:t>
+            </a:r>
+            <a:endParaRPr lang="ko-KR" altLang="en-US" sz="2800" cap="none" dirty="0">
+              <a:solidFill>
+                <a:schemeClr val="bg2">
+                  <a:lumMod val="25000"/>
+                </a:schemeClr>
+              </a:solidFill>
+              <a:latin typeface="D2Coding" panose="020B0609020101020101" pitchFamily="49" charset="-127"/>
+              <a:ea typeface="D2Coding" panose="020B0609020101020101" pitchFamily="49" charset="-127"/>
+              <a:cs typeface="Segoe UI Light" panose="020B0502040204020203" pitchFamily="34" charset="0"/>
+            </a:endParaRPr>
+          </a:p>
+        </p:txBody>
+      </p:sp>
+      <p:sp>
+        <p:nvSpPr>
+          <p:cNvPr id="53" name="TextBox 52">
+            <a:extLst>
+              <a:ext uri="{FF2B5EF4-FFF2-40B4-BE49-F238E27FC236}">
+                <a16:creationId xmlns:a16="http://schemas.microsoft.com/office/drawing/2014/main" id="{B1069179-6F24-0DA5-4464-7E1EB6A5AC58}"/>
+              </a:ext>
+            </a:extLst>
+          </p:cNvPr>
+          <p:cNvSpPr txBox="1"/>
+          <p:nvPr/>
+        </p:nvSpPr>
+        <p:spPr>
+          <a:xfrm>
+            <a:off x="628650" y="1265774"/>
+            <a:ext cx="10638906" cy="465320"/>
+          </a:xfrm>
+          <a:prstGeom prst="rect">
+            <a:avLst/>
+          </a:prstGeom>
+          <a:noFill/>
+        </p:spPr>
+        <p:txBody>
+          <a:bodyPr wrap="square" rtlCol="0">
+            <a:spAutoFit/>
+          </a:bodyPr>
+          <a:lstStyle/>
+          <a:p>
+            <a:pPr>
+              <a:lnSpc>
+                <a:spcPct val="150000"/>
+              </a:lnSpc>
+            </a:pPr>
+            <a:r>
+              <a:rPr lang="en-US" altLang="ko-KR" dirty="0">
+                <a:latin typeface="D2Coding" panose="020B0609020101020101" pitchFamily="49" charset="-127"/>
+                <a:ea typeface="D2Coding" panose="020B0609020101020101" pitchFamily="49" charset="-127"/>
+              </a:rPr>
+              <a:t>ROC </a:t>
+            </a:r>
+            <a:r>
+              <a:rPr lang="ko-KR" altLang="en-US" dirty="0">
+                <a:latin typeface="D2Coding" panose="020B0609020101020101" pitchFamily="49" charset="-127"/>
+                <a:ea typeface="D2Coding" panose="020B0609020101020101" pitchFamily="49" charset="-127"/>
+              </a:rPr>
+              <a:t>곡선에 대한 이해</a:t>
+            </a:r>
+          </a:p>
+        </p:txBody>
+      </p:sp>
+      <p:pic>
+        <p:nvPicPr>
+          <p:cNvPr id="2" name="그림 1">
+            <a:extLst>
+              <a:ext uri="{FF2B5EF4-FFF2-40B4-BE49-F238E27FC236}">
+                <a16:creationId xmlns:a16="http://schemas.microsoft.com/office/drawing/2014/main" id="{0BA88819-782B-F75B-9E9A-5E17FF5FE41C}"/>
+              </a:ext>
+            </a:extLst>
+          </p:cNvPr>
+          <p:cNvPicPr>
+            <a:picLocks noChangeAspect="1"/>
+          </p:cNvPicPr>
+          <p:nvPr/>
+        </p:nvPicPr>
+        <p:blipFill>
+          <a:blip r:embed="rId2"/>
+          <a:stretch>
+            <a:fillRect/>
+          </a:stretch>
+        </p:blipFill>
+        <p:spPr>
+          <a:xfrm>
+            <a:off x="1824181" y="2145144"/>
+            <a:ext cx="8289638" cy="4144819"/>
+          </a:xfrm>
+          <a:prstGeom prst="rect">
+            <a:avLst/>
+          </a:prstGeom>
+        </p:spPr>
+      </p:pic>
+      <p:pic>
+        <p:nvPicPr>
+          <p:cNvPr id="6" name="그림 5">
+            <a:extLst>
+              <a:ext uri="{FF2B5EF4-FFF2-40B4-BE49-F238E27FC236}">
+                <a16:creationId xmlns:a16="http://schemas.microsoft.com/office/drawing/2014/main" id="{3064180B-0B83-C136-9DCD-CB03C08F800F}"/>
+              </a:ext>
+            </a:extLst>
+          </p:cNvPr>
+          <p:cNvPicPr>
+            <a:picLocks noChangeAspect="1"/>
+          </p:cNvPicPr>
+          <p:nvPr/>
+        </p:nvPicPr>
+        <p:blipFill>
+          <a:blip r:embed="rId3"/>
+          <a:stretch>
+            <a:fillRect/>
+          </a:stretch>
+        </p:blipFill>
+        <p:spPr>
+          <a:xfrm>
+            <a:off x="10113819" y="5592226"/>
+            <a:ext cx="1322087" cy="515614"/>
+          </a:xfrm>
+          <a:prstGeom prst="rect">
+            <a:avLst/>
+          </a:prstGeom>
+        </p:spPr>
+      </p:pic>
+      <p:pic>
+        <p:nvPicPr>
+          <p:cNvPr id="8" name="그림 7">
+            <a:extLst>
+              <a:ext uri="{FF2B5EF4-FFF2-40B4-BE49-F238E27FC236}">
+                <a16:creationId xmlns:a16="http://schemas.microsoft.com/office/drawing/2014/main" id="{9961FA41-78B6-4F2D-A962-102F1ABE8E30}"/>
+              </a:ext>
+            </a:extLst>
+          </p:cNvPr>
+          <p:cNvPicPr>
+            <a:picLocks noChangeAspect="1"/>
+          </p:cNvPicPr>
+          <p:nvPr/>
+        </p:nvPicPr>
+        <p:blipFill>
+          <a:blip r:embed="rId4"/>
+          <a:stretch>
+            <a:fillRect/>
+          </a:stretch>
+        </p:blipFill>
+        <p:spPr>
+          <a:xfrm>
+            <a:off x="5948103" y="1652370"/>
+            <a:ext cx="1335308" cy="542056"/>
+          </a:xfrm>
+          <a:prstGeom prst="rect">
+            <a:avLst/>
+          </a:prstGeom>
+        </p:spPr>
+      </p:pic>
+    </p:spTree>
+    <p:extLst>
+      <p:ext uri="{BB962C8B-B14F-4D97-AF65-F5344CB8AC3E}">
+        <p14:creationId xmlns:p14="http://schemas.microsoft.com/office/powerpoint/2010/main" val="3088389684"/>
+      </p:ext>
+    </p:extLst>
+  </p:cSld>
+  <p:clrMapOvr>
+    <a:masterClrMapping/>
+  </p:clrMapOvr>
+</p:sld>
+</file>
+
+<file path=ppt/slides/slide7.xml><?xml version="1.0" encoding="utf-8"?>
+<p:sld xmlns:a="http://schemas.openxmlformats.org/drawingml/2006/main" xmlns:r="http://schemas.openxmlformats.org/officeDocument/2006/relationships" xmlns:p="http://schemas.openxmlformats.org/presentationml/2006/main">
+  <p:cSld>
+    <p:spTree>
+      <p:nvGrpSpPr>
+        <p:cNvPr id="1" name="">
+          <a:extLst>
+            <a:ext uri="{FF2B5EF4-FFF2-40B4-BE49-F238E27FC236}">
+              <a16:creationId xmlns:a16="http://schemas.microsoft.com/office/drawing/2014/main" id="{0F2232AD-82AE-A19D-E404-28AFEC3E9718}"/>
+            </a:ext>
+          </a:extLst>
+        </p:cNvPr>
+        <p:cNvGrpSpPr/>
+        <p:nvPr/>
+      </p:nvGrpSpPr>
+      <p:grpSpPr>
+        <a:xfrm>
+          <a:off x="0" y="0"/>
+          <a:ext cx="0" cy="0"/>
+          <a:chOff x="0" y="0"/>
+          <a:chExt cx="0" cy="0"/>
+        </a:xfrm>
+      </p:grpSpPr>
+      <p:sp>
+        <p:nvSpPr>
+          <p:cNvPr id="4" name="슬라이드 번호 개체 틀 3">
+            <a:extLst>
+              <a:ext uri="{FF2B5EF4-FFF2-40B4-BE49-F238E27FC236}">
+                <a16:creationId xmlns:a16="http://schemas.microsoft.com/office/drawing/2014/main" id="{08891D2A-AFC6-096C-DD01-06B235369858}"/>
+              </a:ext>
+            </a:extLst>
+          </p:cNvPr>
+          <p:cNvSpPr>
+            <a:spLocks noGrp="1"/>
+          </p:cNvSpPr>
+          <p:nvPr>
+            <p:ph type="sldNum" sz="quarter" idx="12"/>
+          </p:nvPr>
+        </p:nvSpPr>
+        <p:spPr>
+          <a:xfrm>
+            <a:off x="10514011" y="6036261"/>
+            <a:ext cx="753545" cy="365125"/>
+          </a:xfrm>
+        </p:spPr>
+        <p:txBody>
+          <a:bodyPr/>
+          <a:lstStyle/>
+          <a:p>
+            <a:fld id="{D57F1E4F-1CFF-5643-939E-217C01CDF565}" type="slidenum">
+              <a:rPr lang="en-US" smtClean="0"/>
+              <a:pPr/>
+              <a:t>7</a:t>
+            </a:fld>
+            <a:endParaRPr lang="en-US" dirty="0"/>
+          </a:p>
+        </p:txBody>
+      </p:sp>
+      <p:sp>
+        <p:nvSpPr>
+          <p:cNvPr id="3" name="제목 1">
+            <a:extLst>
+              <a:ext uri="{FF2B5EF4-FFF2-40B4-BE49-F238E27FC236}">
+                <a16:creationId xmlns:a16="http://schemas.microsoft.com/office/drawing/2014/main" id="{FBD1658D-6849-A93C-1469-239AA3D40155}"/>
+              </a:ext>
+            </a:extLst>
+          </p:cNvPr>
+          <p:cNvSpPr txBox="1">
+            <a:spLocks/>
+          </p:cNvSpPr>
+          <p:nvPr/>
+        </p:nvSpPr>
+        <p:spPr>
+          <a:xfrm>
+            <a:off x="475645" y="481983"/>
+            <a:ext cx="10353762" cy="766439"/>
+          </a:xfrm>
+          <a:prstGeom prst="rect">
+            <a:avLst/>
+          </a:prstGeom>
+        </p:spPr>
+        <p:txBody>
+          <a:bodyPr vert="horz" lIns="91440" tIns="45720" rIns="91440" bIns="45720" rtlCol="0" anchor="ctr">
+            <a:normAutofit/>
+          </a:bodyPr>
+          <a:lstStyle>
+            <a:lvl1pPr algn="ctr" defTabSz="914400" rtl="0" eaLnBrk="1" latinLnBrk="1" hangingPunct="1">
+              <a:lnSpc>
+                <a:spcPct val="90000"/>
+              </a:lnSpc>
+              <a:spcBef>
+                <a:spcPct val="0"/>
+              </a:spcBef>
+              <a:buNone/>
+              <a:defRPr sz="3200" kern="1200" cap="all" baseline="0">
+                <a:solidFill>
+                  <a:schemeClr val="tx1"/>
+                </a:solidFill>
+                <a:effectLst/>
+                <a:latin typeface="Batang" panose="02030600000101010101" pitchFamily="18" charset="-127"/>
+                <a:ea typeface="Batang" panose="02030600000101010101" pitchFamily="18" charset="-127"/>
+                <a:cs typeface="+mj-cs"/>
+              </a:defRPr>
+            </a:lvl1pPr>
+          </a:lstStyle>
+          <a:p>
+            <a:pPr algn="l"/>
+            <a:r>
+              <a:rPr lang="en-US" altLang="ko-KR" sz="2800" cap="none" dirty="0">
+                <a:solidFill>
+                  <a:schemeClr val="bg2">
+                    <a:lumMod val="25000"/>
+                  </a:schemeClr>
+                </a:solidFill>
+                <a:latin typeface="D2Coding" panose="020B0609020101020101" pitchFamily="49" charset="-127"/>
+                <a:ea typeface="D2Coding" panose="020B0609020101020101" pitchFamily="49" charset="-127"/>
+                <a:cs typeface="Segoe UI Light" panose="020B0502040204020203" pitchFamily="34" charset="0"/>
+              </a:rPr>
+              <a:t>Task 1</a:t>
+            </a:r>
+            <a:endParaRPr lang="ko-KR" altLang="en-US" sz="2800" cap="none" dirty="0">
+              <a:solidFill>
+                <a:schemeClr val="bg2">
+                  <a:lumMod val="25000"/>
+                </a:schemeClr>
+              </a:solidFill>
+              <a:latin typeface="D2Coding" panose="020B0609020101020101" pitchFamily="49" charset="-127"/>
+              <a:ea typeface="D2Coding" panose="020B0609020101020101" pitchFamily="49" charset="-127"/>
+              <a:cs typeface="Segoe UI Light" panose="020B0502040204020203" pitchFamily="34" charset="0"/>
+            </a:endParaRPr>
+          </a:p>
+        </p:txBody>
+      </p:sp>
+      <p:sp>
+        <p:nvSpPr>
+          <p:cNvPr id="53" name="TextBox 52">
+            <a:extLst>
+              <a:ext uri="{FF2B5EF4-FFF2-40B4-BE49-F238E27FC236}">
+                <a16:creationId xmlns:a16="http://schemas.microsoft.com/office/drawing/2014/main" id="{B144E1A5-F9FF-B6A5-EC75-742054ED1052}"/>
+              </a:ext>
+            </a:extLst>
+          </p:cNvPr>
+          <p:cNvSpPr txBox="1"/>
+          <p:nvPr/>
+        </p:nvSpPr>
+        <p:spPr>
+          <a:xfrm>
+            <a:off x="628650" y="1265774"/>
+            <a:ext cx="10638906" cy="465320"/>
+          </a:xfrm>
+          <a:prstGeom prst="rect">
+            <a:avLst/>
+          </a:prstGeom>
+          <a:noFill/>
+        </p:spPr>
+        <p:txBody>
+          <a:bodyPr wrap="square" rtlCol="0">
+            <a:spAutoFit/>
+          </a:bodyPr>
+          <a:lstStyle/>
+          <a:p>
+            <a:pPr>
+              <a:lnSpc>
+                <a:spcPct val="150000"/>
+              </a:lnSpc>
+            </a:pPr>
+            <a:r>
+              <a:rPr lang="en-US" altLang="ko-KR" dirty="0">
+                <a:latin typeface="D2Coding" panose="020B0609020101020101" pitchFamily="49" charset="-127"/>
+                <a:ea typeface="D2Coding" panose="020B0609020101020101" pitchFamily="49" charset="-127"/>
+              </a:rPr>
+              <a:t>ROC </a:t>
+            </a:r>
+            <a:r>
+              <a:rPr lang="ko-KR" altLang="en-US" dirty="0">
+                <a:latin typeface="D2Coding" panose="020B0609020101020101" pitchFamily="49" charset="-127"/>
+                <a:ea typeface="D2Coding" panose="020B0609020101020101" pitchFamily="49" charset="-127"/>
+              </a:rPr>
+              <a:t>곡선을 이해한 후 </a:t>
+            </a:r>
+            <a:r>
+              <a:rPr lang="en-US" altLang="ko-KR" dirty="0">
+                <a:latin typeface="D2Coding" panose="020B0609020101020101" pitchFamily="49" charset="-127"/>
+                <a:ea typeface="D2Coding" panose="020B0609020101020101" pitchFamily="49" charset="-127"/>
+              </a:rPr>
+              <a:t>AUROC</a:t>
+            </a:r>
+            <a:r>
+              <a:rPr lang="ko-KR" altLang="en-US" dirty="0">
+                <a:latin typeface="D2Coding" panose="020B0609020101020101" pitchFamily="49" charset="-127"/>
+                <a:ea typeface="D2Coding" panose="020B0609020101020101" pitchFamily="49" charset="-127"/>
+              </a:rPr>
+              <a:t>가 불균형데이터에서는 의미가 없는지 설명하라</a:t>
+            </a:r>
+          </a:p>
+        </p:txBody>
+      </p:sp>
+      <p:pic>
+        <p:nvPicPr>
+          <p:cNvPr id="8" name="그림 7">
+            <a:extLst>
+              <a:ext uri="{FF2B5EF4-FFF2-40B4-BE49-F238E27FC236}">
+                <a16:creationId xmlns:a16="http://schemas.microsoft.com/office/drawing/2014/main" id="{63EFCA32-C30E-C93B-81A5-909958537B84}"/>
+              </a:ext>
+            </a:extLst>
+          </p:cNvPr>
+          <p:cNvPicPr>
+            <a:picLocks noChangeAspect="1"/>
+          </p:cNvPicPr>
+          <p:nvPr/>
+        </p:nvPicPr>
+        <p:blipFill>
+          <a:blip r:embed="rId2"/>
+          <a:stretch>
+            <a:fillRect/>
+          </a:stretch>
+        </p:blipFill>
+        <p:spPr>
+          <a:xfrm>
+            <a:off x="1014921" y="2129671"/>
+            <a:ext cx="6134847" cy="3906590"/>
+          </a:xfrm>
+          <a:prstGeom prst="rect">
+            <a:avLst/>
+          </a:prstGeom>
+        </p:spPr>
+      </p:pic>
+    </p:spTree>
+    <p:extLst>
+      <p:ext uri="{BB962C8B-B14F-4D97-AF65-F5344CB8AC3E}">
+        <p14:creationId xmlns:p14="http://schemas.microsoft.com/office/powerpoint/2010/main" val="3544511951"/>
       </p:ext>
     </p:extLst>
   </p:cSld>

--- a/02_Imbalanced data.pptx
+++ b/02_Imbalanced data.pptx
@@ -5,10 +5,10 @@
     <p:sldMasterId id="2147483660" r:id="rId1"/>
   </p:sldMasterIdLst>
   <p:notesMasterIdLst>
-    <p:notesMasterId r:id="rId9"/>
+    <p:notesMasterId r:id="rId10"/>
   </p:notesMasterIdLst>
   <p:handoutMasterIdLst>
-    <p:handoutMasterId r:id="rId10"/>
+    <p:handoutMasterId r:id="rId11"/>
   </p:handoutMasterIdLst>
   <p:sldIdLst>
     <p:sldId id="256" r:id="rId2"/>
@@ -17,7 +17,8 @@
     <p:sldId id="1139" r:id="rId5"/>
     <p:sldId id="1142" r:id="rId6"/>
     <p:sldId id="1140" r:id="rId7"/>
-    <p:sldId id="1141" r:id="rId8"/>
+    <p:sldId id="1143" r:id="rId8"/>
+    <p:sldId id="1141" r:id="rId9"/>
   </p:sldIdLst>
   <p:sldSz cx="12192000" cy="6858000"/>
   <p:notesSz cx="6858000" cy="9144000"/>
@@ -131,6 +132,7 @@
             <p14:sldId id="1139"/>
             <p14:sldId id="1142"/>
             <p14:sldId id="1140"/>
+            <p14:sldId id="1143"/>
             <p14:sldId id="1141"/>
           </p14:sldIdLst>
         </p14:section>
@@ -4818,6 +4820,3213 @@
         <p:cNvPr id="1" name="">
           <a:extLst>
             <a:ext uri="{FF2B5EF4-FFF2-40B4-BE49-F238E27FC236}">
+              <a16:creationId xmlns:a16="http://schemas.microsoft.com/office/drawing/2014/main" id="{0EE17DD8-3D7B-30F2-222E-16FCED647024}"/>
+            </a:ext>
+          </a:extLst>
+        </p:cNvPr>
+        <p:cNvGrpSpPr/>
+        <p:nvPr/>
+      </p:nvGrpSpPr>
+      <p:grpSpPr>
+        <a:xfrm>
+          <a:off x="0" y="0"/>
+          <a:ext cx="0" cy="0"/>
+          <a:chOff x="0" y="0"/>
+          <a:chExt cx="0" cy="0"/>
+        </a:xfrm>
+      </p:grpSpPr>
+      <p:sp>
+        <p:nvSpPr>
+          <p:cNvPr id="4" name="슬라이드 번호 개체 틀 3">
+            <a:extLst>
+              <a:ext uri="{FF2B5EF4-FFF2-40B4-BE49-F238E27FC236}">
+                <a16:creationId xmlns:a16="http://schemas.microsoft.com/office/drawing/2014/main" id="{46A707FB-C80B-CB41-2EA6-2CE9ED3F73BC}"/>
+              </a:ext>
+            </a:extLst>
+          </p:cNvPr>
+          <p:cNvSpPr>
+            <a:spLocks noGrp="1"/>
+          </p:cNvSpPr>
+          <p:nvPr>
+            <p:ph type="sldNum" sz="quarter" idx="12"/>
+          </p:nvPr>
+        </p:nvSpPr>
+        <p:spPr>
+          <a:xfrm>
+            <a:off x="10514011" y="6036261"/>
+            <a:ext cx="753545" cy="365125"/>
+          </a:xfrm>
+        </p:spPr>
+        <p:txBody>
+          <a:bodyPr/>
+          <a:lstStyle/>
+          <a:p>
+            <a:fld id="{D57F1E4F-1CFF-5643-939E-217C01CDF565}" type="slidenum">
+              <a:rPr lang="en-US" smtClean="0"/>
+              <a:pPr/>
+              <a:t>7</a:t>
+            </a:fld>
+            <a:endParaRPr lang="en-US" dirty="0"/>
+          </a:p>
+        </p:txBody>
+      </p:sp>
+      <p:sp>
+        <p:nvSpPr>
+          <p:cNvPr id="3" name="제목 1">
+            <a:extLst>
+              <a:ext uri="{FF2B5EF4-FFF2-40B4-BE49-F238E27FC236}">
+                <a16:creationId xmlns:a16="http://schemas.microsoft.com/office/drawing/2014/main" id="{C2419400-F88C-F2EE-589D-49C22B53287D}"/>
+              </a:ext>
+            </a:extLst>
+          </p:cNvPr>
+          <p:cNvSpPr txBox="1">
+            <a:spLocks/>
+          </p:cNvSpPr>
+          <p:nvPr/>
+        </p:nvSpPr>
+        <p:spPr>
+          <a:xfrm>
+            <a:off x="475645" y="481983"/>
+            <a:ext cx="10353762" cy="766439"/>
+          </a:xfrm>
+          <a:prstGeom prst="rect">
+            <a:avLst/>
+          </a:prstGeom>
+        </p:spPr>
+        <p:txBody>
+          <a:bodyPr vert="horz" lIns="91440" tIns="45720" rIns="91440" bIns="45720" rtlCol="0" anchor="ctr">
+            <a:normAutofit/>
+          </a:bodyPr>
+          <a:lstStyle>
+            <a:lvl1pPr algn="ctr" defTabSz="914400" rtl="0" eaLnBrk="1" latinLnBrk="1" hangingPunct="1">
+              <a:lnSpc>
+                <a:spcPct val="90000"/>
+              </a:lnSpc>
+              <a:spcBef>
+                <a:spcPct val="0"/>
+              </a:spcBef>
+              <a:buNone/>
+              <a:defRPr sz="3200" kern="1200" cap="all" baseline="0">
+                <a:solidFill>
+                  <a:schemeClr val="tx1"/>
+                </a:solidFill>
+                <a:effectLst/>
+                <a:latin typeface="Batang" panose="02030600000101010101" pitchFamily="18" charset="-127"/>
+                <a:ea typeface="Batang" panose="02030600000101010101" pitchFamily="18" charset="-127"/>
+                <a:cs typeface="+mj-cs"/>
+              </a:defRPr>
+            </a:lvl1pPr>
+          </a:lstStyle>
+          <a:p>
+            <a:pPr algn="l"/>
+            <a:r>
+              <a:rPr lang="en-US" altLang="ko-KR" sz="2800" cap="none" dirty="0">
+                <a:solidFill>
+                  <a:schemeClr val="bg2">
+                    <a:lumMod val="25000"/>
+                  </a:schemeClr>
+                </a:solidFill>
+                <a:latin typeface="D2Coding" panose="020B0609020101020101" pitchFamily="49" charset="-127"/>
+                <a:ea typeface="D2Coding" panose="020B0609020101020101" pitchFamily="49" charset="-127"/>
+                <a:cs typeface="Segoe UI Light" panose="020B0502040204020203" pitchFamily="34" charset="0"/>
+              </a:rPr>
+              <a:t>Task 1</a:t>
+            </a:r>
+            <a:endParaRPr lang="ko-KR" altLang="en-US" sz="2800" cap="none" dirty="0">
+              <a:solidFill>
+                <a:schemeClr val="bg2">
+                  <a:lumMod val="25000"/>
+                </a:schemeClr>
+              </a:solidFill>
+              <a:latin typeface="D2Coding" panose="020B0609020101020101" pitchFamily="49" charset="-127"/>
+              <a:ea typeface="D2Coding" panose="020B0609020101020101" pitchFamily="49" charset="-127"/>
+              <a:cs typeface="Segoe UI Light" panose="020B0502040204020203" pitchFamily="34" charset="0"/>
+            </a:endParaRPr>
+          </a:p>
+        </p:txBody>
+      </p:sp>
+      <p:sp>
+        <p:nvSpPr>
+          <p:cNvPr id="53" name="TextBox 52">
+            <a:extLst>
+              <a:ext uri="{FF2B5EF4-FFF2-40B4-BE49-F238E27FC236}">
+                <a16:creationId xmlns:a16="http://schemas.microsoft.com/office/drawing/2014/main" id="{FB4B4222-A029-EE28-760A-CB32F819ED42}"/>
+              </a:ext>
+            </a:extLst>
+          </p:cNvPr>
+          <p:cNvSpPr txBox="1"/>
+          <p:nvPr/>
+        </p:nvSpPr>
+        <p:spPr>
+          <a:xfrm>
+            <a:off x="628650" y="1265774"/>
+            <a:ext cx="10638906" cy="465320"/>
+          </a:xfrm>
+          <a:prstGeom prst="rect">
+            <a:avLst/>
+          </a:prstGeom>
+          <a:noFill/>
+        </p:spPr>
+        <p:txBody>
+          <a:bodyPr wrap="square" rtlCol="0">
+            <a:spAutoFit/>
+          </a:bodyPr>
+          <a:lstStyle/>
+          <a:p>
+            <a:pPr>
+              <a:lnSpc>
+                <a:spcPct val="150000"/>
+              </a:lnSpc>
+            </a:pPr>
+            <a:r>
+              <a:rPr lang="en-US" altLang="ko-KR" dirty="0">
+                <a:latin typeface="D2Coding" panose="020B0609020101020101" pitchFamily="49" charset="-127"/>
+                <a:ea typeface="D2Coding" panose="020B0609020101020101" pitchFamily="49" charset="-127"/>
+              </a:rPr>
+              <a:t>ROC </a:t>
+            </a:r>
+            <a:r>
+              <a:rPr lang="ko-KR" altLang="en-US" dirty="0">
+                <a:latin typeface="D2Coding" panose="020B0609020101020101" pitchFamily="49" charset="-127"/>
+                <a:ea typeface="D2Coding" panose="020B0609020101020101" pitchFamily="49" charset="-127"/>
+              </a:rPr>
+              <a:t>곡선에 대한 이해</a:t>
+            </a:r>
+          </a:p>
+        </p:txBody>
+      </p:sp>
+      <p:pic>
+        <p:nvPicPr>
+          <p:cNvPr id="8" name="그림 7">
+            <a:extLst>
+              <a:ext uri="{FF2B5EF4-FFF2-40B4-BE49-F238E27FC236}">
+                <a16:creationId xmlns:a16="http://schemas.microsoft.com/office/drawing/2014/main" id="{80275861-4308-2B5F-E45C-9324779704EE}"/>
+              </a:ext>
+            </a:extLst>
+          </p:cNvPr>
+          <p:cNvPicPr>
+            <a:picLocks noChangeAspect="1"/>
+          </p:cNvPicPr>
+          <p:nvPr/>
+        </p:nvPicPr>
+        <p:blipFill>
+          <a:blip r:embed="rId2"/>
+          <a:stretch>
+            <a:fillRect/>
+          </a:stretch>
+        </p:blipFill>
+        <p:spPr>
+          <a:xfrm>
+            <a:off x="475645" y="1987769"/>
+            <a:ext cx="1335308" cy="542056"/>
+          </a:xfrm>
+          <a:prstGeom prst="rect">
+            <a:avLst/>
+          </a:prstGeom>
+        </p:spPr>
+      </p:pic>
+      <p:pic>
+        <p:nvPicPr>
+          <p:cNvPr id="7" name="그림 6">
+            <a:extLst>
+              <a:ext uri="{FF2B5EF4-FFF2-40B4-BE49-F238E27FC236}">
+                <a16:creationId xmlns:a16="http://schemas.microsoft.com/office/drawing/2014/main" id="{667DE9CD-9268-F7ED-2AD9-28454947C82E}"/>
+              </a:ext>
+            </a:extLst>
+          </p:cNvPr>
+          <p:cNvPicPr>
+            <a:picLocks noChangeAspect="1"/>
+          </p:cNvPicPr>
+          <p:nvPr/>
+        </p:nvPicPr>
+        <p:blipFill>
+          <a:blip r:embed="rId3"/>
+          <a:stretch>
+            <a:fillRect/>
+          </a:stretch>
+        </p:blipFill>
+        <p:spPr>
+          <a:xfrm>
+            <a:off x="1223309" y="2529825"/>
+            <a:ext cx="4992635" cy="3760479"/>
+          </a:xfrm>
+          <a:prstGeom prst="rect">
+            <a:avLst/>
+          </a:prstGeom>
+        </p:spPr>
+      </p:pic>
+      <p:pic>
+        <p:nvPicPr>
+          <p:cNvPr id="10" name="그림 9">
+            <a:extLst>
+              <a:ext uri="{FF2B5EF4-FFF2-40B4-BE49-F238E27FC236}">
+                <a16:creationId xmlns:a16="http://schemas.microsoft.com/office/drawing/2014/main" id="{2C46BF3C-0170-F9A7-A453-BF3E394B95D2}"/>
+              </a:ext>
+            </a:extLst>
+          </p:cNvPr>
+          <p:cNvPicPr>
+            <a:picLocks noChangeAspect="1"/>
+          </p:cNvPicPr>
+          <p:nvPr/>
+        </p:nvPicPr>
+        <p:blipFill>
+          <a:blip r:embed="rId4"/>
+          <a:stretch>
+            <a:fillRect/>
+          </a:stretch>
+        </p:blipFill>
+        <p:spPr>
+          <a:xfrm>
+            <a:off x="6181751" y="5824928"/>
+            <a:ext cx="1322087" cy="515614"/>
+          </a:xfrm>
+          <a:prstGeom prst="rect">
+            <a:avLst/>
+          </a:prstGeom>
+        </p:spPr>
+      </p:pic>
+      <p:graphicFrame>
+        <p:nvGraphicFramePr>
+          <p:cNvPr id="12" name="표 11">
+            <a:extLst>
+              <a:ext uri="{FF2B5EF4-FFF2-40B4-BE49-F238E27FC236}">
+                <a16:creationId xmlns:a16="http://schemas.microsoft.com/office/drawing/2014/main" id="{98CCB7DE-54DD-7FB1-0BA9-DD718F441875}"/>
+              </a:ext>
+            </a:extLst>
+          </p:cNvPr>
+          <p:cNvGraphicFramePr>
+            <a:graphicFrameLocks noGrp="1"/>
+          </p:cNvGraphicFramePr>
+          <p:nvPr>
+            <p:extLst>
+              <p:ext uri="{D42A27DB-BD31-4B8C-83A1-F6EECF244321}">
+                <p14:modId xmlns:p14="http://schemas.microsoft.com/office/powerpoint/2010/main" val="4085301476"/>
+              </p:ext>
+            </p:extLst>
+          </p:nvPr>
+        </p:nvGraphicFramePr>
+        <p:xfrm>
+          <a:off x="6345383" y="2595585"/>
+          <a:ext cx="5477157" cy="2958004"/>
+        </p:xfrm>
+        <a:graphic>
+          <a:graphicData uri="http://schemas.openxmlformats.org/drawingml/2006/table">
+            <a:tbl>
+              <a:tblPr>
+                <a:tableStyleId>{5C22544A-7EE6-4342-B048-85BDC9FD1C3A}</a:tableStyleId>
+              </a:tblPr>
+              <a:tblGrid>
+                <a:gridCol w="782451">
+                  <a:extLst>
+                    <a:ext uri="{9D8B030D-6E8A-4147-A177-3AD203B41FA5}">
+                      <a16:colId xmlns:a16="http://schemas.microsoft.com/office/drawing/2014/main" val="2429577743"/>
+                    </a:ext>
+                  </a:extLst>
+                </a:gridCol>
+                <a:gridCol w="782451">
+                  <a:extLst>
+                    <a:ext uri="{9D8B030D-6E8A-4147-A177-3AD203B41FA5}">
+                      <a16:colId xmlns:a16="http://schemas.microsoft.com/office/drawing/2014/main" val="3491129400"/>
+                    </a:ext>
+                  </a:extLst>
+                </a:gridCol>
+                <a:gridCol w="782451">
+                  <a:extLst>
+                    <a:ext uri="{9D8B030D-6E8A-4147-A177-3AD203B41FA5}">
+                      <a16:colId xmlns:a16="http://schemas.microsoft.com/office/drawing/2014/main" val="1587279525"/>
+                    </a:ext>
+                  </a:extLst>
+                </a:gridCol>
+                <a:gridCol w="782451">
+                  <a:extLst>
+                    <a:ext uri="{9D8B030D-6E8A-4147-A177-3AD203B41FA5}">
+                      <a16:colId xmlns:a16="http://schemas.microsoft.com/office/drawing/2014/main" val="3928954879"/>
+                    </a:ext>
+                  </a:extLst>
+                </a:gridCol>
+                <a:gridCol w="782451">
+                  <a:extLst>
+                    <a:ext uri="{9D8B030D-6E8A-4147-A177-3AD203B41FA5}">
+                      <a16:colId xmlns:a16="http://schemas.microsoft.com/office/drawing/2014/main" val="2752356509"/>
+                    </a:ext>
+                  </a:extLst>
+                </a:gridCol>
+                <a:gridCol w="782451">
+                  <a:extLst>
+                    <a:ext uri="{9D8B030D-6E8A-4147-A177-3AD203B41FA5}">
+                      <a16:colId xmlns:a16="http://schemas.microsoft.com/office/drawing/2014/main" val="3443588928"/>
+                    </a:ext>
+                  </a:extLst>
+                </a:gridCol>
+                <a:gridCol w="782451">
+                  <a:extLst>
+                    <a:ext uri="{9D8B030D-6E8A-4147-A177-3AD203B41FA5}">
+                      <a16:colId xmlns:a16="http://schemas.microsoft.com/office/drawing/2014/main" val="3280451504"/>
+                    </a:ext>
+                  </a:extLst>
+                </a:gridCol>
+              </a:tblGrid>
+              <a:tr h="400801">
+                <a:tc>
+                  <a:txBody>
+                    <a:bodyPr/>
+                    <a:lstStyle/>
+                    <a:p>
+                      <a:pPr algn="ctr" fontAlgn="t">
+                        <a:buNone/>
+                      </a:pPr>
+                      <a:r>
+                        <a:rPr lang="ko-KR" sz="1200" u="none" strike="noStrike" dirty="0" err="1">
+                          <a:effectLst/>
+                          <a:latin typeface="D2Coding" panose="020B0609020101020101" pitchFamily="49" charset="-127"/>
+                          <a:ea typeface="D2Coding" panose="020B0609020101020101" pitchFamily="49" charset="-127"/>
+                        </a:rPr>
+                        <a:t>Threshold</a:t>
+                      </a:r>
+                      <a:endParaRPr lang="ko-KR" sz="1200" b="1" i="0" u="none" strike="noStrike" dirty="0">
+                        <a:solidFill>
+                          <a:srgbClr val="000000"/>
+                        </a:solidFill>
+                        <a:effectLst/>
+                        <a:latin typeface="D2Coding" panose="020B0609020101020101" pitchFamily="49" charset="-127"/>
+                        <a:ea typeface="D2Coding" panose="020B0609020101020101" pitchFamily="49" charset="-127"/>
+                      </a:endParaRPr>
+                    </a:p>
+                  </a:txBody>
+                  <a:tcPr marL="8763" marR="8763" marT="8763" marB="0">
+                    <a:lnL w="12700" cap="flat" cmpd="sng" algn="ctr">
+                      <a:solidFill>
+                        <a:schemeClr val="tx1"/>
+                      </a:solidFill>
+                      <a:prstDash val="solid"/>
+                      <a:round/>
+                      <a:headEnd type="none" w="med" len="med"/>
+                      <a:tailEnd type="none" w="med" len="med"/>
+                    </a:lnL>
+                    <a:lnT w="12700" cap="flat" cmpd="sng" algn="ctr">
+                      <a:solidFill>
+                        <a:schemeClr val="tx1"/>
+                      </a:solidFill>
+                      <a:prstDash val="solid"/>
+                      <a:round/>
+                      <a:headEnd type="none" w="med" len="med"/>
+                      <a:tailEnd type="none" w="med" len="med"/>
+                    </a:lnT>
+                  </a:tcPr>
+                </a:tc>
+                <a:tc>
+                  <a:txBody>
+                    <a:bodyPr/>
+                    <a:lstStyle/>
+                    <a:p>
+                      <a:pPr algn="ctr" fontAlgn="t">
+                        <a:buNone/>
+                      </a:pPr>
+                      <a:r>
+                        <a:rPr lang="ko-KR" sz="1200" u="none" strike="noStrike" dirty="0">
+                          <a:effectLst/>
+                          <a:latin typeface="D2Coding" panose="020B0609020101020101" pitchFamily="49" charset="-127"/>
+                          <a:ea typeface="D2Coding" panose="020B0609020101020101" pitchFamily="49" charset="-127"/>
+                        </a:rPr>
+                        <a:t>TPR (</a:t>
+                      </a:r>
+                      <a:r>
+                        <a:rPr lang="ko-KR" sz="1200" u="none" strike="noStrike" dirty="0" err="1">
+                          <a:effectLst/>
+                          <a:latin typeface="D2Coding" panose="020B0609020101020101" pitchFamily="49" charset="-127"/>
+                          <a:ea typeface="D2Coding" panose="020B0609020101020101" pitchFamily="49" charset="-127"/>
+                        </a:rPr>
+                        <a:t>Recall</a:t>
+                      </a:r>
+                      <a:r>
+                        <a:rPr lang="ko-KR" sz="1200" u="none" strike="noStrike" dirty="0">
+                          <a:effectLst/>
+                          <a:latin typeface="D2Coding" panose="020B0609020101020101" pitchFamily="49" charset="-127"/>
+                          <a:ea typeface="D2Coding" panose="020B0609020101020101" pitchFamily="49" charset="-127"/>
+                        </a:rPr>
+                        <a:t>)</a:t>
+                      </a:r>
+                      <a:endParaRPr lang="ko-KR" sz="1200" b="1" i="0" u="none" strike="noStrike" dirty="0">
+                        <a:solidFill>
+                          <a:srgbClr val="000000"/>
+                        </a:solidFill>
+                        <a:effectLst/>
+                        <a:latin typeface="D2Coding" panose="020B0609020101020101" pitchFamily="49" charset="-127"/>
+                        <a:ea typeface="D2Coding" panose="020B0609020101020101" pitchFamily="49" charset="-127"/>
+                      </a:endParaRPr>
+                    </a:p>
+                  </a:txBody>
+                  <a:tcPr marL="8763" marR="8763" marT="8763" marB="0">
+                    <a:lnT w="12700" cap="flat" cmpd="sng" algn="ctr">
+                      <a:solidFill>
+                        <a:schemeClr val="tx1"/>
+                      </a:solidFill>
+                      <a:prstDash val="solid"/>
+                      <a:round/>
+                      <a:headEnd type="none" w="med" len="med"/>
+                      <a:tailEnd type="none" w="med" len="med"/>
+                    </a:lnT>
+                  </a:tcPr>
+                </a:tc>
+                <a:tc>
+                  <a:txBody>
+                    <a:bodyPr/>
+                    <a:lstStyle/>
+                    <a:p>
+                      <a:pPr algn="ctr" fontAlgn="t">
+                        <a:buNone/>
+                      </a:pPr>
+                      <a:r>
+                        <a:rPr lang="ko-KR" sz="1200" u="none" strike="noStrike" dirty="0">
+                          <a:effectLst/>
+                          <a:latin typeface="D2Coding" panose="020B0609020101020101" pitchFamily="49" charset="-127"/>
+                          <a:ea typeface="D2Coding" panose="020B0609020101020101" pitchFamily="49" charset="-127"/>
+                        </a:rPr>
+                        <a:t>FPR</a:t>
+                      </a:r>
+                      <a:endParaRPr lang="ko-KR" sz="1200" b="1" i="0" u="none" strike="noStrike" dirty="0">
+                        <a:solidFill>
+                          <a:srgbClr val="000000"/>
+                        </a:solidFill>
+                        <a:effectLst/>
+                        <a:latin typeface="D2Coding" panose="020B0609020101020101" pitchFamily="49" charset="-127"/>
+                        <a:ea typeface="D2Coding" panose="020B0609020101020101" pitchFamily="49" charset="-127"/>
+                      </a:endParaRPr>
+                    </a:p>
+                  </a:txBody>
+                  <a:tcPr marL="8763" marR="8763" marT="8763" marB="0">
+                    <a:lnT w="12700" cap="flat" cmpd="sng" algn="ctr">
+                      <a:solidFill>
+                        <a:schemeClr val="tx1"/>
+                      </a:solidFill>
+                      <a:prstDash val="solid"/>
+                      <a:round/>
+                      <a:headEnd type="none" w="med" len="med"/>
+                      <a:tailEnd type="none" w="med" len="med"/>
+                    </a:lnT>
+                  </a:tcPr>
+                </a:tc>
+                <a:tc>
+                  <a:txBody>
+                    <a:bodyPr/>
+                    <a:lstStyle/>
+                    <a:p>
+                      <a:pPr algn="ctr" fontAlgn="t">
+                        <a:buNone/>
+                      </a:pPr>
+                      <a:r>
+                        <a:rPr lang="ko-KR" sz="1200" u="none" strike="noStrike" dirty="0">
+                          <a:effectLst/>
+                          <a:latin typeface="D2Coding" panose="020B0609020101020101" pitchFamily="49" charset="-127"/>
+                          <a:ea typeface="D2Coding" panose="020B0609020101020101" pitchFamily="49" charset="-127"/>
+                        </a:rPr>
+                        <a:t>TN</a:t>
+                      </a:r>
+                      <a:endParaRPr lang="ko-KR" sz="1200" b="1" i="0" u="none" strike="noStrike" dirty="0">
+                        <a:solidFill>
+                          <a:srgbClr val="000000"/>
+                        </a:solidFill>
+                        <a:effectLst/>
+                        <a:latin typeface="D2Coding" panose="020B0609020101020101" pitchFamily="49" charset="-127"/>
+                        <a:ea typeface="D2Coding" panose="020B0609020101020101" pitchFamily="49" charset="-127"/>
+                      </a:endParaRPr>
+                    </a:p>
+                  </a:txBody>
+                  <a:tcPr marL="8763" marR="8763" marT="8763" marB="0">
+                    <a:lnT w="12700" cap="flat" cmpd="sng" algn="ctr">
+                      <a:solidFill>
+                        <a:schemeClr val="tx1"/>
+                      </a:solidFill>
+                      <a:prstDash val="solid"/>
+                      <a:round/>
+                      <a:headEnd type="none" w="med" len="med"/>
+                      <a:tailEnd type="none" w="med" len="med"/>
+                    </a:lnT>
+                  </a:tcPr>
+                </a:tc>
+                <a:tc>
+                  <a:txBody>
+                    <a:bodyPr/>
+                    <a:lstStyle/>
+                    <a:p>
+                      <a:pPr algn="ctr" fontAlgn="t">
+                        <a:buNone/>
+                      </a:pPr>
+                      <a:r>
+                        <a:rPr lang="ko-KR" sz="1200" u="none" strike="noStrike" dirty="0">
+                          <a:effectLst/>
+                          <a:latin typeface="D2Coding" panose="020B0609020101020101" pitchFamily="49" charset="-127"/>
+                          <a:ea typeface="D2Coding" panose="020B0609020101020101" pitchFamily="49" charset="-127"/>
+                        </a:rPr>
+                        <a:t>FP</a:t>
+                      </a:r>
+                      <a:endParaRPr lang="ko-KR" sz="1200" b="1" i="0" u="none" strike="noStrike" dirty="0">
+                        <a:solidFill>
+                          <a:srgbClr val="000000"/>
+                        </a:solidFill>
+                        <a:effectLst/>
+                        <a:latin typeface="D2Coding" panose="020B0609020101020101" pitchFamily="49" charset="-127"/>
+                        <a:ea typeface="D2Coding" panose="020B0609020101020101" pitchFamily="49" charset="-127"/>
+                      </a:endParaRPr>
+                    </a:p>
+                  </a:txBody>
+                  <a:tcPr marL="8763" marR="8763" marT="8763" marB="0">
+                    <a:lnT w="12700" cap="flat" cmpd="sng" algn="ctr">
+                      <a:solidFill>
+                        <a:schemeClr val="tx1"/>
+                      </a:solidFill>
+                      <a:prstDash val="solid"/>
+                      <a:round/>
+                      <a:headEnd type="none" w="med" len="med"/>
+                      <a:tailEnd type="none" w="med" len="med"/>
+                    </a:lnT>
+                  </a:tcPr>
+                </a:tc>
+                <a:tc>
+                  <a:txBody>
+                    <a:bodyPr/>
+                    <a:lstStyle/>
+                    <a:p>
+                      <a:pPr algn="ctr" fontAlgn="t">
+                        <a:buNone/>
+                      </a:pPr>
+                      <a:r>
+                        <a:rPr lang="ko-KR" sz="1200" u="none" strike="noStrike" dirty="0">
+                          <a:effectLst/>
+                          <a:latin typeface="D2Coding" panose="020B0609020101020101" pitchFamily="49" charset="-127"/>
+                          <a:ea typeface="D2Coding" panose="020B0609020101020101" pitchFamily="49" charset="-127"/>
+                        </a:rPr>
+                        <a:t>FN</a:t>
+                      </a:r>
+                      <a:endParaRPr lang="ko-KR" sz="1200" b="1" i="0" u="none" strike="noStrike" dirty="0">
+                        <a:solidFill>
+                          <a:srgbClr val="000000"/>
+                        </a:solidFill>
+                        <a:effectLst/>
+                        <a:latin typeface="D2Coding" panose="020B0609020101020101" pitchFamily="49" charset="-127"/>
+                        <a:ea typeface="D2Coding" panose="020B0609020101020101" pitchFamily="49" charset="-127"/>
+                      </a:endParaRPr>
+                    </a:p>
+                  </a:txBody>
+                  <a:tcPr marL="8763" marR="8763" marT="8763" marB="0">
+                    <a:lnT w="12700" cap="flat" cmpd="sng" algn="ctr">
+                      <a:solidFill>
+                        <a:schemeClr val="tx1"/>
+                      </a:solidFill>
+                      <a:prstDash val="solid"/>
+                      <a:round/>
+                      <a:headEnd type="none" w="med" len="med"/>
+                      <a:tailEnd type="none" w="med" len="med"/>
+                    </a:lnT>
+                  </a:tcPr>
+                </a:tc>
+                <a:tc>
+                  <a:txBody>
+                    <a:bodyPr/>
+                    <a:lstStyle/>
+                    <a:p>
+                      <a:pPr algn="ctr" fontAlgn="t">
+                        <a:buNone/>
+                      </a:pPr>
+                      <a:r>
+                        <a:rPr lang="ko-KR" sz="1200" u="none" strike="noStrike" dirty="0">
+                          <a:effectLst/>
+                          <a:latin typeface="D2Coding" panose="020B0609020101020101" pitchFamily="49" charset="-127"/>
+                          <a:ea typeface="D2Coding" panose="020B0609020101020101" pitchFamily="49" charset="-127"/>
+                        </a:rPr>
+                        <a:t>TP</a:t>
+                      </a:r>
+                      <a:endParaRPr lang="ko-KR" sz="1200" b="1" i="0" u="none" strike="noStrike" dirty="0">
+                        <a:solidFill>
+                          <a:srgbClr val="000000"/>
+                        </a:solidFill>
+                        <a:effectLst/>
+                        <a:latin typeface="D2Coding" panose="020B0609020101020101" pitchFamily="49" charset="-127"/>
+                        <a:ea typeface="D2Coding" panose="020B0609020101020101" pitchFamily="49" charset="-127"/>
+                      </a:endParaRPr>
+                    </a:p>
+                  </a:txBody>
+                  <a:tcPr marL="8763" marR="8763" marT="8763" marB="0">
+                    <a:lnR w="12700" cap="flat" cmpd="sng" algn="ctr">
+                      <a:solidFill>
+                        <a:schemeClr val="tx1"/>
+                      </a:solidFill>
+                      <a:prstDash val="solid"/>
+                      <a:round/>
+                      <a:headEnd type="none" w="med" len="med"/>
+                      <a:tailEnd type="none" w="med" len="med"/>
+                    </a:lnR>
+                    <a:lnT w="12700" cap="flat" cmpd="sng" algn="ctr">
+                      <a:solidFill>
+                        <a:schemeClr val="tx1"/>
+                      </a:solidFill>
+                      <a:prstDash val="solid"/>
+                      <a:round/>
+                      <a:headEnd type="none" w="med" len="med"/>
+                      <a:tailEnd type="none" w="med" len="med"/>
+                    </a:lnT>
+                  </a:tcPr>
+                </a:tc>
+                <a:extLst>
+                  <a:ext uri="{0D108BD9-81ED-4DB2-BD59-A6C34878D82A}">
+                    <a16:rowId xmlns:a16="http://schemas.microsoft.com/office/drawing/2014/main" val="2523967749"/>
+                  </a:ext>
+                </a:extLst>
+              </a:tr>
+              <a:tr h="232473">
+                <a:tc>
+                  <a:txBody>
+                    <a:bodyPr/>
+                    <a:lstStyle/>
+                    <a:p>
+                      <a:pPr algn="r" fontAlgn="b">
+                        <a:buNone/>
+                      </a:pPr>
+                      <a:r>
+                        <a:rPr lang="ko-KR" sz="1200" u="none" strike="noStrike">
+                          <a:effectLst/>
+                          <a:latin typeface="D2Coding" panose="020B0609020101020101" pitchFamily="49" charset="-127"/>
+                          <a:ea typeface="D2Coding" panose="020B0609020101020101" pitchFamily="49" charset="-127"/>
+                        </a:rPr>
+                        <a:t>0.14</a:t>
+                      </a:r>
+                      <a:endParaRPr lang="ko-KR" sz="1200" b="0" i="0" u="none" strike="noStrike">
+                        <a:solidFill>
+                          <a:srgbClr val="000000"/>
+                        </a:solidFill>
+                        <a:effectLst/>
+                        <a:latin typeface="D2Coding" panose="020B0609020101020101" pitchFamily="49" charset="-127"/>
+                        <a:ea typeface="D2Coding" panose="020B0609020101020101" pitchFamily="49" charset="-127"/>
+                      </a:endParaRPr>
+                    </a:p>
+                  </a:txBody>
+                  <a:tcPr marL="8763" marR="8763" marT="8763" marB="0" anchor="b">
+                    <a:lnL w="12700" cap="flat" cmpd="sng" algn="ctr">
+                      <a:solidFill>
+                        <a:schemeClr val="tx1"/>
+                      </a:solidFill>
+                      <a:prstDash val="solid"/>
+                      <a:round/>
+                      <a:headEnd type="none" w="med" len="med"/>
+                      <a:tailEnd type="none" w="med" len="med"/>
+                    </a:lnL>
+                  </a:tcPr>
+                </a:tc>
+                <a:tc>
+                  <a:txBody>
+                    <a:bodyPr/>
+                    <a:lstStyle/>
+                    <a:p>
+                      <a:pPr algn="r" fontAlgn="b">
+                        <a:buNone/>
+                      </a:pPr>
+                      <a:r>
+                        <a:rPr lang="ko-KR" sz="1200" u="none" strike="noStrike">
+                          <a:effectLst/>
+                          <a:latin typeface="D2Coding" panose="020B0609020101020101" pitchFamily="49" charset="-127"/>
+                          <a:ea typeface="D2Coding" panose="020B0609020101020101" pitchFamily="49" charset="-127"/>
+                        </a:rPr>
+                        <a:t>0.00</a:t>
+                      </a:r>
+                      <a:endParaRPr lang="ko-KR" sz="1200" b="0" i="0" u="none" strike="noStrike">
+                        <a:solidFill>
+                          <a:srgbClr val="000000"/>
+                        </a:solidFill>
+                        <a:effectLst/>
+                        <a:latin typeface="D2Coding" panose="020B0609020101020101" pitchFamily="49" charset="-127"/>
+                        <a:ea typeface="D2Coding" panose="020B0609020101020101" pitchFamily="49" charset="-127"/>
+                      </a:endParaRPr>
+                    </a:p>
+                  </a:txBody>
+                  <a:tcPr marL="8763" marR="8763" marT="8763" marB="0" anchor="b"/>
+                </a:tc>
+                <a:tc>
+                  <a:txBody>
+                    <a:bodyPr/>
+                    <a:lstStyle/>
+                    <a:p>
+                      <a:pPr algn="r" fontAlgn="b">
+                        <a:buNone/>
+                      </a:pPr>
+                      <a:r>
+                        <a:rPr lang="ko-KR" sz="1200" u="none" strike="noStrike">
+                          <a:effectLst/>
+                          <a:latin typeface="D2Coding" panose="020B0609020101020101" pitchFamily="49" charset="-127"/>
+                          <a:ea typeface="D2Coding" panose="020B0609020101020101" pitchFamily="49" charset="-127"/>
+                        </a:rPr>
+                        <a:t>0.00</a:t>
+                      </a:r>
+                      <a:endParaRPr lang="ko-KR" sz="1200" b="0" i="0" u="none" strike="noStrike">
+                        <a:solidFill>
+                          <a:srgbClr val="000000"/>
+                        </a:solidFill>
+                        <a:effectLst/>
+                        <a:latin typeface="D2Coding" panose="020B0609020101020101" pitchFamily="49" charset="-127"/>
+                        <a:ea typeface="D2Coding" panose="020B0609020101020101" pitchFamily="49" charset="-127"/>
+                      </a:endParaRPr>
+                    </a:p>
+                  </a:txBody>
+                  <a:tcPr marL="8763" marR="8763" marT="8763" marB="0" anchor="b"/>
+                </a:tc>
+                <a:tc>
+                  <a:txBody>
+                    <a:bodyPr/>
+                    <a:lstStyle/>
+                    <a:p>
+                      <a:pPr algn="r" fontAlgn="b">
+                        <a:buNone/>
+                      </a:pPr>
+                      <a:r>
+                        <a:rPr lang="ko-KR" sz="1200" u="none" strike="noStrike">
+                          <a:effectLst/>
+                          <a:latin typeface="D2Coding" panose="020B0609020101020101" pitchFamily="49" charset="-127"/>
+                          <a:ea typeface="D2Coding" panose="020B0609020101020101" pitchFamily="49" charset="-127"/>
+                        </a:rPr>
+                        <a:t>492</a:t>
+                      </a:r>
+                      <a:endParaRPr lang="ko-KR" sz="1200" b="0" i="0" u="none" strike="noStrike">
+                        <a:solidFill>
+                          <a:srgbClr val="000000"/>
+                        </a:solidFill>
+                        <a:effectLst/>
+                        <a:latin typeface="D2Coding" panose="020B0609020101020101" pitchFamily="49" charset="-127"/>
+                        <a:ea typeface="D2Coding" panose="020B0609020101020101" pitchFamily="49" charset="-127"/>
+                      </a:endParaRPr>
+                    </a:p>
+                  </a:txBody>
+                  <a:tcPr marL="8763" marR="8763" marT="8763" marB="0" anchor="b"/>
+                </a:tc>
+                <a:tc>
+                  <a:txBody>
+                    <a:bodyPr/>
+                    <a:lstStyle/>
+                    <a:p>
+                      <a:pPr algn="r" fontAlgn="b">
+                        <a:buNone/>
+                      </a:pPr>
+                      <a:r>
+                        <a:rPr lang="ko-KR" sz="1200" u="none" strike="noStrike">
+                          <a:effectLst/>
+                          <a:latin typeface="D2Coding" panose="020B0609020101020101" pitchFamily="49" charset="-127"/>
+                          <a:ea typeface="D2Coding" panose="020B0609020101020101" pitchFamily="49" charset="-127"/>
+                        </a:rPr>
+                        <a:t>1</a:t>
+                      </a:r>
+                      <a:endParaRPr lang="ko-KR" sz="1200" b="0" i="0" u="none" strike="noStrike">
+                        <a:solidFill>
+                          <a:srgbClr val="000000"/>
+                        </a:solidFill>
+                        <a:effectLst/>
+                        <a:latin typeface="D2Coding" panose="020B0609020101020101" pitchFamily="49" charset="-127"/>
+                        <a:ea typeface="D2Coding" panose="020B0609020101020101" pitchFamily="49" charset="-127"/>
+                      </a:endParaRPr>
+                    </a:p>
+                  </a:txBody>
+                  <a:tcPr marL="8763" marR="8763" marT="8763" marB="0" anchor="b"/>
+                </a:tc>
+                <a:tc>
+                  <a:txBody>
+                    <a:bodyPr/>
+                    <a:lstStyle/>
+                    <a:p>
+                      <a:pPr algn="r" fontAlgn="b">
+                        <a:buNone/>
+                      </a:pPr>
+                      <a:r>
+                        <a:rPr lang="ko-KR" sz="1200" u="none" strike="noStrike">
+                          <a:effectLst/>
+                          <a:latin typeface="D2Coding" panose="020B0609020101020101" pitchFamily="49" charset="-127"/>
+                          <a:ea typeface="D2Coding" panose="020B0609020101020101" pitchFamily="49" charset="-127"/>
+                        </a:rPr>
+                        <a:t>7</a:t>
+                      </a:r>
+                      <a:endParaRPr lang="ko-KR" sz="1200" b="0" i="0" u="none" strike="noStrike">
+                        <a:solidFill>
+                          <a:srgbClr val="000000"/>
+                        </a:solidFill>
+                        <a:effectLst/>
+                        <a:latin typeface="D2Coding" panose="020B0609020101020101" pitchFamily="49" charset="-127"/>
+                        <a:ea typeface="D2Coding" panose="020B0609020101020101" pitchFamily="49" charset="-127"/>
+                      </a:endParaRPr>
+                    </a:p>
+                  </a:txBody>
+                  <a:tcPr marL="8763" marR="8763" marT="8763" marB="0" anchor="b"/>
+                </a:tc>
+                <a:tc>
+                  <a:txBody>
+                    <a:bodyPr/>
+                    <a:lstStyle/>
+                    <a:p>
+                      <a:pPr algn="r" fontAlgn="b">
+                        <a:buNone/>
+                      </a:pPr>
+                      <a:r>
+                        <a:rPr lang="ko-KR" sz="1200" u="none" strike="noStrike" dirty="0">
+                          <a:effectLst/>
+                          <a:latin typeface="D2Coding" panose="020B0609020101020101" pitchFamily="49" charset="-127"/>
+                          <a:ea typeface="D2Coding" panose="020B0609020101020101" pitchFamily="49" charset="-127"/>
+                        </a:rPr>
+                        <a:t>0</a:t>
+                      </a:r>
+                      <a:endParaRPr lang="ko-KR" sz="1200" b="0" i="0" u="none" strike="noStrike" dirty="0">
+                        <a:solidFill>
+                          <a:srgbClr val="000000"/>
+                        </a:solidFill>
+                        <a:effectLst/>
+                        <a:latin typeface="D2Coding" panose="020B0609020101020101" pitchFamily="49" charset="-127"/>
+                        <a:ea typeface="D2Coding" panose="020B0609020101020101" pitchFamily="49" charset="-127"/>
+                      </a:endParaRPr>
+                    </a:p>
+                  </a:txBody>
+                  <a:tcPr marL="8763" marR="8763" marT="8763" marB="0" anchor="b">
+                    <a:lnR w="12700" cap="flat" cmpd="sng" algn="ctr">
+                      <a:solidFill>
+                        <a:schemeClr val="tx1"/>
+                      </a:solidFill>
+                      <a:prstDash val="solid"/>
+                      <a:round/>
+                      <a:headEnd type="none" w="med" len="med"/>
+                      <a:tailEnd type="none" w="med" len="med"/>
+                    </a:lnR>
+                  </a:tcPr>
+                </a:tc>
+                <a:extLst>
+                  <a:ext uri="{0D108BD9-81ED-4DB2-BD59-A6C34878D82A}">
+                    <a16:rowId xmlns:a16="http://schemas.microsoft.com/office/drawing/2014/main" val="3079333817"/>
+                  </a:ext>
+                </a:extLst>
+              </a:tr>
+              <a:tr h="232473">
+                <a:tc>
+                  <a:txBody>
+                    <a:bodyPr/>
+                    <a:lstStyle/>
+                    <a:p>
+                      <a:pPr algn="r" fontAlgn="b">
+                        <a:buNone/>
+                      </a:pPr>
+                      <a:r>
+                        <a:rPr lang="ko-KR" sz="1200" u="none" strike="noStrike">
+                          <a:effectLst/>
+                          <a:latin typeface="D2Coding" panose="020B0609020101020101" pitchFamily="49" charset="-127"/>
+                          <a:ea typeface="D2Coding" panose="020B0609020101020101" pitchFamily="49" charset="-127"/>
+                        </a:rPr>
+                        <a:t>0.11</a:t>
+                      </a:r>
+                      <a:endParaRPr lang="ko-KR" sz="1200" b="0" i="0" u="none" strike="noStrike">
+                        <a:solidFill>
+                          <a:srgbClr val="000000"/>
+                        </a:solidFill>
+                        <a:effectLst/>
+                        <a:latin typeface="D2Coding" panose="020B0609020101020101" pitchFamily="49" charset="-127"/>
+                        <a:ea typeface="D2Coding" panose="020B0609020101020101" pitchFamily="49" charset="-127"/>
+                      </a:endParaRPr>
+                    </a:p>
+                  </a:txBody>
+                  <a:tcPr marL="8763" marR="8763" marT="8763" marB="0" anchor="b">
+                    <a:lnL w="12700" cap="flat" cmpd="sng" algn="ctr">
+                      <a:solidFill>
+                        <a:schemeClr val="tx1"/>
+                      </a:solidFill>
+                      <a:prstDash val="solid"/>
+                      <a:round/>
+                      <a:headEnd type="none" w="med" len="med"/>
+                      <a:tailEnd type="none" w="med" len="med"/>
+                    </a:lnL>
+                  </a:tcPr>
+                </a:tc>
+                <a:tc>
+                  <a:txBody>
+                    <a:bodyPr/>
+                    <a:lstStyle/>
+                    <a:p>
+                      <a:pPr algn="r" fontAlgn="b">
+                        <a:buNone/>
+                      </a:pPr>
+                      <a:r>
+                        <a:rPr lang="ko-KR" sz="1200" u="none" strike="noStrike">
+                          <a:effectLst/>
+                          <a:latin typeface="D2Coding" panose="020B0609020101020101" pitchFamily="49" charset="-127"/>
+                          <a:ea typeface="D2Coding" panose="020B0609020101020101" pitchFamily="49" charset="-127"/>
+                        </a:rPr>
+                        <a:t>0.29</a:t>
+                      </a:r>
+                      <a:endParaRPr lang="ko-KR" sz="1200" b="0" i="0" u="none" strike="noStrike">
+                        <a:solidFill>
+                          <a:srgbClr val="000000"/>
+                        </a:solidFill>
+                        <a:effectLst/>
+                        <a:latin typeface="D2Coding" panose="020B0609020101020101" pitchFamily="49" charset="-127"/>
+                        <a:ea typeface="D2Coding" panose="020B0609020101020101" pitchFamily="49" charset="-127"/>
+                      </a:endParaRPr>
+                    </a:p>
+                  </a:txBody>
+                  <a:tcPr marL="8763" marR="8763" marT="8763" marB="0" anchor="b"/>
+                </a:tc>
+                <a:tc>
+                  <a:txBody>
+                    <a:bodyPr/>
+                    <a:lstStyle/>
+                    <a:p>
+                      <a:pPr algn="r" fontAlgn="b">
+                        <a:buNone/>
+                      </a:pPr>
+                      <a:r>
+                        <a:rPr lang="ko-KR" sz="1200" u="none" strike="noStrike">
+                          <a:effectLst/>
+                          <a:latin typeface="D2Coding" panose="020B0609020101020101" pitchFamily="49" charset="-127"/>
+                          <a:ea typeface="D2Coding" panose="020B0609020101020101" pitchFamily="49" charset="-127"/>
+                        </a:rPr>
+                        <a:t>0.01</a:t>
+                      </a:r>
+                      <a:endParaRPr lang="ko-KR" sz="1200" b="0" i="0" u="none" strike="noStrike">
+                        <a:solidFill>
+                          <a:srgbClr val="000000"/>
+                        </a:solidFill>
+                        <a:effectLst/>
+                        <a:latin typeface="D2Coding" panose="020B0609020101020101" pitchFamily="49" charset="-127"/>
+                        <a:ea typeface="D2Coding" panose="020B0609020101020101" pitchFamily="49" charset="-127"/>
+                      </a:endParaRPr>
+                    </a:p>
+                  </a:txBody>
+                  <a:tcPr marL="8763" marR="8763" marT="8763" marB="0" anchor="b"/>
+                </a:tc>
+                <a:tc>
+                  <a:txBody>
+                    <a:bodyPr/>
+                    <a:lstStyle/>
+                    <a:p>
+                      <a:pPr algn="r" fontAlgn="b">
+                        <a:buNone/>
+                      </a:pPr>
+                      <a:r>
+                        <a:rPr lang="ko-KR" sz="1200" u="none" strike="noStrike">
+                          <a:effectLst/>
+                          <a:latin typeface="D2Coding" panose="020B0609020101020101" pitchFamily="49" charset="-127"/>
+                          <a:ea typeface="D2Coding" panose="020B0609020101020101" pitchFamily="49" charset="-127"/>
+                        </a:rPr>
+                        <a:t>486</a:t>
+                      </a:r>
+                      <a:endParaRPr lang="ko-KR" sz="1200" b="0" i="0" u="none" strike="noStrike">
+                        <a:solidFill>
+                          <a:srgbClr val="000000"/>
+                        </a:solidFill>
+                        <a:effectLst/>
+                        <a:latin typeface="D2Coding" panose="020B0609020101020101" pitchFamily="49" charset="-127"/>
+                        <a:ea typeface="D2Coding" panose="020B0609020101020101" pitchFamily="49" charset="-127"/>
+                      </a:endParaRPr>
+                    </a:p>
+                  </a:txBody>
+                  <a:tcPr marL="8763" marR="8763" marT="8763" marB="0" anchor="b"/>
+                </a:tc>
+                <a:tc>
+                  <a:txBody>
+                    <a:bodyPr/>
+                    <a:lstStyle/>
+                    <a:p>
+                      <a:pPr algn="r" fontAlgn="b">
+                        <a:buNone/>
+                      </a:pPr>
+                      <a:r>
+                        <a:rPr lang="ko-KR" sz="1200" u="none" strike="noStrike">
+                          <a:effectLst/>
+                          <a:latin typeface="D2Coding" panose="020B0609020101020101" pitchFamily="49" charset="-127"/>
+                          <a:ea typeface="D2Coding" panose="020B0609020101020101" pitchFamily="49" charset="-127"/>
+                        </a:rPr>
+                        <a:t>7</a:t>
+                      </a:r>
+                      <a:endParaRPr lang="ko-KR" sz="1200" b="0" i="0" u="none" strike="noStrike">
+                        <a:solidFill>
+                          <a:srgbClr val="000000"/>
+                        </a:solidFill>
+                        <a:effectLst/>
+                        <a:latin typeface="D2Coding" panose="020B0609020101020101" pitchFamily="49" charset="-127"/>
+                        <a:ea typeface="D2Coding" panose="020B0609020101020101" pitchFamily="49" charset="-127"/>
+                      </a:endParaRPr>
+                    </a:p>
+                  </a:txBody>
+                  <a:tcPr marL="8763" marR="8763" marT="8763" marB="0" anchor="b"/>
+                </a:tc>
+                <a:tc>
+                  <a:txBody>
+                    <a:bodyPr/>
+                    <a:lstStyle/>
+                    <a:p>
+                      <a:pPr algn="r" fontAlgn="b">
+                        <a:buNone/>
+                      </a:pPr>
+                      <a:r>
+                        <a:rPr lang="ko-KR" sz="1200" u="none" strike="noStrike">
+                          <a:effectLst/>
+                          <a:latin typeface="D2Coding" panose="020B0609020101020101" pitchFamily="49" charset="-127"/>
+                          <a:ea typeface="D2Coding" panose="020B0609020101020101" pitchFamily="49" charset="-127"/>
+                        </a:rPr>
+                        <a:t>5</a:t>
+                      </a:r>
+                      <a:endParaRPr lang="ko-KR" sz="1200" b="0" i="0" u="none" strike="noStrike">
+                        <a:solidFill>
+                          <a:srgbClr val="000000"/>
+                        </a:solidFill>
+                        <a:effectLst/>
+                        <a:latin typeface="D2Coding" panose="020B0609020101020101" pitchFamily="49" charset="-127"/>
+                        <a:ea typeface="D2Coding" panose="020B0609020101020101" pitchFamily="49" charset="-127"/>
+                      </a:endParaRPr>
+                    </a:p>
+                  </a:txBody>
+                  <a:tcPr marL="8763" marR="8763" marT="8763" marB="0" anchor="b"/>
+                </a:tc>
+                <a:tc>
+                  <a:txBody>
+                    <a:bodyPr/>
+                    <a:lstStyle/>
+                    <a:p>
+                      <a:pPr algn="r" fontAlgn="b">
+                        <a:buNone/>
+                      </a:pPr>
+                      <a:r>
+                        <a:rPr lang="ko-KR" sz="1200" u="none" strike="noStrike">
+                          <a:effectLst/>
+                          <a:latin typeface="D2Coding" panose="020B0609020101020101" pitchFamily="49" charset="-127"/>
+                          <a:ea typeface="D2Coding" panose="020B0609020101020101" pitchFamily="49" charset="-127"/>
+                        </a:rPr>
+                        <a:t>2</a:t>
+                      </a:r>
+                      <a:endParaRPr lang="ko-KR" sz="1200" b="0" i="0" u="none" strike="noStrike">
+                        <a:solidFill>
+                          <a:srgbClr val="000000"/>
+                        </a:solidFill>
+                        <a:effectLst/>
+                        <a:latin typeface="D2Coding" panose="020B0609020101020101" pitchFamily="49" charset="-127"/>
+                        <a:ea typeface="D2Coding" panose="020B0609020101020101" pitchFamily="49" charset="-127"/>
+                      </a:endParaRPr>
+                    </a:p>
+                  </a:txBody>
+                  <a:tcPr marL="8763" marR="8763" marT="8763" marB="0" anchor="b">
+                    <a:lnR w="12700" cap="flat" cmpd="sng" algn="ctr">
+                      <a:solidFill>
+                        <a:schemeClr val="tx1"/>
+                      </a:solidFill>
+                      <a:prstDash val="solid"/>
+                      <a:round/>
+                      <a:headEnd type="none" w="med" len="med"/>
+                      <a:tailEnd type="none" w="med" len="med"/>
+                    </a:lnR>
+                  </a:tcPr>
+                </a:tc>
+                <a:extLst>
+                  <a:ext uri="{0D108BD9-81ED-4DB2-BD59-A6C34878D82A}">
+                    <a16:rowId xmlns:a16="http://schemas.microsoft.com/office/drawing/2014/main" val="405490356"/>
+                  </a:ext>
+                </a:extLst>
+              </a:tr>
+              <a:tr h="232473">
+                <a:tc>
+                  <a:txBody>
+                    <a:bodyPr/>
+                    <a:lstStyle/>
+                    <a:p>
+                      <a:pPr algn="r" fontAlgn="b">
+                        <a:buNone/>
+                      </a:pPr>
+                      <a:r>
+                        <a:rPr lang="ko-KR" sz="1200" u="none" strike="noStrike">
+                          <a:effectLst/>
+                          <a:latin typeface="D2Coding" panose="020B0609020101020101" pitchFamily="49" charset="-127"/>
+                          <a:ea typeface="D2Coding" panose="020B0609020101020101" pitchFamily="49" charset="-127"/>
+                        </a:rPr>
+                        <a:t>0.09</a:t>
+                      </a:r>
+                      <a:endParaRPr lang="ko-KR" sz="1200" b="0" i="0" u="none" strike="noStrike">
+                        <a:solidFill>
+                          <a:srgbClr val="000000"/>
+                        </a:solidFill>
+                        <a:effectLst/>
+                        <a:latin typeface="D2Coding" panose="020B0609020101020101" pitchFamily="49" charset="-127"/>
+                        <a:ea typeface="D2Coding" panose="020B0609020101020101" pitchFamily="49" charset="-127"/>
+                      </a:endParaRPr>
+                    </a:p>
+                  </a:txBody>
+                  <a:tcPr marL="8763" marR="8763" marT="8763" marB="0" anchor="b">
+                    <a:lnL w="12700" cap="flat" cmpd="sng" algn="ctr">
+                      <a:solidFill>
+                        <a:schemeClr val="tx1"/>
+                      </a:solidFill>
+                      <a:prstDash val="solid"/>
+                      <a:round/>
+                      <a:headEnd type="none" w="med" len="med"/>
+                      <a:tailEnd type="none" w="med" len="med"/>
+                    </a:lnL>
+                  </a:tcPr>
+                </a:tc>
+                <a:tc>
+                  <a:txBody>
+                    <a:bodyPr/>
+                    <a:lstStyle/>
+                    <a:p>
+                      <a:pPr algn="r" fontAlgn="b">
+                        <a:buNone/>
+                      </a:pPr>
+                      <a:r>
+                        <a:rPr lang="ko-KR" sz="1200" u="none" strike="noStrike">
+                          <a:effectLst/>
+                          <a:latin typeface="D2Coding" panose="020B0609020101020101" pitchFamily="49" charset="-127"/>
+                          <a:ea typeface="D2Coding" panose="020B0609020101020101" pitchFamily="49" charset="-127"/>
+                        </a:rPr>
+                        <a:t>0.29</a:t>
+                      </a:r>
+                      <a:endParaRPr lang="ko-KR" sz="1200" b="0" i="0" u="none" strike="noStrike">
+                        <a:solidFill>
+                          <a:srgbClr val="000000"/>
+                        </a:solidFill>
+                        <a:effectLst/>
+                        <a:latin typeface="D2Coding" panose="020B0609020101020101" pitchFamily="49" charset="-127"/>
+                        <a:ea typeface="D2Coding" panose="020B0609020101020101" pitchFamily="49" charset="-127"/>
+                      </a:endParaRPr>
+                    </a:p>
+                  </a:txBody>
+                  <a:tcPr marL="8763" marR="8763" marT="8763" marB="0" anchor="b"/>
+                </a:tc>
+                <a:tc>
+                  <a:txBody>
+                    <a:bodyPr/>
+                    <a:lstStyle/>
+                    <a:p>
+                      <a:pPr algn="r" fontAlgn="b">
+                        <a:buNone/>
+                      </a:pPr>
+                      <a:r>
+                        <a:rPr lang="ko-KR" sz="1200" u="none" strike="noStrike">
+                          <a:effectLst/>
+                          <a:latin typeface="D2Coding" panose="020B0609020101020101" pitchFamily="49" charset="-127"/>
+                          <a:ea typeface="D2Coding" panose="020B0609020101020101" pitchFamily="49" charset="-127"/>
+                        </a:rPr>
+                        <a:t>0.02</a:t>
+                      </a:r>
+                      <a:endParaRPr lang="ko-KR" sz="1200" b="0" i="0" u="none" strike="noStrike">
+                        <a:solidFill>
+                          <a:srgbClr val="000000"/>
+                        </a:solidFill>
+                        <a:effectLst/>
+                        <a:latin typeface="D2Coding" panose="020B0609020101020101" pitchFamily="49" charset="-127"/>
+                        <a:ea typeface="D2Coding" panose="020B0609020101020101" pitchFamily="49" charset="-127"/>
+                      </a:endParaRPr>
+                    </a:p>
+                  </a:txBody>
+                  <a:tcPr marL="8763" marR="8763" marT="8763" marB="0" anchor="b"/>
+                </a:tc>
+                <a:tc>
+                  <a:txBody>
+                    <a:bodyPr/>
+                    <a:lstStyle/>
+                    <a:p>
+                      <a:pPr algn="r" fontAlgn="b">
+                        <a:buNone/>
+                      </a:pPr>
+                      <a:r>
+                        <a:rPr lang="ko-KR" sz="1200" u="none" strike="noStrike">
+                          <a:effectLst/>
+                          <a:latin typeface="D2Coding" panose="020B0609020101020101" pitchFamily="49" charset="-127"/>
+                          <a:ea typeface="D2Coding" panose="020B0609020101020101" pitchFamily="49" charset="-127"/>
+                        </a:rPr>
+                        <a:t>482</a:t>
+                      </a:r>
+                      <a:endParaRPr lang="ko-KR" sz="1200" b="0" i="0" u="none" strike="noStrike">
+                        <a:solidFill>
+                          <a:srgbClr val="000000"/>
+                        </a:solidFill>
+                        <a:effectLst/>
+                        <a:latin typeface="D2Coding" panose="020B0609020101020101" pitchFamily="49" charset="-127"/>
+                        <a:ea typeface="D2Coding" panose="020B0609020101020101" pitchFamily="49" charset="-127"/>
+                      </a:endParaRPr>
+                    </a:p>
+                  </a:txBody>
+                  <a:tcPr marL="8763" marR="8763" marT="8763" marB="0" anchor="b"/>
+                </a:tc>
+                <a:tc>
+                  <a:txBody>
+                    <a:bodyPr/>
+                    <a:lstStyle/>
+                    <a:p>
+                      <a:pPr algn="r" fontAlgn="b">
+                        <a:buNone/>
+                      </a:pPr>
+                      <a:r>
+                        <a:rPr lang="ko-KR" sz="1200" u="none" strike="noStrike">
+                          <a:effectLst/>
+                          <a:latin typeface="D2Coding" panose="020B0609020101020101" pitchFamily="49" charset="-127"/>
+                          <a:ea typeface="D2Coding" panose="020B0609020101020101" pitchFamily="49" charset="-127"/>
+                        </a:rPr>
+                        <a:t>11</a:t>
+                      </a:r>
+                      <a:endParaRPr lang="ko-KR" sz="1200" b="0" i="0" u="none" strike="noStrike">
+                        <a:solidFill>
+                          <a:srgbClr val="000000"/>
+                        </a:solidFill>
+                        <a:effectLst/>
+                        <a:latin typeface="D2Coding" panose="020B0609020101020101" pitchFamily="49" charset="-127"/>
+                        <a:ea typeface="D2Coding" panose="020B0609020101020101" pitchFamily="49" charset="-127"/>
+                      </a:endParaRPr>
+                    </a:p>
+                  </a:txBody>
+                  <a:tcPr marL="8763" marR="8763" marT="8763" marB="0" anchor="b"/>
+                </a:tc>
+                <a:tc>
+                  <a:txBody>
+                    <a:bodyPr/>
+                    <a:lstStyle/>
+                    <a:p>
+                      <a:pPr algn="r" fontAlgn="b">
+                        <a:buNone/>
+                      </a:pPr>
+                      <a:r>
+                        <a:rPr lang="ko-KR" sz="1200" u="none" strike="noStrike">
+                          <a:effectLst/>
+                          <a:latin typeface="D2Coding" panose="020B0609020101020101" pitchFamily="49" charset="-127"/>
+                          <a:ea typeface="D2Coding" panose="020B0609020101020101" pitchFamily="49" charset="-127"/>
+                        </a:rPr>
+                        <a:t>5</a:t>
+                      </a:r>
+                      <a:endParaRPr lang="ko-KR" sz="1200" b="0" i="0" u="none" strike="noStrike">
+                        <a:solidFill>
+                          <a:srgbClr val="000000"/>
+                        </a:solidFill>
+                        <a:effectLst/>
+                        <a:latin typeface="D2Coding" panose="020B0609020101020101" pitchFamily="49" charset="-127"/>
+                        <a:ea typeface="D2Coding" panose="020B0609020101020101" pitchFamily="49" charset="-127"/>
+                      </a:endParaRPr>
+                    </a:p>
+                  </a:txBody>
+                  <a:tcPr marL="8763" marR="8763" marT="8763" marB="0" anchor="b"/>
+                </a:tc>
+                <a:tc>
+                  <a:txBody>
+                    <a:bodyPr/>
+                    <a:lstStyle/>
+                    <a:p>
+                      <a:pPr algn="r" fontAlgn="b">
+                        <a:buNone/>
+                      </a:pPr>
+                      <a:r>
+                        <a:rPr lang="ko-KR" sz="1200" u="none" strike="noStrike">
+                          <a:effectLst/>
+                          <a:latin typeface="D2Coding" panose="020B0609020101020101" pitchFamily="49" charset="-127"/>
+                          <a:ea typeface="D2Coding" panose="020B0609020101020101" pitchFamily="49" charset="-127"/>
+                        </a:rPr>
+                        <a:t>2</a:t>
+                      </a:r>
+                      <a:endParaRPr lang="ko-KR" sz="1200" b="0" i="0" u="none" strike="noStrike">
+                        <a:solidFill>
+                          <a:srgbClr val="000000"/>
+                        </a:solidFill>
+                        <a:effectLst/>
+                        <a:latin typeface="D2Coding" panose="020B0609020101020101" pitchFamily="49" charset="-127"/>
+                        <a:ea typeface="D2Coding" panose="020B0609020101020101" pitchFamily="49" charset="-127"/>
+                      </a:endParaRPr>
+                    </a:p>
+                  </a:txBody>
+                  <a:tcPr marL="8763" marR="8763" marT="8763" marB="0" anchor="b">
+                    <a:lnR w="12700" cap="flat" cmpd="sng" algn="ctr">
+                      <a:solidFill>
+                        <a:schemeClr val="tx1"/>
+                      </a:solidFill>
+                      <a:prstDash val="solid"/>
+                      <a:round/>
+                      <a:headEnd type="none" w="med" len="med"/>
+                      <a:tailEnd type="none" w="med" len="med"/>
+                    </a:lnR>
+                  </a:tcPr>
+                </a:tc>
+                <a:extLst>
+                  <a:ext uri="{0D108BD9-81ED-4DB2-BD59-A6C34878D82A}">
+                    <a16:rowId xmlns:a16="http://schemas.microsoft.com/office/drawing/2014/main" val="2444440322"/>
+                  </a:ext>
+                </a:extLst>
+              </a:tr>
+              <a:tr h="232473">
+                <a:tc>
+                  <a:txBody>
+                    <a:bodyPr/>
+                    <a:lstStyle/>
+                    <a:p>
+                      <a:pPr algn="r" fontAlgn="b">
+                        <a:buNone/>
+                      </a:pPr>
+                      <a:r>
+                        <a:rPr lang="ko-KR" sz="1200" u="none" strike="noStrike">
+                          <a:effectLst/>
+                          <a:latin typeface="D2Coding" panose="020B0609020101020101" pitchFamily="49" charset="-127"/>
+                          <a:ea typeface="D2Coding" panose="020B0609020101020101" pitchFamily="49" charset="-127"/>
+                        </a:rPr>
+                        <a:t>0.07</a:t>
+                      </a:r>
+                      <a:endParaRPr lang="ko-KR" sz="1200" b="0" i="0" u="none" strike="noStrike">
+                        <a:solidFill>
+                          <a:srgbClr val="000000"/>
+                        </a:solidFill>
+                        <a:effectLst/>
+                        <a:latin typeface="D2Coding" panose="020B0609020101020101" pitchFamily="49" charset="-127"/>
+                        <a:ea typeface="D2Coding" panose="020B0609020101020101" pitchFamily="49" charset="-127"/>
+                      </a:endParaRPr>
+                    </a:p>
+                  </a:txBody>
+                  <a:tcPr marL="8763" marR="8763" marT="8763" marB="0" anchor="b">
+                    <a:lnL w="12700" cap="flat" cmpd="sng" algn="ctr">
+                      <a:solidFill>
+                        <a:schemeClr val="tx1"/>
+                      </a:solidFill>
+                      <a:prstDash val="solid"/>
+                      <a:round/>
+                      <a:headEnd type="none" w="med" len="med"/>
+                      <a:tailEnd type="none" w="med" len="med"/>
+                    </a:lnL>
+                  </a:tcPr>
+                </a:tc>
+                <a:tc>
+                  <a:txBody>
+                    <a:bodyPr/>
+                    <a:lstStyle/>
+                    <a:p>
+                      <a:pPr algn="r" fontAlgn="b">
+                        <a:buNone/>
+                      </a:pPr>
+                      <a:r>
+                        <a:rPr lang="ko-KR" sz="1200" u="none" strike="noStrike">
+                          <a:effectLst/>
+                          <a:latin typeface="D2Coding" panose="020B0609020101020101" pitchFamily="49" charset="-127"/>
+                          <a:ea typeface="D2Coding" panose="020B0609020101020101" pitchFamily="49" charset="-127"/>
+                        </a:rPr>
+                        <a:t>0.29</a:t>
+                      </a:r>
+                      <a:endParaRPr lang="ko-KR" sz="1200" b="0" i="0" u="none" strike="noStrike">
+                        <a:solidFill>
+                          <a:srgbClr val="000000"/>
+                        </a:solidFill>
+                        <a:effectLst/>
+                        <a:latin typeface="D2Coding" panose="020B0609020101020101" pitchFamily="49" charset="-127"/>
+                        <a:ea typeface="D2Coding" panose="020B0609020101020101" pitchFamily="49" charset="-127"/>
+                      </a:endParaRPr>
+                    </a:p>
+                  </a:txBody>
+                  <a:tcPr marL="8763" marR="8763" marT="8763" marB="0" anchor="b"/>
+                </a:tc>
+                <a:tc>
+                  <a:txBody>
+                    <a:bodyPr/>
+                    <a:lstStyle/>
+                    <a:p>
+                      <a:pPr algn="r" fontAlgn="b">
+                        <a:buNone/>
+                      </a:pPr>
+                      <a:r>
+                        <a:rPr lang="ko-KR" sz="1200" u="none" strike="noStrike">
+                          <a:effectLst/>
+                          <a:latin typeface="D2Coding" panose="020B0609020101020101" pitchFamily="49" charset="-127"/>
+                          <a:ea typeface="D2Coding" panose="020B0609020101020101" pitchFamily="49" charset="-127"/>
+                        </a:rPr>
+                        <a:t>0.03</a:t>
+                      </a:r>
+                      <a:endParaRPr lang="ko-KR" sz="1200" b="0" i="0" u="none" strike="noStrike">
+                        <a:solidFill>
+                          <a:srgbClr val="000000"/>
+                        </a:solidFill>
+                        <a:effectLst/>
+                        <a:latin typeface="D2Coding" panose="020B0609020101020101" pitchFamily="49" charset="-127"/>
+                        <a:ea typeface="D2Coding" panose="020B0609020101020101" pitchFamily="49" charset="-127"/>
+                      </a:endParaRPr>
+                    </a:p>
+                  </a:txBody>
+                  <a:tcPr marL="8763" marR="8763" marT="8763" marB="0" anchor="b"/>
+                </a:tc>
+                <a:tc>
+                  <a:txBody>
+                    <a:bodyPr/>
+                    <a:lstStyle/>
+                    <a:p>
+                      <a:pPr algn="r" fontAlgn="b">
+                        <a:buNone/>
+                      </a:pPr>
+                      <a:r>
+                        <a:rPr lang="ko-KR" sz="1200" u="none" strike="noStrike">
+                          <a:effectLst/>
+                          <a:latin typeface="D2Coding" panose="020B0609020101020101" pitchFamily="49" charset="-127"/>
+                          <a:ea typeface="D2Coding" panose="020B0609020101020101" pitchFamily="49" charset="-127"/>
+                        </a:rPr>
+                        <a:t>476</a:t>
+                      </a:r>
+                      <a:endParaRPr lang="ko-KR" sz="1200" b="0" i="0" u="none" strike="noStrike">
+                        <a:solidFill>
+                          <a:srgbClr val="000000"/>
+                        </a:solidFill>
+                        <a:effectLst/>
+                        <a:latin typeface="D2Coding" panose="020B0609020101020101" pitchFamily="49" charset="-127"/>
+                        <a:ea typeface="D2Coding" panose="020B0609020101020101" pitchFamily="49" charset="-127"/>
+                      </a:endParaRPr>
+                    </a:p>
+                  </a:txBody>
+                  <a:tcPr marL="8763" marR="8763" marT="8763" marB="0" anchor="b"/>
+                </a:tc>
+                <a:tc>
+                  <a:txBody>
+                    <a:bodyPr/>
+                    <a:lstStyle/>
+                    <a:p>
+                      <a:pPr algn="r" fontAlgn="b">
+                        <a:buNone/>
+                      </a:pPr>
+                      <a:r>
+                        <a:rPr lang="ko-KR" sz="1200" u="none" strike="noStrike">
+                          <a:effectLst/>
+                          <a:latin typeface="D2Coding" panose="020B0609020101020101" pitchFamily="49" charset="-127"/>
+                          <a:ea typeface="D2Coding" panose="020B0609020101020101" pitchFamily="49" charset="-127"/>
+                        </a:rPr>
+                        <a:t>17</a:t>
+                      </a:r>
+                      <a:endParaRPr lang="ko-KR" sz="1200" b="0" i="0" u="none" strike="noStrike">
+                        <a:solidFill>
+                          <a:srgbClr val="000000"/>
+                        </a:solidFill>
+                        <a:effectLst/>
+                        <a:latin typeface="D2Coding" panose="020B0609020101020101" pitchFamily="49" charset="-127"/>
+                        <a:ea typeface="D2Coding" panose="020B0609020101020101" pitchFamily="49" charset="-127"/>
+                      </a:endParaRPr>
+                    </a:p>
+                  </a:txBody>
+                  <a:tcPr marL="8763" marR="8763" marT="8763" marB="0" anchor="b"/>
+                </a:tc>
+                <a:tc>
+                  <a:txBody>
+                    <a:bodyPr/>
+                    <a:lstStyle/>
+                    <a:p>
+                      <a:pPr algn="r" fontAlgn="b">
+                        <a:buNone/>
+                      </a:pPr>
+                      <a:r>
+                        <a:rPr lang="ko-KR" sz="1200" u="none" strike="noStrike">
+                          <a:effectLst/>
+                          <a:latin typeface="D2Coding" panose="020B0609020101020101" pitchFamily="49" charset="-127"/>
+                          <a:ea typeface="D2Coding" panose="020B0609020101020101" pitchFamily="49" charset="-127"/>
+                        </a:rPr>
+                        <a:t>5</a:t>
+                      </a:r>
+                      <a:endParaRPr lang="ko-KR" sz="1200" b="0" i="0" u="none" strike="noStrike">
+                        <a:solidFill>
+                          <a:srgbClr val="000000"/>
+                        </a:solidFill>
+                        <a:effectLst/>
+                        <a:latin typeface="D2Coding" panose="020B0609020101020101" pitchFamily="49" charset="-127"/>
+                        <a:ea typeface="D2Coding" panose="020B0609020101020101" pitchFamily="49" charset="-127"/>
+                      </a:endParaRPr>
+                    </a:p>
+                  </a:txBody>
+                  <a:tcPr marL="8763" marR="8763" marT="8763" marB="0" anchor="b"/>
+                </a:tc>
+                <a:tc>
+                  <a:txBody>
+                    <a:bodyPr/>
+                    <a:lstStyle/>
+                    <a:p>
+                      <a:pPr algn="r" fontAlgn="b">
+                        <a:buNone/>
+                      </a:pPr>
+                      <a:r>
+                        <a:rPr lang="ko-KR" sz="1200" u="none" strike="noStrike">
+                          <a:effectLst/>
+                          <a:latin typeface="D2Coding" panose="020B0609020101020101" pitchFamily="49" charset="-127"/>
+                          <a:ea typeface="D2Coding" panose="020B0609020101020101" pitchFamily="49" charset="-127"/>
+                        </a:rPr>
+                        <a:t>2</a:t>
+                      </a:r>
+                      <a:endParaRPr lang="ko-KR" sz="1200" b="0" i="0" u="none" strike="noStrike">
+                        <a:solidFill>
+                          <a:srgbClr val="000000"/>
+                        </a:solidFill>
+                        <a:effectLst/>
+                        <a:latin typeface="D2Coding" panose="020B0609020101020101" pitchFamily="49" charset="-127"/>
+                        <a:ea typeface="D2Coding" panose="020B0609020101020101" pitchFamily="49" charset="-127"/>
+                      </a:endParaRPr>
+                    </a:p>
+                  </a:txBody>
+                  <a:tcPr marL="8763" marR="8763" marT="8763" marB="0" anchor="b">
+                    <a:lnR w="12700" cap="flat" cmpd="sng" algn="ctr">
+                      <a:solidFill>
+                        <a:schemeClr val="tx1"/>
+                      </a:solidFill>
+                      <a:prstDash val="solid"/>
+                      <a:round/>
+                      <a:headEnd type="none" w="med" len="med"/>
+                      <a:tailEnd type="none" w="med" len="med"/>
+                    </a:lnR>
+                  </a:tcPr>
+                </a:tc>
+                <a:extLst>
+                  <a:ext uri="{0D108BD9-81ED-4DB2-BD59-A6C34878D82A}">
+                    <a16:rowId xmlns:a16="http://schemas.microsoft.com/office/drawing/2014/main" val="2934397004"/>
+                  </a:ext>
+                </a:extLst>
+              </a:tr>
+              <a:tr h="232473">
+                <a:tc>
+                  <a:txBody>
+                    <a:bodyPr/>
+                    <a:lstStyle/>
+                    <a:p>
+                      <a:pPr algn="r" fontAlgn="b">
+                        <a:buNone/>
+                      </a:pPr>
+                      <a:r>
+                        <a:rPr lang="ko-KR" sz="1200" u="none" strike="noStrike">
+                          <a:effectLst/>
+                          <a:latin typeface="D2Coding" panose="020B0609020101020101" pitchFamily="49" charset="-127"/>
+                          <a:ea typeface="D2Coding" panose="020B0609020101020101" pitchFamily="49" charset="-127"/>
+                        </a:rPr>
+                        <a:t>0.06</a:t>
+                      </a:r>
+                      <a:endParaRPr lang="ko-KR" sz="1200" b="0" i="0" u="none" strike="noStrike">
+                        <a:solidFill>
+                          <a:srgbClr val="000000"/>
+                        </a:solidFill>
+                        <a:effectLst/>
+                        <a:latin typeface="D2Coding" panose="020B0609020101020101" pitchFamily="49" charset="-127"/>
+                        <a:ea typeface="D2Coding" panose="020B0609020101020101" pitchFamily="49" charset="-127"/>
+                      </a:endParaRPr>
+                    </a:p>
+                  </a:txBody>
+                  <a:tcPr marL="8763" marR="8763" marT="8763" marB="0" anchor="b">
+                    <a:lnL w="12700" cap="flat" cmpd="sng" algn="ctr">
+                      <a:solidFill>
+                        <a:schemeClr val="tx1"/>
+                      </a:solidFill>
+                      <a:prstDash val="solid"/>
+                      <a:round/>
+                      <a:headEnd type="none" w="med" len="med"/>
+                      <a:tailEnd type="none" w="med" len="med"/>
+                    </a:lnL>
+                  </a:tcPr>
+                </a:tc>
+                <a:tc>
+                  <a:txBody>
+                    <a:bodyPr/>
+                    <a:lstStyle/>
+                    <a:p>
+                      <a:pPr algn="r" fontAlgn="b">
+                        <a:buNone/>
+                      </a:pPr>
+                      <a:r>
+                        <a:rPr lang="ko-KR" sz="1200" u="none" strike="noStrike">
+                          <a:effectLst/>
+                          <a:latin typeface="D2Coding" panose="020B0609020101020101" pitchFamily="49" charset="-127"/>
+                          <a:ea typeface="D2Coding" panose="020B0609020101020101" pitchFamily="49" charset="-127"/>
+                        </a:rPr>
+                        <a:t>0.43</a:t>
+                      </a:r>
+                      <a:endParaRPr lang="ko-KR" sz="1200" b="0" i="0" u="none" strike="noStrike">
+                        <a:solidFill>
+                          <a:srgbClr val="000000"/>
+                        </a:solidFill>
+                        <a:effectLst/>
+                        <a:latin typeface="D2Coding" panose="020B0609020101020101" pitchFamily="49" charset="-127"/>
+                        <a:ea typeface="D2Coding" panose="020B0609020101020101" pitchFamily="49" charset="-127"/>
+                      </a:endParaRPr>
+                    </a:p>
+                  </a:txBody>
+                  <a:tcPr marL="8763" marR="8763" marT="8763" marB="0" anchor="b"/>
+                </a:tc>
+                <a:tc>
+                  <a:txBody>
+                    <a:bodyPr/>
+                    <a:lstStyle/>
+                    <a:p>
+                      <a:pPr algn="r" fontAlgn="b">
+                        <a:buNone/>
+                      </a:pPr>
+                      <a:r>
+                        <a:rPr lang="ko-KR" sz="1200" u="none" strike="noStrike">
+                          <a:effectLst/>
+                          <a:latin typeface="D2Coding" panose="020B0609020101020101" pitchFamily="49" charset="-127"/>
+                          <a:ea typeface="D2Coding" panose="020B0609020101020101" pitchFamily="49" charset="-127"/>
+                        </a:rPr>
+                        <a:t>0.05</a:t>
+                      </a:r>
+                      <a:endParaRPr lang="ko-KR" sz="1200" b="0" i="0" u="none" strike="noStrike">
+                        <a:solidFill>
+                          <a:srgbClr val="000000"/>
+                        </a:solidFill>
+                        <a:effectLst/>
+                        <a:latin typeface="D2Coding" panose="020B0609020101020101" pitchFamily="49" charset="-127"/>
+                        <a:ea typeface="D2Coding" panose="020B0609020101020101" pitchFamily="49" charset="-127"/>
+                      </a:endParaRPr>
+                    </a:p>
+                  </a:txBody>
+                  <a:tcPr marL="8763" marR="8763" marT="8763" marB="0" anchor="b"/>
+                </a:tc>
+                <a:tc>
+                  <a:txBody>
+                    <a:bodyPr/>
+                    <a:lstStyle/>
+                    <a:p>
+                      <a:pPr algn="r" fontAlgn="b">
+                        <a:buNone/>
+                      </a:pPr>
+                      <a:r>
+                        <a:rPr lang="ko-KR" sz="1200" u="none" strike="noStrike">
+                          <a:effectLst/>
+                          <a:latin typeface="D2Coding" panose="020B0609020101020101" pitchFamily="49" charset="-127"/>
+                          <a:ea typeface="D2Coding" panose="020B0609020101020101" pitchFamily="49" charset="-127"/>
+                        </a:rPr>
+                        <a:t>469</a:t>
+                      </a:r>
+                      <a:endParaRPr lang="ko-KR" sz="1200" b="0" i="0" u="none" strike="noStrike">
+                        <a:solidFill>
+                          <a:srgbClr val="000000"/>
+                        </a:solidFill>
+                        <a:effectLst/>
+                        <a:latin typeface="D2Coding" panose="020B0609020101020101" pitchFamily="49" charset="-127"/>
+                        <a:ea typeface="D2Coding" panose="020B0609020101020101" pitchFamily="49" charset="-127"/>
+                      </a:endParaRPr>
+                    </a:p>
+                  </a:txBody>
+                  <a:tcPr marL="8763" marR="8763" marT="8763" marB="0" anchor="b"/>
+                </a:tc>
+                <a:tc>
+                  <a:txBody>
+                    <a:bodyPr/>
+                    <a:lstStyle/>
+                    <a:p>
+                      <a:pPr algn="r" fontAlgn="b">
+                        <a:buNone/>
+                      </a:pPr>
+                      <a:r>
+                        <a:rPr lang="ko-KR" sz="1200" u="none" strike="noStrike">
+                          <a:effectLst/>
+                          <a:latin typeface="D2Coding" panose="020B0609020101020101" pitchFamily="49" charset="-127"/>
+                          <a:ea typeface="D2Coding" panose="020B0609020101020101" pitchFamily="49" charset="-127"/>
+                        </a:rPr>
+                        <a:t>24</a:t>
+                      </a:r>
+                      <a:endParaRPr lang="ko-KR" sz="1200" b="0" i="0" u="none" strike="noStrike">
+                        <a:solidFill>
+                          <a:srgbClr val="000000"/>
+                        </a:solidFill>
+                        <a:effectLst/>
+                        <a:latin typeface="D2Coding" panose="020B0609020101020101" pitchFamily="49" charset="-127"/>
+                        <a:ea typeface="D2Coding" panose="020B0609020101020101" pitchFamily="49" charset="-127"/>
+                      </a:endParaRPr>
+                    </a:p>
+                  </a:txBody>
+                  <a:tcPr marL="8763" marR="8763" marT="8763" marB="0" anchor="b"/>
+                </a:tc>
+                <a:tc>
+                  <a:txBody>
+                    <a:bodyPr/>
+                    <a:lstStyle/>
+                    <a:p>
+                      <a:pPr algn="r" fontAlgn="b">
+                        <a:buNone/>
+                      </a:pPr>
+                      <a:r>
+                        <a:rPr lang="ko-KR" sz="1200" u="none" strike="noStrike">
+                          <a:effectLst/>
+                          <a:latin typeface="D2Coding" panose="020B0609020101020101" pitchFamily="49" charset="-127"/>
+                          <a:ea typeface="D2Coding" panose="020B0609020101020101" pitchFamily="49" charset="-127"/>
+                        </a:rPr>
+                        <a:t>4</a:t>
+                      </a:r>
+                      <a:endParaRPr lang="ko-KR" sz="1200" b="0" i="0" u="none" strike="noStrike">
+                        <a:solidFill>
+                          <a:srgbClr val="000000"/>
+                        </a:solidFill>
+                        <a:effectLst/>
+                        <a:latin typeface="D2Coding" panose="020B0609020101020101" pitchFamily="49" charset="-127"/>
+                        <a:ea typeface="D2Coding" panose="020B0609020101020101" pitchFamily="49" charset="-127"/>
+                      </a:endParaRPr>
+                    </a:p>
+                  </a:txBody>
+                  <a:tcPr marL="8763" marR="8763" marT="8763" marB="0" anchor="b"/>
+                </a:tc>
+                <a:tc>
+                  <a:txBody>
+                    <a:bodyPr/>
+                    <a:lstStyle/>
+                    <a:p>
+                      <a:pPr algn="r" fontAlgn="b">
+                        <a:buNone/>
+                      </a:pPr>
+                      <a:r>
+                        <a:rPr lang="ko-KR" sz="1200" u="none" strike="noStrike">
+                          <a:effectLst/>
+                          <a:latin typeface="D2Coding" panose="020B0609020101020101" pitchFamily="49" charset="-127"/>
+                          <a:ea typeface="D2Coding" panose="020B0609020101020101" pitchFamily="49" charset="-127"/>
+                        </a:rPr>
+                        <a:t>3</a:t>
+                      </a:r>
+                      <a:endParaRPr lang="ko-KR" sz="1200" b="0" i="0" u="none" strike="noStrike">
+                        <a:solidFill>
+                          <a:srgbClr val="000000"/>
+                        </a:solidFill>
+                        <a:effectLst/>
+                        <a:latin typeface="D2Coding" panose="020B0609020101020101" pitchFamily="49" charset="-127"/>
+                        <a:ea typeface="D2Coding" panose="020B0609020101020101" pitchFamily="49" charset="-127"/>
+                      </a:endParaRPr>
+                    </a:p>
+                  </a:txBody>
+                  <a:tcPr marL="8763" marR="8763" marT="8763" marB="0" anchor="b">
+                    <a:lnR w="12700" cap="flat" cmpd="sng" algn="ctr">
+                      <a:solidFill>
+                        <a:schemeClr val="tx1"/>
+                      </a:solidFill>
+                      <a:prstDash val="solid"/>
+                      <a:round/>
+                      <a:headEnd type="none" w="med" len="med"/>
+                      <a:tailEnd type="none" w="med" len="med"/>
+                    </a:lnR>
+                  </a:tcPr>
+                </a:tc>
+                <a:extLst>
+                  <a:ext uri="{0D108BD9-81ED-4DB2-BD59-A6C34878D82A}">
+                    <a16:rowId xmlns:a16="http://schemas.microsoft.com/office/drawing/2014/main" val="12432092"/>
+                  </a:ext>
+                </a:extLst>
+              </a:tr>
+              <a:tr h="232473">
+                <a:tc>
+                  <a:txBody>
+                    <a:bodyPr/>
+                    <a:lstStyle/>
+                    <a:p>
+                      <a:pPr algn="r" fontAlgn="b">
+                        <a:buNone/>
+                      </a:pPr>
+                      <a:r>
+                        <a:rPr lang="ko-KR" sz="1200" u="none" strike="noStrike">
+                          <a:effectLst/>
+                          <a:latin typeface="D2Coding" panose="020B0609020101020101" pitchFamily="49" charset="-127"/>
+                          <a:ea typeface="D2Coding" panose="020B0609020101020101" pitchFamily="49" charset="-127"/>
+                        </a:rPr>
+                        <a:t>0.05</a:t>
+                      </a:r>
+                      <a:endParaRPr lang="ko-KR" sz="1200" b="0" i="0" u="none" strike="noStrike">
+                        <a:solidFill>
+                          <a:srgbClr val="000000"/>
+                        </a:solidFill>
+                        <a:effectLst/>
+                        <a:latin typeface="D2Coding" panose="020B0609020101020101" pitchFamily="49" charset="-127"/>
+                        <a:ea typeface="D2Coding" panose="020B0609020101020101" pitchFamily="49" charset="-127"/>
+                      </a:endParaRPr>
+                    </a:p>
+                  </a:txBody>
+                  <a:tcPr marL="8763" marR="8763" marT="8763" marB="0" anchor="b">
+                    <a:lnL w="12700" cap="flat" cmpd="sng" algn="ctr">
+                      <a:solidFill>
+                        <a:schemeClr val="tx1"/>
+                      </a:solidFill>
+                      <a:prstDash val="solid"/>
+                      <a:round/>
+                      <a:headEnd type="none" w="med" len="med"/>
+                      <a:tailEnd type="none" w="med" len="med"/>
+                    </a:lnL>
+                  </a:tcPr>
+                </a:tc>
+                <a:tc>
+                  <a:txBody>
+                    <a:bodyPr/>
+                    <a:lstStyle/>
+                    <a:p>
+                      <a:pPr algn="r" fontAlgn="b">
+                        <a:buNone/>
+                      </a:pPr>
+                      <a:r>
+                        <a:rPr lang="ko-KR" sz="1200" u="none" strike="noStrike">
+                          <a:effectLst/>
+                          <a:latin typeface="D2Coding" panose="020B0609020101020101" pitchFamily="49" charset="-127"/>
+                          <a:ea typeface="D2Coding" panose="020B0609020101020101" pitchFamily="49" charset="-127"/>
+                        </a:rPr>
+                        <a:t>0.57</a:t>
+                      </a:r>
+                      <a:endParaRPr lang="ko-KR" sz="1200" b="0" i="0" u="none" strike="noStrike">
+                        <a:solidFill>
+                          <a:srgbClr val="000000"/>
+                        </a:solidFill>
+                        <a:effectLst/>
+                        <a:latin typeface="D2Coding" panose="020B0609020101020101" pitchFamily="49" charset="-127"/>
+                        <a:ea typeface="D2Coding" panose="020B0609020101020101" pitchFamily="49" charset="-127"/>
+                      </a:endParaRPr>
+                    </a:p>
+                  </a:txBody>
+                  <a:tcPr marL="8763" marR="8763" marT="8763" marB="0" anchor="b"/>
+                </a:tc>
+                <a:tc>
+                  <a:txBody>
+                    <a:bodyPr/>
+                    <a:lstStyle/>
+                    <a:p>
+                      <a:pPr algn="r" fontAlgn="b">
+                        <a:buNone/>
+                      </a:pPr>
+                      <a:r>
+                        <a:rPr lang="ko-KR" sz="1200" u="none" strike="noStrike">
+                          <a:effectLst/>
+                          <a:latin typeface="D2Coding" panose="020B0609020101020101" pitchFamily="49" charset="-127"/>
+                          <a:ea typeface="D2Coding" panose="020B0609020101020101" pitchFamily="49" charset="-127"/>
+                        </a:rPr>
+                        <a:t>0.07</a:t>
+                      </a:r>
+                      <a:endParaRPr lang="ko-KR" sz="1200" b="0" i="0" u="none" strike="noStrike">
+                        <a:solidFill>
+                          <a:srgbClr val="000000"/>
+                        </a:solidFill>
+                        <a:effectLst/>
+                        <a:latin typeface="D2Coding" panose="020B0609020101020101" pitchFamily="49" charset="-127"/>
+                        <a:ea typeface="D2Coding" panose="020B0609020101020101" pitchFamily="49" charset="-127"/>
+                      </a:endParaRPr>
+                    </a:p>
+                  </a:txBody>
+                  <a:tcPr marL="8763" marR="8763" marT="8763" marB="0" anchor="b"/>
+                </a:tc>
+                <a:tc>
+                  <a:txBody>
+                    <a:bodyPr/>
+                    <a:lstStyle/>
+                    <a:p>
+                      <a:pPr algn="r" fontAlgn="b">
+                        <a:buNone/>
+                      </a:pPr>
+                      <a:r>
+                        <a:rPr lang="ko-KR" sz="1200" u="none" strike="noStrike">
+                          <a:effectLst/>
+                          <a:latin typeface="D2Coding" panose="020B0609020101020101" pitchFamily="49" charset="-127"/>
+                          <a:ea typeface="D2Coding" panose="020B0609020101020101" pitchFamily="49" charset="-127"/>
+                        </a:rPr>
+                        <a:t>457</a:t>
+                      </a:r>
+                      <a:endParaRPr lang="ko-KR" sz="1200" b="0" i="0" u="none" strike="noStrike">
+                        <a:solidFill>
+                          <a:srgbClr val="000000"/>
+                        </a:solidFill>
+                        <a:effectLst/>
+                        <a:latin typeface="D2Coding" panose="020B0609020101020101" pitchFamily="49" charset="-127"/>
+                        <a:ea typeface="D2Coding" panose="020B0609020101020101" pitchFamily="49" charset="-127"/>
+                      </a:endParaRPr>
+                    </a:p>
+                  </a:txBody>
+                  <a:tcPr marL="8763" marR="8763" marT="8763" marB="0" anchor="b"/>
+                </a:tc>
+                <a:tc>
+                  <a:txBody>
+                    <a:bodyPr/>
+                    <a:lstStyle/>
+                    <a:p>
+                      <a:pPr algn="r" fontAlgn="b">
+                        <a:buNone/>
+                      </a:pPr>
+                      <a:r>
+                        <a:rPr lang="ko-KR" sz="1200" u="none" strike="noStrike" dirty="0">
+                          <a:effectLst/>
+                          <a:latin typeface="D2Coding" panose="020B0609020101020101" pitchFamily="49" charset="-127"/>
+                          <a:ea typeface="D2Coding" panose="020B0609020101020101" pitchFamily="49" charset="-127"/>
+                        </a:rPr>
+                        <a:t>36</a:t>
+                      </a:r>
+                      <a:endParaRPr lang="ko-KR" sz="1200" b="0" i="0" u="none" strike="noStrike" dirty="0">
+                        <a:solidFill>
+                          <a:srgbClr val="000000"/>
+                        </a:solidFill>
+                        <a:effectLst/>
+                        <a:latin typeface="D2Coding" panose="020B0609020101020101" pitchFamily="49" charset="-127"/>
+                        <a:ea typeface="D2Coding" panose="020B0609020101020101" pitchFamily="49" charset="-127"/>
+                      </a:endParaRPr>
+                    </a:p>
+                  </a:txBody>
+                  <a:tcPr marL="8763" marR="8763" marT="8763" marB="0" anchor="b"/>
+                </a:tc>
+                <a:tc>
+                  <a:txBody>
+                    <a:bodyPr/>
+                    <a:lstStyle/>
+                    <a:p>
+                      <a:pPr algn="r" fontAlgn="b">
+                        <a:buNone/>
+                      </a:pPr>
+                      <a:r>
+                        <a:rPr lang="ko-KR" sz="1200" u="none" strike="noStrike">
+                          <a:effectLst/>
+                          <a:latin typeface="D2Coding" panose="020B0609020101020101" pitchFamily="49" charset="-127"/>
+                          <a:ea typeface="D2Coding" panose="020B0609020101020101" pitchFamily="49" charset="-127"/>
+                        </a:rPr>
+                        <a:t>3</a:t>
+                      </a:r>
+                      <a:endParaRPr lang="ko-KR" sz="1200" b="0" i="0" u="none" strike="noStrike">
+                        <a:solidFill>
+                          <a:srgbClr val="000000"/>
+                        </a:solidFill>
+                        <a:effectLst/>
+                        <a:latin typeface="D2Coding" panose="020B0609020101020101" pitchFamily="49" charset="-127"/>
+                        <a:ea typeface="D2Coding" panose="020B0609020101020101" pitchFamily="49" charset="-127"/>
+                      </a:endParaRPr>
+                    </a:p>
+                  </a:txBody>
+                  <a:tcPr marL="8763" marR="8763" marT="8763" marB="0" anchor="b"/>
+                </a:tc>
+                <a:tc>
+                  <a:txBody>
+                    <a:bodyPr/>
+                    <a:lstStyle/>
+                    <a:p>
+                      <a:pPr algn="r" fontAlgn="b">
+                        <a:buNone/>
+                      </a:pPr>
+                      <a:r>
+                        <a:rPr lang="ko-KR" sz="1200" u="none" strike="noStrike">
+                          <a:effectLst/>
+                          <a:latin typeface="D2Coding" panose="020B0609020101020101" pitchFamily="49" charset="-127"/>
+                          <a:ea typeface="D2Coding" panose="020B0609020101020101" pitchFamily="49" charset="-127"/>
+                        </a:rPr>
+                        <a:t>4</a:t>
+                      </a:r>
+                      <a:endParaRPr lang="ko-KR" sz="1200" b="0" i="0" u="none" strike="noStrike">
+                        <a:solidFill>
+                          <a:srgbClr val="000000"/>
+                        </a:solidFill>
+                        <a:effectLst/>
+                        <a:latin typeface="D2Coding" panose="020B0609020101020101" pitchFamily="49" charset="-127"/>
+                        <a:ea typeface="D2Coding" panose="020B0609020101020101" pitchFamily="49" charset="-127"/>
+                      </a:endParaRPr>
+                    </a:p>
+                  </a:txBody>
+                  <a:tcPr marL="8763" marR="8763" marT="8763" marB="0" anchor="b">
+                    <a:lnR w="12700" cap="flat" cmpd="sng" algn="ctr">
+                      <a:solidFill>
+                        <a:schemeClr val="tx1"/>
+                      </a:solidFill>
+                      <a:prstDash val="solid"/>
+                      <a:round/>
+                      <a:headEnd type="none" w="med" len="med"/>
+                      <a:tailEnd type="none" w="med" len="med"/>
+                    </a:lnR>
+                  </a:tcPr>
+                </a:tc>
+                <a:extLst>
+                  <a:ext uri="{0D108BD9-81ED-4DB2-BD59-A6C34878D82A}">
+                    <a16:rowId xmlns:a16="http://schemas.microsoft.com/office/drawing/2014/main" val="2282526845"/>
+                  </a:ext>
+                </a:extLst>
+              </a:tr>
+              <a:tr h="232473">
+                <a:tc>
+                  <a:txBody>
+                    <a:bodyPr/>
+                    <a:lstStyle/>
+                    <a:p>
+                      <a:pPr algn="r" fontAlgn="b">
+                        <a:buNone/>
+                      </a:pPr>
+                      <a:r>
+                        <a:rPr lang="ko-KR" sz="1200" u="none" strike="noStrike">
+                          <a:effectLst/>
+                          <a:latin typeface="D2Coding" panose="020B0609020101020101" pitchFamily="49" charset="-127"/>
+                          <a:ea typeface="D2Coding" panose="020B0609020101020101" pitchFamily="49" charset="-127"/>
+                        </a:rPr>
+                        <a:t>0.04</a:t>
+                      </a:r>
+                      <a:endParaRPr lang="ko-KR" sz="1200" b="0" i="0" u="none" strike="noStrike">
+                        <a:solidFill>
+                          <a:srgbClr val="000000"/>
+                        </a:solidFill>
+                        <a:effectLst/>
+                        <a:latin typeface="D2Coding" panose="020B0609020101020101" pitchFamily="49" charset="-127"/>
+                        <a:ea typeface="D2Coding" panose="020B0609020101020101" pitchFamily="49" charset="-127"/>
+                      </a:endParaRPr>
+                    </a:p>
+                  </a:txBody>
+                  <a:tcPr marL="8763" marR="8763" marT="8763" marB="0" anchor="b">
+                    <a:lnL w="12700" cap="flat" cmpd="sng" algn="ctr">
+                      <a:solidFill>
+                        <a:schemeClr val="tx1"/>
+                      </a:solidFill>
+                      <a:prstDash val="solid"/>
+                      <a:round/>
+                      <a:headEnd type="none" w="med" len="med"/>
+                      <a:tailEnd type="none" w="med" len="med"/>
+                    </a:lnL>
+                  </a:tcPr>
+                </a:tc>
+                <a:tc>
+                  <a:txBody>
+                    <a:bodyPr/>
+                    <a:lstStyle/>
+                    <a:p>
+                      <a:pPr algn="r" fontAlgn="b">
+                        <a:buNone/>
+                      </a:pPr>
+                      <a:r>
+                        <a:rPr lang="ko-KR" sz="1200" u="none" strike="noStrike">
+                          <a:effectLst/>
+                          <a:latin typeface="D2Coding" panose="020B0609020101020101" pitchFamily="49" charset="-127"/>
+                          <a:ea typeface="D2Coding" panose="020B0609020101020101" pitchFamily="49" charset="-127"/>
+                        </a:rPr>
+                        <a:t>0.57</a:t>
+                      </a:r>
+                      <a:endParaRPr lang="ko-KR" sz="1200" b="0" i="0" u="none" strike="noStrike">
+                        <a:solidFill>
+                          <a:srgbClr val="000000"/>
+                        </a:solidFill>
+                        <a:effectLst/>
+                        <a:latin typeface="D2Coding" panose="020B0609020101020101" pitchFamily="49" charset="-127"/>
+                        <a:ea typeface="D2Coding" panose="020B0609020101020101" pitchFamily="49" charset="-127"/>
+                      </a:endParaRPr>
+                    </a:p>
+                  </a:txBody>
+                  <a:tcPr marL="8763" marR="8763" marT="8763" marB="0" anchor="b"/>
+                </a:tc>
+                <a:tc>
+                  <a:txBody>
+                    <a:bodyPr/>
+                    <a:lstStyle/>
+                    <a:p>
+                      <a:pPr algn="r" fontAlgn="b">
+                        <a:buNone/>
+                      </a:pPr>
+                      <a:r>
+                        <a:rPr lang="ko-KR" sz="1200" u="none" strike="noStrike">
+                          <a:effectLst/>
+                          <a:latin typeface="D2Coding" panose="020B0609020101020101" pitchFamily="49" charset="-127"/>
+                          <a:ea typeface="D2Coding" panose="020B0609020101020101" pitchFamily="49" charset="-127"/>
+                        </a:rPr>
+                        <a:t>0.11</a:t>
+                      </a:r>
+                      <a:endParaRPr lang="ko-KR" sz="1200" b="0" i="0" u="none" strike="noStrike">
+                        <a:solidFill>
+                          <a:srgbClr val="000000"/>
+                        </a:solidFill>
+                        <a:effectLst/>
+                        <a:latin typeface="D2Coding" panose="020B0609020101020101" pitchFamily="49" charset="-127"/>
+                        <a:ea typeface="D2Coding" panose="020B0609020101020101" pitchFamily="49" charset="-127"/>
+                      </a:endParaRPr>
+                    </a:p>
+                  </a:txBody>
+                  <a:tcPr marL="8763" marR="8763" marT="8763" marB="0" anchor="b"/>
+                </a:tc>
+                <a:tc>
+                  <a:txBody>
+                    <a:bodyPr/>
+                    <a:lstStyle/>
+                    <a:p>
+                      <a:pPr algn="r" fontAlgn="b">
+                        <a:buNone/>
+                      </a:pPr>
+                      <a:r>
+                        <a:rPr lang="ko-KR" sz="1200" u="none" strike="noStrike">
+                          <a:effectLst/>
+                          <a:latin typeface="D2Coding" panose="020B0609020101020101" pitchFamily="49" charset="-127"/>
+                          <a:ea typeface="D2Coding" panose="020B0609020101020101" pitchFamily="49" charset="-127"/>
+                        </a:rPr>
+                        <a:t>440</a:t>
+                      </a:r>
+                      <a:endParaRPr lang="ko-KR" sz="1200" b="0" i="0" u="none" strike="noStrike">
+                        <a:solidFill>
+                          <a:srgbClr val="000000"/>
+                        </a:solidFill>
+                        <a:effectLst/>
+                        <a:latin typeface="D2Coding" panose="020B0609020101020101" pitchFamily="49" charset="-127"/>
+                        <a:ea typeface="D2Coding" panose="020B0609020101020101" pitchFamily="49" charset="-127"/>
+                      </a:endParaRPr>
+                    </a:p>
+                  </a:txBody>
+                  <a:tcPr marL="8763" marR="8763" marT="8763" marB="0" anchor="b"/>
+                </a:tc>
+                <a:tc>
+                  <a:txBody>
+                    <a:bodyPr/>
+                    <a:lstStyle/>
+                    <a:p>
+                      <a:pPr algn="r" fontAlgn="b">
+                        <a:buNone/>
+                      </a:pPr>
+                      <a:r>
+                        <a:rPr lang="ko-KR" sz="1200" u="none" strike="noStrike">
+                          <a:effectLst/>
+                          <a:latin typeface="D2Coding" panose="020B0609020101020101" pitchFamily="49" charset="-127"/>
+                          <a:ea typeface="D2Coding" panose="020B0609020101020101" pitchFamily="49" charset="-127"/>
+                        </a:rPr>
+                        <a:t>53</a:t>
+                      </a:r>
+                      <a:endParaRPr lang="ko-KR" sz="1200" b="0" i="0" u="none" strike="noStrike">
+                        <a:solidFill>
+                          <a:srgbClr val="000000"/>
+                        </a:solidFill>
+                        <a:effectLst/>
+                        <a:latin typeface="D2Coding" panose="020B0609020101020101" pitchFamily="49" charset="-127"/>
+                        <a:ea typeface="D2Coding" panose="020B0609020101020101" pitchFamily="49" charset="-127"/>
+                      </a:endParaRPr>
+                    </a:p>
+                  </a:txBody>
+                  <a:tcPr marL="8763" marR="8763" marT="8763" marB="0" anchor="b"/>
+                </a:tc>
+                <a:tc>
+                  <a:txBody>
+                    <a:bodyPr/>
+                    <a:lstStyle/>
+                    <a:p>
+                      <a:pPr algn="r" fontAlgn="b">
+                        <a:buNone/>
+                      </a:pPr>
+                      <a:r>
+                        <a:rPr lang="ko-KR" sz="1200" u="none" strike="noStrike">
+                          <a:effectLst/>
+                          <a:latin typeface="D2Coding" panose="020B0609020101020101" pitchFamily="49" charset="-127"/>
+                          <a:ea typeface="D2Coding" panose="020B0609020101020101" pitchFamily="49" charset="-127"/>
+                        </a:rPr>
+                        <a:t>3</a:t>
+                      </a:r>
+                      <a:endParaRPr lang="ko-KR" sz="1200" b="0" i="0" u="none" strike="noStrike">
+                        <a:solidFill>
+                          <a:srgbClr val="000000"/>
+                        </a:solidFill>
+                        <a:effectLst/>
+                        <a:latin typeface="D2Coding" panose="020B0609020101020101" pitchFamily="49" charset="-127"/>
+                        <a:ea typeface="D2Coding" panose="020B0609020101020101" pitchFamily="49" charset="-127"/>
+                      </a:endParaRPr>
+                    </a:p>
+                  </a:txBody>
+                  <a:tcPr marL="8763" marR="8763" marT="8763" marB="0" anchor="b"/>
+                </a:tc>
+                <a:tc>
+                  <a:txBody>
+                    <a:bodyPr/>
+                    <a:lstStyle/>
+                    <a:p>
+                      <a:pPr algn="r" fontAlgn="b">
+                        <a:buNone/>
+                      </a:pPr>
+                      <a:r>
+                        <a:rPr lang="ko-KR" sz="1200" u="none" strike="noStrike">
+                          <a:effectLst/>
+                          <a:latin typeface="D2Coding" panose="020B0609020101020101" pitchFamily="49" charset="-127"/>
+                          <a:ea typeface="D2Coding" panose="020B0609020101020101" pitchFamily="49" charset="-127"/>
+                        </a:rPr>
+                        <a:t>4</a:t>
+                      </a:r>
+                      <a:endParaRPr lang="ko-KR" sz="1200" b="0" i="0" u="none" strike="noStrike">
+                        <a:solidFill>
+                          <a:srgbClr val="000000"/>
+                        </a:solidFill>
+                        <a:effectLst/>
+                        <a:latin typeface="D2Coding" panose="020B0609020101020101" pitchFamily="49" charset="-127"/>
+                        <a:ea typeface="D2Coding" panose="020B0609020101020101" pitchFamily="49" charset="-127"/>
+                      </a:endParaRPr>
+                    </a:p>
+                  </a:txBody>
+                  <a:tcPr marL="8763" marR="8763" marT="8763" marB="0" anchor="b">
+                    <a:lnR w="12700" cap="flat" cmpd="sng" algn="ctr">
+                      <a:solidFill>
+                        <a:schemeClr val="tx1"/>
+                      </a:solidFill>
+                      <a:prstDash val="solid"/>
+                      <a:round/>
+                      <a:headEnd type="none" w="med" len="med"/>
+                      <a:tailEnd type="none" w="med" len="med"/>
+                    </a:lnR>
+                  </a:tcPr>
+                </a:tc>
+                <a:extLst>
+                  <a:ext uri="{0D108BD9-81ED-4DB2-BD59-A6C34878D82A}">
+                    <a16:rowId xmlns:a16="http://schemas.microsoft.com/office/drawing/2014/main" val="2659603110"/>
+                  </a:ext>
+                </a:extLst>
+              </a:tr>
+              <a:tr h="232473">
+                <a:tc>
+                  <a:txBody>
+                    <a:bodyPr/>
+                    <a:lstStyle/>
+                    <a:p>
+                      <a:pPr algn="r" fontAlgn="b">
+                        <a:buNone/>
+                      </a:pPr>
+                      <a:r>
+                        <a:rPr lang="ko-KR" sz="1200" u="none" strike="noStrike">
+                          <a:effectLst/>
+                          <a:latin typeface="D2Coding" panose="020B0609020101020101" pitchFamily="49" charset="-127"/>
+                          <a:ea typeface="D2Coding" panose="020B0609020101020101" pitchFamily="49" charset="-127"/>
+                        </a:rPr>
+                        <a:t>0.03</a:t>
+                      </a:r>
+                      <a:endParaRPr lang="ko-KR" sz="1200" b="0" i="0" u="none" strike="noStrike">
+                        <a:solidFill>
+                          <a:srgbClr val="000000"/>
+                        </a:solidFill>
+                        <a:effectLst/>
+                        <a:latin typeface="D2Coding" panose="020B0609020101020101" pitchFamily="49" charset="-127"/>
+                        <a:ea typeface="D2Coding" panose="020B0609020101020101" pitchFamily="49" charset="-127"/>
+                      </a:endParaRPr>
+                    </a:p>
+                  </a:txBody>
+                  <a:tcPr marL="8763" marR="8763" marT="8763" marB="0" anchor="b">
+                    <a:lnL w="12700" cap="flat" cmpd="sng" algn="ctr">
+                      <a:solidFill>
+                        <a:schemeClr val="tx1"/>
+                      </a:solidFill>
+                      <a:prstDash val="solid"/>
+                      <a:round/>
+                      <a:headEnd type="none" w="med" len="med"/>
+                      <a:tailEnd type="none" w="med" len="med"/>
+                    </a:lnL>
+                  </a:tcPr>
+                </a:tc>
+                <a:tc>
+                  <a:txBody>
+                    <a:bodyPr/>
+                    <a:lstStyle/>
+                    <a:p>
+                      <a:pPr algn="r" fontAlgn="b">
+                        <a:buNone/>
+                      </a:pPr>
+                      <a:r>
+                        <a:rPr lang="ko-KR" sz="1200" u="none" strike="noStrike">
+                          <a:effectLst/>
+                          <a:latin typeface="D2Coding" panose="020B0609020101020101" pitchFamily="49" charset="-127"/>
+                          <a:ea typeface="D2Coding" panose="020B0609020101020101" pitchFamily="49" charset="-127"/>
+                        </a:rPr>
+                        <a:t>0.71</a:t>
+                      </a:r>
+                      <a:endParaRPr lang="ko-KR" sz="1200" b="0" i="0" u="none" strike="noStrike">
+                        <a:solidFill>
+                          <a:srgbClr val="000000"/>
+                        </a:solidFill>
+                        <a:effectLst/>
+                        <a:latin typeface="D2Coding" panose="020B0609020101020101" pitchFamily="49" charset="-127"/>
+                        <a:ea typeface="D2Coding" panose="020B0609020101020101" pitchFamily="49" charset="-127"/>
+                      </a:endParaRPr>
+                    </a:p>
+                  </a:txBody>
+                  <a:tcPr marL="8763" marR="8763" marT="8763" marB="0" anchor="b"/>
+                </a:tc>
+                <a:tc>
+                  <a:txBody>
+                    <a:bodyPr/>
+                    <a:lstStyle/>
+                    <a:p>
+                      <a:pPr algn="r" fontAlgn="b">
+                        <a:buNone/>
+                      </a:pPr>
+                      <a:r>
+                        <a:rPr lang="ko-KR" sz="1200" u="none" strike="noStrike">
+                          <a:effectLst/>
+                          <a:latin typeface="D2Coding" panose="020B0609020101020101" pitchFamily="49" charset="-127"/>
+                          <a:ea typeface="D2Coding" panose="020B0609020101020101" pitchFamily="49" charset="-127"/>
+                        </a:rPr>
+                        <a:t>0.16</a:t>
+                      </a:r>
+                      <a:endParaRPr lang="ko-KR" sz="1200" b="0" i="0" u="none" strike="noStrike">
+                        <a:solidFill>
+                          <a:srgbClr val="000000"/>
+                        </a:solidFill>
+                        <a:effectLst/>
+                        <a:latin typeface="D2Coding" panose="020B0609020101020101" pitchFamily="49" charset="-127"/>
+                        <a:ea typeface="D2Coding" panose="020B0609020101020101" pitchFamily="49" charset="-127"/>
+                      </a:endParaRPr>
+                    </a:p>
+                  </a:txBody>
+                  <a:tcPr marL="8763" marR="8763" marT="8763" marB="0" anchor="b"/>
+                </a:tc>
+                <a:tc>
+                  <a:txBody>
+                    <a:bodyPr/>
+                    <a:lstStyle/>
+                    <a:p>
+                      <a:pPr algn="r" fontAlgn="b">
+                        <a:buNone/>
+                      </a:pPr>
+                      <a:r>
+                        <a:rPr lang="ko-KR" sz="1200" u="none" strike="noStrike">
+                          <a:effectLst/>
+                          <a:latin typeface="D2Coding" panose="020B0609020101020101" pitchFamily="49" charset="-127"/>
+                          <a:ea typeface="D2Coding" panose="020B0609020101020101" pitchFamily="49" charset="-127"/>
+                        </a:rPr>
+                        <a:t>414</a:t>
+                      </a:r>
+                      <a:endParaRPr lang="ko-KR" sz="1200" b="0" i="0" u="none" strike="noStrike">
+                        <a:solidFill>
+                          <a:srgbClr val="000000"/>
+                        </a:solidFill>
+                        <a:effectLst/>
+                        <a:latin typeface="D2Coding" panose="020B0609020101020101" pitchFamily="49" charset="-127"/>
+                        <a:ea typeface="D2Coding" panose="020B0609020101020101" pitchFamily="49" charset="-127"/>
+                      </a:endParaRPr>
+                    </a:p>
+                  </a:txBody>
+                  <a:tcPr marL="8763" marR="8763" marT="8763" marB="0" anchor="b"/>
+                </a:tc>
+                <a:tc>
+                  <a:txBody>
+                    <a:bodyPr/>
+                    <a:lstStyle/>
+                    <a:p>
+                      <a:pPr algn="r" fontAlgn="b">
+                        <a:buNone/>
+                      </a:pPr>
+                      <a:r>
+                        <a:rPr lang="ko-KR" sz="1200" u="none" strike="noStrike">
+                          <a:effectLst/>
+                          <a:latin typeface="D2Coding" panose="020B0609020101020101" pitchFamily="49" charset="-127"/>
+                          <a:ea typeface="D2Coding" panose="020B0609020101020101" pitchFamily="49" charset="-127"/>
+                        </a:rPr>
+                        <a:t>79</a:t>
+                      </a:r>
+                      <a:endParaRPr lang="ko-KR" sz="1200" b="0" i="0" u="none" strike="noStrike">
+                        <a:solidFill>
+                          <a:srgbClr val="000000"/>
+                        </a:solidFill>
+                        <a:effectLst/>
+                        <a:latin typeface="D2Coding" panose="020B0609020101020101" pitchFamily="49" charset="-127"/>
+                        <a:ea typeface="D2Coding" panose="020B0609020101020101" pitchFamily="49" charset="-127"/>
+                      </a:endParaRPr>
+                    </a:p>
+                  </a:txBody>
+                  <a:tcPr marL="8763" marR="8763" marT="8763" marB="0" anchor="b"/>
+                </a:tc>
+                <a:tc>
+                  <a:txBody>
+                    <a:bodyPr/>
+                    <a:lstStyle/>
+                    <a:p>
+                      <a:pPr algn="r" fontAlgn="b">
+                        <a:buNone/>
+                      </a:pPr>
+                      <a:r>
+                        <a:rPr lang="ko-KR" sz="1200" u="none" strike="noStrike">
+                          <a:effectLst/>
+                          <a:latin typeface="D2Coding" panose="020B0609020101020101" pitchFamily="49" charset="-127"/>
+                          <a:ea typeface="D2Coding" panose="020B0609020101020101" pitchFamily="49" charset="-127"/>
+                        </a:rPr>
+                        <a:t>2</a:t>
+                      </a:r>
+                      <a:endParaRPr lang="ko-KR" sz="1200" b="0" i="0" u="none" strike="noStrike">
+                        <a:solidFill>
+                          <a:srgbClr val="000000"/>
+                        </a:solidFill>
+                        <a:effectLst/>
+                        <a:latin typeface="D2Coding" panose="020B0609020101020101" pitchFamily="49" charset="-127"/>
+                        <a:ea typeface="D2Coding" panose="020B0609020101020101" pitchFamily="49" charset="-127"/>
+                      </a:endParaRPr>
+                    </a:p>
+                  </a:txBody>
+                  <a:tcPr marL="8763" marR="8763" marT="8763" marB="0" anchor="b"/>
+                </a:tc>
+                <a:tc>
+                  <a:txBody>
+                    <a:bodyPr/>
+                    <a:lstStyle/>
+                    <a:p>
+                      <a:pPr algn="r" fontAlgn="b">
+                        <a:buNone/>
+                      </a:pPr>
+                      <a:r>
+                        <a:rPr lang="ko-KR" sz="1200" u="none" strike="noStrike">
+                          <a:effectLst/>
+                          <a:latin typeface="D2Coding" panose="020B0609020101020101" pitchFamily="49" charset="-127"/>
+                          <a:ea typeface="D2Coding" panose="020B0609020101020101" pitchFamily="49" charset="-127"/>
+                        </a:rPr>
+                        <a:t>5</a:t>
+                      </a:r>
+                      <a:endParaRPr lang="ko-KR" sz="1200" b="0" i="0" u="none" strike="noStrike">
+                        <a:solidFill>
+                          <a:srgbClr val="000000"/>
+                        </a:solidFill>
+                        <a:effectLst/>
+                        <a:latin typeface="D2Coding" panose="020B0609020101020101" pitchFamily="49" charset="-127"/>
+                        <a:ea typeface="D2Coding" panose="020B0609020101020101" pitchFamily="49" charset="-127"/>
+                      </a:endParaRPr>
+                    </a:p>
+                  </a:txBody>
+                  <a:tcPr marL="8763" marR="8763" marT="8763" marB="0" anchor="b">
+                    <a:lnR w="12700" cap="flat" cmpd="sng" algn="ctr">
+                      <a:solidFill>
+                        <a:schemeClr val="tx1"/>
+                      </a:solidFill>
+                      <a:prstDash val="solid"/>
+                      <a:round/>
+                      <a:headEnd type="none" w="med" len="med"/>
+                      <a:tailEnd type="none" w="med" len="med"/>
+                    </a:lnR>
+                  </a:tcPr>
+                </a:tc>
+                <a:extLst>
+                  <a:ext uri="{0D108BD9-81ED-4DB2-BD59-A6C34878D82A}">
+                    <a16:rowId xmlns:a16="http://schemas.microsoft.com/office/drawing/2014/main" val="3714608120"/>
+                  </a:ext>
+                </a:extLst>
+              </a:tr>
+              <a:tr h="232473">
+                <a:tc>
+                  <a:txBody>
+                    <a:bodyPr/>
+                    <a:lstStyle/>
+                    <a:p>
+                      <a:pPr algn="r" fontAlgn="b">
+                        <a:buNone/>
+                      </a:pPr>
+                      <a:r>
+                        <a:rPr lang="ko-KR" sz="1200" u="none" strike="noStrike">
+                          <a:effectLst/>
+                          <a:latin typeface="D2Coding" panose="020B0609020101020101" pitchFamily="49" charset="-127"/>
+                          <a:ea typeface="D2Coding" panose="020B0609020101020101" pitchFamily="49" charset="-127"/>
+                        </a:rPr>
+                        <a:t>0.02</a:t>
+                      </a:r>
+                      <a:endParaRPr lang="ko-KR" sz="1200" b="0" i="0" u="none" strike="noStrike">
+                        <a:solidFill>
+                          <a:srgbClr val="000000"/>
+                        </a:solidFill>
+                        <a:effectLst/>
+                        <a:latin typeface="D2Coding" panose="020B0609020101020101" pitchFamily="49" charset="-127"/>
+                        <a:ea typeface="D2Coding" panose="020B0609020101020101" pitchFamily="49" charset="-127"/>
+                      </a:endParaRPr>
+                    </a:p>
+                  </a:txBody>
+                  <a:tcPr marL="8763" marR="8763" marT="8763" marB="0" anchor="b">
+                    <a:lnL w="12700" cap="flat" cmpd="sng" algn="ctr">
+                      <a:solidFill>
+                        <a:schemeClr val="tx1"/>
+                      </a:solidFill>
+                      <a:prstDash val="solid"/>
+                      <a:round/>
+                      <a:headEnd type="none" w="med" len="med"/>
+                      <a:tailEnd type="none" w="med" len="med"/>
+                    </a:lnL>
+                  </a:tcPr>
+                </a:tc>
+                <a:tc>
+                  <a:txBody>
+                    <a:bodyPr/>
+                    <a:lstStyle/>
+                    <a:p>
+                      <a:pPr algn="r" fontAlgn="b">
+                        <a:buNone/>
+                      </a:pPr>
+                      <a:r>
+                        <a:rPr lang="ko-KR" sz="1200" u="none" strike="noStrike">
+                          <a:effectLst/>
+                          <a:latin typeface="D2Coding" panose="020B0609020101020101" pitchFamily="49" charset="-127"/>
+                          <a:ea typeface="D2Coding" panose="020B0609020101020101" pitchFamily="49" charset="-127"/>
+                        </a:rPr>
+                        <a:t>0.71</a:t>
+                      </a:r>
+                      <a:endParaRPr lang="ko-KR" sz="1200" b="0" i="0" u="none" strike="noStrike">
+                        <a:solidFill>
+                          <a:srgbClr val="000000"/>
+                        </a:solidFill>
+                        <a:effectLst/>
+                        <a:latin typeface="D2Coding" panose="020B0609020101020101" pitchFamily="49" charset="-127"/>
+                        <a:ea typeface="D2Coding" panose="020B0609020101020101" pitchFamily="49" charset="-127"/>
+                      </a:endParaRPr>
+                    </a:p>
+                  </a:txBody>
+                  <a:tcPr marL="8763" marR="8763" marT="8763" marB="0" anchor="b"/>
+                </a:tc>
+                <a:tc>
+                  <a:txBody>
+                    <a:bodyPr/>
+                    <a:lstStyle/>
+                    <a:p>
+                      <a:pPr algn="r" fontAlgn="b">
+                        <a:buNone/>
+                      </a:pPr>
+                      <a:r>
+                        <a:rPr lang="ko-KR" sz="1200" u="none" strike="noStrike">
+                          <a:effectLst/>
+                          <a:latin typeface="D2Coding" panose="020B0609020101020101" pitchFamily="49" charset="-127"/>
+                          <a:ea typeface="D2Coding" panose="020B0609020101020101" pitchFamily="49" charset="-127"/>
+                        </a:rPr>
+                        <a:t>0.28</a:t>
+                      </a:r>
+                      <a:endParaRPr lang="ko-KR" sz="1200" b="0" i="0" u="none" strike="noStrike">
+                        <a:solidFill>
+                          <a:srgbClr val="000000"/>
+                        </a:solidFill>
+                        <a:effectLst/>
+                        <a:latin typeface="D2Coding" panose="020B0609020101020101" pitchFamily="49" charset="-127"/>
+                        <a:ea typeface="D2Coding" panose="020B0609020101020101" pitchFamily="49" charset="-127"/>
+                      </a:endParaRPr>
+                    </a:p>
+                  </a:txBody>
+                  <a:tcPr marL="8763" marR="8763" marT="8763" marB="0" anchor="b"/>
+                </a:tc>
+                <a:tc>
+                  <a:txBody>
+                    <a:bodyPr/>
+                    <a:lstStyle/>
+                    <a:p>
+                      <a:pPr algn="r" fontAlgn="b">
+                        <a:buNone/>
+                      </a:pPr>
+                      <a:r>
+                        <a:rPr lang="ko-KR" sz="1200" u="none" strike="noStrike">
+                          <a:effectLst/>
+                          <a:latin typeface="D2Coding" panose="020B0609020101020101" pitchFamily="49" charset="-127"/>
+                          <a:ea typeface="D2Coding" panose="020B0609020101020101" pitchFamily="49" charset="-127"/>
+                        </a:rPr>
+                        <a:t>357</a:t>
+                      </a:r>
+                      <a:endParaRPr lang="ko-KR" sz="1200" b="0" i="0" u="none" strike="noStrike">
+                        <a:solidFill>
+                          <a:srgbClr val="000000"/>
+                        </a:solidFill>
+                        <a:effectLst/>
+                        <a:latin typeface="D2Coding" panose="020B0609020101020101" pitchFamily="49" charset="-127"/>
+                        <a:ea typeface="D2Coding" panose="020B0609020101020101" pitchFamily="49" charset="-127"/>
+                      </a:endParaRPr>
+                    </a:p>
+                  </a:txBody>
+                  <a:tcPr marL="8763" marR="8763" marT="8763" marB="0" anchor="b"/>
+                </a:tc>
+                <a:tc>
+                  <a:txBody>
+                    <a:bodyPr/>
+                    <a:lstStyle/>
+                    <a:p>
+                      <a:pPr algn="r" fontAlgn="b">
+                        <a:buNone/>
+                      </a:pPr>
+                      <a:r>
+                        <a:rPr lang="ko-KR" sz="1200" u="none" strike="noStrike">
+                          <a:effectLst/>
+                          <a:latin typeface="D2Coding" panose="020B0609020101020101" pitchFamily="49" charset="-127"/>
+                          <a:ea typeface="D2Coding" panose="020B0609020101020101" pitchFamily="49" charset="-127"/>
+                        </a:rPr>
+                        <a:t>136</a:t>
+                      </a:r>
+                      <a:endParaRPr lang="ko-KR" sz="1200" b="0" i="0" u="none" strike="noStrike">
+                        <a:solidFill>
+                          <a:srgbClr val="000000"/>
+                        </a:solidFill>
+                        <a:effectLst/>
+                        <a:latin typeface="D2Coding" panose="020B0609020101020101" pitchFamily="49" charset="-127"/>
+                        <a:ea typeface="D2Coding" panose="020B0609020101020101" pitchFamily="49" charset="-127"/>
+                      </a:endParaRPr>
+                    </a:p>
+                  </a:txBody>
+                  <a:tcPr marL="8763" marR="8763" marT="8763" marB="0" anchor="b"/>
+                </a:tc>
+                <a:tc>
+                  <a:txBody>
+                    <a:bodyPr/>
+                    <a:lstStyle/>
+                    <a:p>
+                      <a:pPr algn="r" fontAlgn="b">
+                        <a:buNone/>
+                      </a:pPr>
+                      <a:r>
+                        <a:rPr lang="ko-KR" sz="1200" u="none" strike="noStrike">
+                          <a:effectLst/>
+                          <a:latin typeface="D2Coding" panose="020B0609020101020101" pitchFamily="49" charset="-127"/>
+                          <a:ea typeface="D2Coding" panose="020B0609020101020101" pitchFamily="49" charset="-127"/>
+                        </a:rPr>
+                        <a:t>2</a:t>
+                      </a:r>
+                      <a:endParaRPr lang="ko-KR" sz="1200" b="0" i="0" u="none" strike="noStrike">
+                        <a:solidFill>
+                          <a:srgbClr val="000000"/>
+                        </a:solidFill>
+                        <a:effectLst/>
+                        <a:latin typeface="D2Coding" panose="020B0609020101020101" pitchFamily="49" charset="-127"/>
+                        <a:ea typeface="D2Coding" panose="020B0609020101020101" pitchFamily="49" charset="-127"/>
+                      </a:endParaRPr>
+                    </a:p>
+                  </a:txBody>
+                  <a:tcPr marL="8763" marR="8763" marT="8763" marB="0" anchor="b"/>
+                </a:tc>
+                <a:tc>
+                  <a:txBody>
+                    <a:bodyPr/>
+                    <a:lstStyle/>
+                    <a:p>
+                      <a:pPr algn="r" fontAlgn="b">
+                        <a:buNone/>
+                      </a:pPr>
+                      <a:r>
+                        <a:rPr lang="ko-KR" sz="1200" u="none" strike="noStrike">
+                          <a:effectLst/>
+                          <a:latin typeface="D2Coding" panose="020B0609020101020101" pitchFamily="49" charset="-127"/>
+                          <a:ea typeface="D2Coding" panose="020B0609020101020101" pitchFamily="49" charset="-127"/>
+                        </a:rPr>
+                        <a:t>5</a:t>
+                      </a:r>
+                      <a:endParaRPr lang="ko-KR" sz="1200" b="0" i="0" u="none" strike="noStrike">
+                        <a:solidFill>
+                          <a:srgbClr val="000000"/>
+                        </a:solidFill>
+                        <a:effectLst/>
+                        <a:latin typeface="D2Coding" panose="020B0609020101020101" pitchFamily="49" charset="-127"/>
+                        <a:ea typeface="D2Coding" panose="020B0609020101020101" pitchFamily="49" charset="-127"/>
+                      </a:endParaRPr>
+                    </a:p>
+                  </a:txBody>
+                  <a:tcPr marL="8763" marR="8763" marT="8763" marB="0" anchor="b">
+                    <a:lnR w="12700" cap="flat" cmpd="sng" algn="ctr">
+                      <a:solidFill>
+                        <a:schemeClr val="tx1"/>
+                      </a:solidFill>
+                      <a:prstDash val="solid"/>
+                      <a:round/>
+                      <a:headEnd type="none" w="med" len="med"/>
+                      <a:tailEnd type="none" w="med" len="med"/>
+                    </a:lnR>
+                  </a:tcPr>
+                </a:tc>
+                <a:extLst>
+                  <a:ext uri="{0D108BD9-81ED-4DB2-BD59-A6C34878D82A}">
+                    <a16:rowId xmlns:a16="http://schemas.microsoft.com/office/drawing/2014/main" val="1238215194"/>
+                  </a:ext>
+                </a:extLst>
+              </a:tr>
+              <a:tr h="232473">
+                <a:tc>
+                  <a:txBody>
+                    <a:bodyPr/>
+                    <a:lstStyle/>
+                    <a:p>
+                      <a:pPr algn="r" fontAlgn="b">
+                        <a:buNone/>
+                      </a:pPr>
+                      <a:r>
+                        <a:rPr lang="ko-KR" sz="1200" u="none" strike="noStrike">
+                          <a:effectLst/>
+                          <a:latin typeface="D2Coding" panose="020B0609020101020101" pitchFamily="49" charset="-127"/>
+                          <a:ea typeface="D2Coding" panose="020B0609020101020101" pitchFamily="49" charset="-127"/>
+                        </a:rPr>
+                        <a:t>0.01</a:t>
+                      </a:r>
+                      <a:endParaRPr lang="ko-KR" sz="1200" b="0" i="0" u="none" strike="noStrike">
+                        <a:solidFill>
+                          <a:srgbClr val="000000"/>
+                        </a:solidFill>
+                        <a:effectLst/>
+                        <a:latin typeface="D2Coding" panose="020B0609020101020101" pitchFamily="49" charset="-127"/>
+                        <a:ea typeface="D2Coding" panose="020B0609020101020101" pitchFamily="49" charset="-127"/>
+                      </a:endParaRPr>
+                    </a:p>
+                  </a:txBody>
+                  <a:tcPr marL="8763" marR="8763" marT="8763" marB="0" anchor="b">
+                    <a:lnL w="12700" cap="flat" cmpd="sng" algn="ctr">
+                      <a:solidFill>
+                        <a:schemeClr val="tx1"/>
+                      </a:solidFill>
+                      <a:prstDash val="solid"/>
+                      <a:round/>
+                      <a:headEnd type="none" w="med" len="med"/>
+                      <a:tailEnd type="none" w="med" len="med"/>
+                    </a:lnL>
+                  </a:tcPr>
+                </a:tc>
+                <a:tc>
+                  <a:txBody>
+                    <a:bodyPr/>
+                    <a:lstStyle/>
+                    <a:p>
+                      <a:pPr algn="r" fontAlgn="b">
+                        <a:buNone/>
+                      </a:pPr>
+                      <a:r>
+                        <a:rPr lang="ko-KR" sz="1200" u="none" strike="noStrike">
+                          <a:effectLst/>
+                          <a:latin typeface="D2Coding" panose="020B0609020101020101" pitchFamily="49" charset="-127"/>
+                          <a:ea typeface="D2Coding" panose="020B0609020101020101" pitchFamily="49" charset="-127"/>
+                        </a:rPr>
+                        <a:t>0.86</a:t>
+                      </a:r>
+                      <a:endParaRPr lang="ko-KR" sz="1200" b="0" i="0" u="none" strike="noStrike">
+                        <a:solidFill>
+                          <a:srgbClr val="000000"/>
+                        </a:solidFill>
+                        <a:effectLst/>
+                        <a:latin typeface="D2Coding" panose="020B0609020101020101" pitchFamily="49" charset="-127"/>
+                        <a:ea typeface="D2Coding" panose="020B0609020101020101" pitchFamily="49" charset="-127"/>
+                      </a:endParaRPr>
+                    </a:p>
+                  </a:txBody>
+                  <a:tcPr marL="8763" marR="8763" marT="8763" marB="0" anchor="b"/>
+                </a:tc>
+                <a:tc>
+                  <a:txBody>
+                    <a:bodyPr/>
+                    <a:lstStyle/>
+                    <a:p>
+                      <a:pPr algn="r" fontAlgn="b">
+                        <a:buNone/>
+                      </a:pPr>
+                      <a:r>
+                        <a:rPr lang="ko-KR" sz="1200" u="none" strike="noStrike">
+                          <a:effectLst/>
+                          <a:latin typeface="D2Coding" panose="020B0609020101020101" pitchFamily="49" charset="-127"/>
+                          <a:ea typeface="D2Coding" panose="020B0609020101020101" pitchFamily="49" charset="-127"/>
+                        </a:rPr>
+                        <a:t>0.52</a:t>
+                      </a:r>
+                      <a:endParaRPr lang="ko-KR" sz="1200" b="0" i="0" u="none" strike="noStrike">
+                        <a:solidFill>
+                          <a:srgbClr val="000000"/>
+                        </a:solidFill>
+                        <a:effectLst/>
+                        <a:latin typeface="D2Coding" panose="020B0609020101020101" pitchFamily="49" charset="-127"/>
+                        <a:ea typeface="D2Coding" panose="020B0609020101020101" pitchFamily="49" charset="-127"/>
+                      </a:endParaRPr>
+                    </a:p>
+                  </a:txBody>
+                  <a:tcPr marL="8763" marR="8763" marT="8763" marB="0" anchor="b"/>
+                </a:tc>
+                <a:tc>
+                  <a:txBody>
+                    <a:bodyPr/>
+                    <a:lstStyle/>
+                    <a:p>
+                      <a:pPr algn="r" fontAlgn="b">
+                        <a:buNone/>
+                      </a:pPr>
+                      <a:r>
+                        <a:rPr lang="ko-KR" sz="1200" u="none" strike="noStrike" dirty="0">
+                          <a:effectLst/>
+                          <a:latin typeface="D2Coding" panose="020B0609020101020101" pitchFamily="49" charset="-127"/>
+                          <a:ea typeface="D2Coding" panose="020B0609020101020101" pitchFamily="49" charset="-127"/>
+                        </a:rPr>
+                        <a:t>235</a:t>
+                      </a:r>
+                      <a:endParaRPr lang="ko-KR" sz="1200" b="0" i="0" u="none" strike="noStrike" dirty="0">
+                        <a:solidFill>
+                          <a:srgbClr val="000000"/>
+                        </a:solidFill>
+                        <a:effectLst/>
+                        <a:latin typeface="D2Coding" panose="020B0609020101020101" pitchFamily="49" charset="-127"/>
+                        <a:ea typeface="D2Coding" panose="020B0609020101020101" pitchFamily="49" charset="-127"/>
+                      </a:endParaRPr>
+                    </a:p>
+                  </a:txBody>
+                  <a:tcPr marL="8763" marR="8763" marT="8763" marB="0" anchor="b"/>
+                </a:tc>
+                <a:tc>
+                  <a:txBody>
+                    <a:bodyPr/>
+                    <a:lstStyle/>
+                    <a:p>
+                      <a:pPr algn="r" fontAlgn="b">
+                        <a:buNone/>
+                      </a:pPr>
+                      <a:r>
+                        <a:rPr lang="ko-KR" sz="1200" u="none" strike="noStrike">
+                          <a:effectLst/>
+                          <a:latin typeface="D2Coding" panose="020B0609020101020101" pitchFamily="49" charset="-127"/>
+                          <a:ea typeface="D2Coding" panose="020B0609020101020101" pitchFamily="49" charset="-127"/>
+                        </a:rPr>
+                        <a:t>258</a:t>
+                      </a:r>
+                      <a:endParaRPr lang="ko-KR" sz="1200" b="0" i="0" u="none" strike="noStrike">
+                        <a:solidFill>
+                          <a:srgbClr val="000000"/>
+                        </a:solidFill>
+                        <a:effectLst/>
+                        <a:latin typeface="D2Coding" panose="020B0609020101020101" pitchFamily="49" charset="-127"/>
+                        <a:ea typeface="D2Coding" panose="020B0609020101020101" pitchFamily="49" charset="-127"/>
+                      </a:endParaRPr>
+                    </a:p>
+                  </a:txBody>
+                  <a:tcPr marL="8763" marR="8763" marT="8763" marB="0" anchor="b"/>
+                </a:tc>
+                <a:tc>
+                  <a:txBody>
+                    <a:bodyPr/>
+                    <a:lstStyle/>
+                    <a:p>
+                      <a:pPr algn="r" fontAlgn="b">
+                        <a:buNone/>
+                      </a:pPr>
+                      <a:r>
+                        <a:rPr lang="ko-KR" sz="1200" u="none" strike="noStrike">
+                          <a:effectLst/>
+                          <a:latin typeface="D2Coding" panose="020B0609020101020101" pitchFamily="49" charset="-127"/>
+                          <a:ea typeface="D2Coding" panose="020B0609020101020101" pitchFamily="49" charset="-127"/>
+                        </a:rPr>
+                        <a:t>1</a:t>
+                      </a:r>
+                      <a:endParaRPr lang="ko-KR" sz="1200" b="0" i="0" u="none" strike="noStrike">
+                        <a:solidFill>
+                          <a:srgbClr val="000000"/>
+                        </a:solidFill>
+                        <a:effectLst/>
+                        <a:latin typeface="D2Coding" panose="020B0609020101020101" pitchFamily="49" charset="-127"/>
+                        <a:ea typeface="D2Coding" panose="020B0609020101020101" pitchFamily="49" charset="-127"/>
+                      </a:endParaRPr>
+                    </a:p>
+                  </a:txBody>
+                  <a:tcPr marL="8763" marR="8763" marT="8763" marB="0" anchor="b"/>
+                </a:tc>
+                <a:tc>
+                  <a:txBody>
+                    <a:bodyPr/>
+                    <a:lstStyle/>
+                    <a:p>
+                      <a:pPr algn="r" fontAlgn="b">
+                        <a:buNone/>
+                      </a:pPr>
+                      <a:r>
+                        <a:rPr lang="ko-KR" sz="1200" u="none" strike="noStrike">
+                          <a:effectLst/>
+                          <a:latin typeface="D2Coding" panose="020B0609020101020101" pitchFamily="49" charset="-127"/>
+                          <a:ea typeface="D2Coding" panose="020B0609020101020101" pitchFamily="49" charset="-127"/>
+                        </a:rPr>
+                        <a:t>6</a:t>
+                      </a:r>
+                      <a:endParaRPr lang="ko-KR" sz="1200" b="0" i="0" u="none" strike="noStrike">
+                        <a:solidFill>
+                          <a:srgbClr val="000000"/>
+                        </a:solidFill>
+                        <a:effectLst/>
+                        <a:latin typeface="D2Coding" panose="020B0609020101020101" pitchFamily="49" charset="-127"/>
+                        <a:ea typeface="D2Coding" panose="020B0609020101020101" pitchFamily="49" charset="-127"/>
+                      </a:endParaRPr>
+                    </a:p>
+                  </a:txBody>
+                  <a:tcPr marL="8763" marR="8763" marT="8763" marB="0" anchor="b">
+                    <a:lnR w="12700" cap="flat" cmpd="sng" algn="ctr">
+                      <a:solidFill>
+                        <a:schemeClr val="tx1"/>
+                      </a:solidFill>
+                      <a:prstDash val="solid"/>
+                      <a:round/>
+                      <a:headEnd type="none" w="med" len="med"/>
+                      <a:tailEnd type="none" w="med" len="med"/>
+                    </a:lnR>
+                  </a:tcPr>
+                </a:tc>
+                <a:extLst>
+                  <a:ext uri="{0D108BD9-81ED-4DB2-BD59-A6C34878D82A}">
+                    <a16:rowId xmlns:a16="http://schemas.microsoft.com/office/drawing/2014/main" val="3304559255"/>
+                  </a:ext>
+                </a:extLst>
+              </a:tr>
+              <a:tr h="232473">
+                <a:tc>
+                  <a:txBody>
+                    <a:bodyPr/>
+                    <a:lstStyle/>
+                    <a:p>
+                      <a:pPr algn="r" fontAlgn="b">
+                        <a:buNone/>
+                      </a:pPr>
+                      <a:r>
+                        <a:rPr lang="ko-KR" sz="1200" u="none" strike="noStrike" dirty="0">
+                          <a:effectLst/>
+                          <a:latin typeface="D2Coding" panose="020B0609020101020101" pitchFamily="49" charset="-127"/>
+                          <a:ea typeface="D2Coding" panose="020B0609020101020101" pitchFamily="49" charset="-127"/>
+                        </a:rPr>
+                        <a:t>0</a:t>
+                      </a:r>
+                      <a:r>
+                        <a:rPr lang="en-US" altLang="ko-KR" sz="1200" u="none" strike="noStrike" dirty="0">
+                          <a:effectLst/>
+                          <a:latin typeface="D2Coding" panose="020B0609020101020101" pitchFamily="49" charset="-127"/>
+                          <a:ea typeface="D2Coding" panose="020B0609020101020101" pitchFamily="49" charset="-127"/>
+                        </a:rPr>
+                        <a:t>.00</a:t>
+                      </a:r>
+                      <a:endParaRPr lang="ko-KR" sz="1200" b="0" i="0" u="none" strike="noStrike" dirty="0">
+                        <a:solidFill>
+                          <a:srgbClr val="000000"/>
+                        </a:solidFill>
+                        <a:effectLst/>
+                        <a:latin typeface="D2Coding" panose="020B0609020101020101" pitchFamily="49" charset="-127"/>
+                        <a:ea typeface="D2Coding" panose="020B0609020101020101" pitchFamily="49" charset="-127"/>
+                      </a:endParaRPr>
+                    </a:p>
+                  </a:txBody>
+                  <a:tcPr marL="8763" marR="8763" marT="8763" marB="0" anchor="b">
+                    <a:lnL w="12700" cap="flat" cmpd="sng" algn="ctr">
+                      <a:solidFill>
+                        <a:schemeClr val="tx1"/>
+                      </a:solidFill>
+                      <a:prstDash val="solid"/>
+                      <a:round/>
+                      <a:headEnd type="none" w="med" len="med"/>
+                      <a:tailEnd type="none" w="med" len="med"/>
+                    </a:lnL>
+                    <a:lnB w="12700" cap="flat" cmpd="sng" algn="ctr">
+                      <a:solidFill>
+                        <a:schemeClr val="tx1"/>
+                      </a:solidFill>
+                      <a:prstDash val="solid"/>
+                      <a:round/>
+                      <a:headEnd type="none" w="med" len="med"/>
+                      <a:tailEnd type="none" w="med" len="med"/>
+                    </a:lnB>
+                  </a:tcPr>
+                </a:tc>
+                <a:tc>
+                  <a:txBody>
+                    <a:bodyPr/>
+                    <a:lstStyle/>
+                    <a:p>
+                      <a:pPr algn="r" fontAlgn="b">
+                        <a:buNone/>
+                      </a:pPr>
+                      <a:r>
+                        <a:rPr lang="ko-KR" sz="1200" u="none" strike="noStrike">
+                          <a:effectLst/>
+                          <a:latin typeface="D2Coding" panose="020B0609020101020101" pitchFamily="49" charset="-127"/>
+                          <a:ea typeface="D2Coding" panose="020B0609020101020101" pitchFamily="49" charset="-127"/>
+                        </a:rPr>
+                        <a:t>1.00</a:t>
+                      </a:r>
+                      <a:endParaRPr lang="ko-KR" sz="1200" b="0" i="0" u="none" strike="noStrike">
+                        <a:solidFill>
+                          <a:srgbClr val="000000"/>
+                        </a:solidFill>
+                        <a:effectLst/>
+                        <a:latin typeface="D2Coding" panose="020B0609020101020101" pitchFamily="49" charset="-127"/>
+                        <a:ea typeface="D2Coding" panose="020B0609020101020101" pitchFamily="49" charset="-127"/>
+                      </a:endParaRPr>
+                    </a:p>
+                  </a:txBody>
+                  <a:tcPr marL="8763" marR="8763" marT="8763" marB="0" anchor="b">
+                    <a:lnB w="12700" cap="flat" cmpd="sng" algn="ctr">
+                      <a:solidFill>
+                        <a:schemeClr val="tx1"/>
+                      </a:solidFill>
+                      <a:prstDash val="solid"/>
+                      <a:round/>
+                      <a:headEnd type="none" w="med" len="med"/>
+                      <a:tailEnd type="none" w="med" len="med"/>
+                    </a:lnB>
+                  </a:tcPr>
+                </a:tc>
+                <a:tc>
+                  <a:txBody>
+                    <a:bodyPr/>
+                    <a:lstStyle/>
+                    <a:p>
+                      <a:pPr algn="r" fontAlgn="b">
+                        <a:buNone/>
+                      </a:pPr>
+                      <a:r>
+                        <a:rPr lang="ko-KR" sz="1200" u="none" strike="noStrike">
+                          <a:effectLst/>
+                          <a:latin typeface="D2Coding" panose="020B0609020101020101" pitchFamily="49" charset="-127"/>
+                          <a:ea typeface="D2Coding" panose="020B0609020101020101" pitchFamily="49" charset="-127"/>
+                        </a:rPr>
+                        <a:t>1.00</a:t>
+                      </a:r>
+                      <a:endParaRPr lang="ko-KR" sz="1200" b="0" i="0" u="none" strike="noStrike">
+                        <a:solidFill>
+                          <a:srgbClr val="000000"/>
+                        </a:solidFill>
+                        <a:effectLst/>
+                        <a:latin typeface="D2Coding" panose="020B0609020101020101" pitchFamily="49" charset="-127"/>
+                        <a:ea typeface="D2Coding" panose="020B0609020101020101" pitchFamily="49" charset="-127"/>
+                      </a:endParaRPr>
+                    </a:p>
+                  </a:txBody>
+                  <a:tcPr marL="8763" marR="8763" marT="8763" marB="0" anchor="b">
+                    <a:lnB w="12700" cap="flat" cmpd="sng" algn="ctr">
+                      <a:solidFill>
+                        <a:schemeClr val="tx1"/>
+                      </a:solidFill>
+                      <a:prstDash val="solid"/>
+                      <a:round/>
+                      <a:headEnd type="none" w="med" len="med"/>
+                      <a:tailEnd type="none" w="med" len="med"/>
+                    </a:lnB>
+                  </a:tcPr>
+                </a:tc>
+                <a:tc>
+                  <a:txBody>
+                    <a:bodyPr/>
+                    <a:lstStyle/>
+                    <a:p>
+                      <a:pPr algn="r" fontAlgn="b">
+                        <a:buNone/>
+                      </a:pPr>
+                      <a:r>
+                        <a:rPr lang="ko-KR" sz="1200" u="none" strike="noStrike">
+                          <a:effectLst/>
+                          <a:latin typeface="D2Coding" panose="020B0609020101020101" pitchFamily="49" charset="-127"/>
+                          <a:ea typeface="D2Coding" panose="020B0609020101020101" pitchFamily="49" charset="-127"/>
+                        </a:rPr>
+                        <a:t>0</a:t>
+                      </a:r>
+                      <a:endParaRPr lang="ko-KR" sz="1200" b="0" i="0" u="none" strike="noStrike">
+                        <a:solidFill>
+                          <a:srgbClr val="000000"/>
+                        </a:solidFill>
+                        <a:effectLst/>
+                        <a:latin typeface="D2Coding" panose="020B0609020101020101" pitchFamily="49" charset="-127"/>
+                        <a:ea typeface="D2Coding" panose="020B0609020101020101" pitchFamily="49" charset="-127"/>
+                      </a:endParaRPr>
+                    </a:p>
+                  </a:txBody>
+                  <a:tcPr marL="8763" marR="8763" marT="8763" marB="0" anchor="b">
+                    <a:lnB w="12700" cap="flat" cmpd="sng" algn="ctr">
+                      <a:solidFill>
+                        <a:schemeClr val="tx1"/>
+                      </a:solidFill>
+                      <a:prstDash val="solid"/>
+                      <a:round/>
+                      <a:headEnd type="none" w="med" len="med"/>
+                      <a:tailEnd type="none" w="med" len="med"/>
+                    </a:lnB>
+                  </a:tcPr>
+                </a:tc>
+                <a:tc>
+                  <a:txBody>
+                    <a:bodyPr/>
+                    <a:lstStyle/>
+                    <a:p>
+                      <a:pPr algn="r" fontAlgn="b">
+                        <a:buNone/>
+                      </a:pPr>
+                      <a:r>
+                        <a:rPr lang="ko-KR" sz="1200" u="none" strike="noStrike">
+                          <a:effectLst/>
+                          <a:latin typeface="D2Coding" panose="020B0609020101020101" pitchFamily="49" charset="-127"/>
+                          <a:ea typeface="D2Coding" panose="020B0609020101020101" pitchFamily="49" charset="-127"/>
+                        </a:rPr>
+                        <a:t>493</a:t>
+                      </a:r>
+                      <a:endParaRPr lang="ko-KR" sz="1200" b="0" i="0" u="none" strike="noStrike">
+                        <a:solidFill>
+                          <a:srgbClr val="000000"/>
+                        </a:solidFill>
+                        <a:effectLst/>
+                        <a:latin typeface="D2Coding" panose="020B0609020101020101" pitchFamily="49" charset="-127"/>
+                        <a:ea typeface="D2Coding" panose="020B0609020101020101" pitchFamily="49" charset="-127"/>
+                      </a:endParaRPr>
+                    </a:p>
+                  </a:txBody>
+                  <a:tcPr marL="8763" marR="8763" marT="8763" marB="0" anchor="b">
+                    <a:lnB w="12700" cap="flat" cmpd="sng" algn="ctr">
+                      <a:solidFill>
+                        <a:schemeClr val="tx1"/>
+                      </a:solidFill>
+                      <a:prstDash val="solid"/>
+                      <a:round/>
+                      <a:headEnd type="none" w="med" len="med"/>
+                      <a:tailEnd type="none" w="med" len="med"/>
+                    </a:lnB>
+                  </a:tcPr>
+                </a:tc>
+                <a:tc>
+                  <a:txBody>
+                    <a:bodyPr/>
+                    <a:lstStyle/>
+                    <a:p>
+                      <a:pPr algn="r" fontAlgn="b">
+                        <a:buNone/>
+                      </a:pPr>
+                      <a:r>
+                        <a:rPr lang="ko-KR" sz="1200" u="none" strike="noStrike">
+                          <a:effectLst/>
+                          <a:latin typeface="D2Coding" panose="020B0609020101020101" pitchFamily="49" charset="-127"/>
+                          <a:ea typeface="D2Coding" panose="020B0609020101020101" pitchFamily="49" charset="-127"/>
+                        </a:rPr>
+                        <a:t>0</a:t>
+                      </a:r>
+                      <a:endParaRPr lang="ko-KR" sz="1200" b="0" i="0" u="none" strike="noStrike">
+                        <a:solidFill>
+                          <a:srgbClr val="000000"/>
+                        </a:solidFill>
+                        <a:effectLst/>
+                        <a:latin typeface="D2Coding" panose="020B0609020101020101" pitchFamily="49" charset="-127"/>
+                        <a:ea typeface="D2Coding" panose="020B0609020101020101" pitchFamily="49" charset="-127"/>
+                      </a:endParaRPr>
+                    </a:p>
+                  </a:txBody>
+                  <a:tcPr marL="8763" marR="8763" marT="8763" marB="0" anchor="b">
+                    <a:lnB w="12700" cap="flat" cmpd="sng" algn="ctr">
+                      <a:solidFill>
+                        <a:schemeClr val="tx1"/>
+                      </a:solidFill>
+                      <a:prstDash val="solid"/>
+                      <a:round/>
+                      <a:headEnd type="none" w="med" len="med"/>
+                      <a:tailEnd type="none" w="med" len="med"/>
+                    </a:lnB>
+                  </a:tcPr>
+                </a:tc>
+                <a:tc>
+                  <a:txBody>
+                    <a:bodyPr/>
+                    <a:lstStyle/>
+                    <a:p>
+                      <a:pPr algn="r" fontAlgn="b">
+                        <a:buNone/>
+                      </a:pPr>
+                      <a:r>
+                        <a:rPr lang="ko-KR" sz="1200" u="none" strike="noStrike" dirty="0">
+                          <a:effectLst/>
+                          <a:latin typeface="D2Coding" panose="020B0609020101020101" pitchFamily="49" charset="-127"/>
+                          <a:ea typeface="D2Coding" panose="020B0609020101020101" pitchFamily="49" charset="-127"/>
+                        </a:rPr>
+                        <a:t>7</a:t>
+                      </a:r>
+                      <a:endParaRPr lang="ko-KR" sz="1200" b="0" i="0" u="none" strike="noStrike" dirty="0">
+                        <a:solidFill>
+                          <a:srgbClr val="000000"/>
+                        </a:solidFill>
+                        <a:effectLst/>
+                        <a:latin typeface="D2Coding" panose="020B0609020101020101" pitchFamily="49" charset="-127"/>
+                        <a:ea typeface="D2Coding" panose="020B0609020101020101" pitchFamily="49" charset="-127"/>
+                      </a:endParaRPr>
+                    </a:p>
+                  </a:txBody>
+                  <a:tcPr marL="8763" marR="8763" marT="8763" marB="0" anchor="b">
+                    <a:lnR w="12700" cap="flat" cmpd="sng" algn="ctr">
+                      <a:solidFill>
+                        <a:schemeClr val="tx1"/>
+                      </a:solidFill>
+                      <a:prstDash val="solid"/>
+                      <a:round/>
+                      <a:headEnd type="none" w="med" len="med"/>
+                      <a:tailEnd type="none" w="med" len="med"/>
+                    </a:lnR>
+                    <a:lnB w="12700" cap="flat" cmpd="sng" algn="ctr">
+                      <a:solidFill>
+                        <a:schemeClr val="tx1"/>
+                      </a:solidFill>
+                      <a:prstDash val="solid"/>
+                      <a:round/>
+                      <a:headEnd type="none" w="med" len="med"/>
+                      <a:tailEnd type="none" w="med" len="med"/>
+                    </a:lnB>
+                  </a:tcPr>
+                </a:tc>
+                <a:extLst>
+                  <a:ext uri="{0D108BD9-81ED-4DB2-BD59-A6C34878D82A}">
+                    <a16:rowId xmlns:a16="http://schemas.microsoft.com/office/drawing/2014/main" val="2607474187"/>
+                  </a:ext>
+                </a:extLst>
+              </a:tr>
+            </a:tbl>
+          </a:graphicData>
+        </a:graphic>
+      </p:graphicFrame>
+    </p:spTree>
+    <p:extLst>
+      <p:ext uri="{BB962C8B-B14F-4D97-AF65-F5344CB8AC3E}">
+        <p14:creationId xmlns:p14="http://schemas.microsoft.com/office/powerpoint/2010/main" val="892308457"/>
+      </p:ext>
+    </p:extLst>
+  </p:cSld>
+  <p:clrMapOvr>
+    <a:masterClrMapping/>
+  </p:clrMapOvr>
+</p:sld>
+</file>
+
+<file path=ppt/slides/slide8.xml><?xml version="1.0" encoding="utf-8"?>
+<p:sld xmlns:a="http://schemas.openxmlformats.org/drawingml/2006/main" xmlns:r="http://schemas.openxmlformats.org/officeDocument/2006/relationships" xmlns:p="http://schemas.openxmlformats.org/presentationml/2006/main">
+  <p:cSld>
+    <p:spTree>
+      <p:nvGrpSpPr>
+        <p:cNvPr id="1" name="">
+          <a:extLst>
+            <a:ext uri="{FF2B5EF4-FFF2-40B4-BE49-F238E27FC236}">
               <a16:creationId xmlns:a16="http://schemas.microsoft.com/office/drawing/2014/main" id="{0F2232AD-82AE-A19D-E404-28AFEC3E9718}"/>
             </a:ext>
           </a:extLst>
@@ -4862,7 +8071,7 @@
             <a:fld id="{D57F1E4F-1CFF-5643-939E-217C01CDF565}" type="slidenum">
               <a:rPr lang="en-US" smtClean="0"/>
               <a:pPr/>
-              <a:t>7</a:t>
+              <a:t>8</a:t>
             </a:fld>
             <a:endParaRPr lang="en-US" dirty="0"/>
           </a:p>
@@ -5029,8 +8238,8 @@
         </p:blipFill>
         <p:spPr>
           <a:xfrm>
-            <a:off x="1014921" y="2129671"/>
-            <a:ext cx="6134847" cy="3906590"/>
+            <a:off x="2348170" y="2288440"/>
+            <a:ext cx="5010270" cy="3190474"/>
           </a:xfrm>
           <a:prstGeom prst="rect">
             <a:avLst/>
